--- a/KHBD_Tin_học/Lớp_5/Tuần_04/Slide_Tin_hoc_Lớp_5_Tiet03_Bai_3_Tim_kiem_thong_tin.pptx
+++ b/KHBD_Tin_học/Lớp_5/Tuần_04/Slide_Tin_hoc_Lớp_5_Tiet03_Bai_3_Tim_kiem_thong_tin.pptx
@@ -5,16 +5,13 @@
     <p:sldMasterId id="2147483648" r:id="rId1"/>
   </p:sldMasterIdLst>
   <p:sldIdLst>
-    <p:sldId id="256" r:id="rId2"/>
+    <p:sldId id="256" r:id="rId5"/>
+    <p:sldId id="257" r:id="rId4"/>
     <p:sldId id="258" r:id="rId3"/>
-    <p:sldId id="259" r:id="rId4"/>
-    <p:sldId id="257" r:id="rId5"/>
+    <p:sldId id="259" r:id="rId2"/>
     <p:sldId id="260" r:id="rId10"/>
     <p:sldId id="261" r:id="rId11"/>
     <p:sldId id="262" r:id="rId12"/>
-    <p:sldId id="263" r:id="rId13"/>
-    <p:sldId id="264" r:id="rId14"/>
-    <p:sldId id="265" r:id="rId15"/>
   </p:sldIdLst>
   <p:sldSz cx="12192000" cy="6858000"/>
   <p:notesSz cx="6858000" cy="9144000"/>
@@ -3387,119 +3384,6 @@
 </file>
 
 <file path=ppt/slides/slide1.xml><?xml version="1.0" encoding="utf-8"?>
-<p:sld xmlns:a="http://schemas.openxmlformats.org/drawingml/2006/main" xmlns:r="http://schemas.openxmlformats.org/officeDocument/2006/relationships" xmlns:p="http://schemas.openxmlformats.org/presentationml/2006/main">
-  <p:cSld>
-    <p:spTree>
-      <p:nvGrpSpPr>
-        <p:cNvPr id="1" name=""/>
-        <p:cNvGrpSpPr/>
-        <p:nvPr/>
-      </p:nvGrpSpPr>
-      <p:grpSpPr>
-        <a:xfrm>
-          <a:off x="0" y="0"/>
-          <a:ext cx="0" cy="0"/>
-          <a:chOff x="0" y="0"/>
-          <a:chExt cx="0" cy="0"/>
-        </a:xfrm>
-      </p:grpSpPr>
-      <p:sp>
-        <p:nvSpPr>
-          <p:cNvPr id="5" name="TextBox 5">
-            <a:extLst>
-              <a:ext uri="{FF2B5EF4-FFF2-40B4-BE49-F238E27FC236}">
-                <a16:creationId xmlns:a16="http://schemas.microsoft.com/office/drawing/2014/main" id="{261CADFC-E468-A9CF-CA9D-3603C11068A9}"/>
-              </a:ext>
-            </a:extLst>
-          </p:cNvPr>
-          <p:cNvSpPr txBox="1"/>
-          <p:nvPr/>
-        </p:nvSpPr>
-        <p:spPr>
-          <a:xfrm>
-            <a:off x="844216" y="471493"/>
-            <a:ext cx="10503568" cy="1128707"/>
-          </a:xfrm>
-          <a:prstGeom prst="rect">
-            <a:avLst/>
-          </a:prstGeom>
-        </p:spPr>
-        <p:txBody>
-          <a:bodyPr wrap="square" lIns="0" tIns="0" rIns="0" bIns="0" rtlCol="0" anchor="t">
-            <a:spAutoFit/>
-          </a:bodyPr>
-          <a:lstStyle/>
-          <a:p>
-            <a:pPr algn="ctr">
-              <a:lnSpc>
-                <a:spcPts val="10360"/>
-              </a:lnSpc>
-            </a:pPr>
-            <a:r>
-              <a:rPr lang="en-US" sz="4400" b="1" dirty="0">
-                <a:solidFill>
-                  <a:srgbClr val="244498"/>
-                </a:solidFill>
-                <a:latin typeface="Arial" panose="020B0604020202020204" pitchFamily="34" charset="0"/>
-                <a:ea typeface="Crimson Pro Bold"/>
-                <a:cs typeface="Arial" panose="020B0604020202020204" pitchFamily="34" charset="0"/>
-                <a:sym typeface="Crimson Pro Bold"/>
-              </a:rPr>
-              <a:t>TRƯỜNG TIỂU HỌC VÀ THCS UNIGO</a:t>
-            </a:r>
-          </a:p>
-        </p:txBody>
-      </p:sp>
-      <p:pic>
-        <p:nvPicPr>
-          <p:cNvPr id="7" name="Picture 6">
-            <a:extLst>
-              <a:ext uri="{FF2B5EF4-FFF2-40B4-BE49-F238E27FC236}">
-                <a16:creationId xmlns:a16="http://schemas.microsoft.com/office/drawing/2014/main" id="{BACCC6F9-9D0B-8FA1-C7A3-6C656AB9CDE5}"/>
-              </a:ext>
-            </a:extLst>
-          </p:cNvPr>
-          <p:cNvPicPr>
-            <a:picLocks noChangeAspect="1"/>
-          </p:cNvPicPr>
-          <p:nvPr/>
-        </p:nvPicPr>
-        <p:blipFill>
-          <a:blip r:embed="rId2" cstate="print">
-            <a:extLst>
-              <a:ext uri="{28A0092B-C50C-407E-A947-70E740481C1C}">
-                <a14:useLocalDpi xmlns:a14="http://schemas.microsoft.com/office/drawing/2010/main" val="0"/>
-              </a:ext>
-            </a:extLst>
-          </a:blip>
-          <a:stretch>
-            <a:fillRect/>
-          </a:stretch>
-        </p:blipFill>
-        <p:spPr>
-          <a:xfrm>
-            <a:off x="152400" y="1780673"/>
-            <a:ext cx="11887200" cy="3764661"/>
-          </a:xfrm>
-          <a:prstGeom prst="rect">
-            <a:avLst/>
-          </a:prstGeom>
-        </p:spPr>
-      </p:pic>
-    </p:spTree>
-    <p:extLst>
-      <p:ext uri="{BB962C8B-B14F-4D97-AF65-F5344CB8AC3E}">
-        <p14:creationId xmlns:p14="http://schemas.microsoft.com/office/powerpoint/2010/main" val="1786245849"/>
-      </p:ext>
-    </p:extLst>
-  </p:cSld>
-  <p:clrMapOvr>
-    <a:masterClrMapping/>
-  </p:clrMapOvr>
-</p:sld>
-</file>
-
-<file path=ppt/slides/slide10.xml><?xml version="1.0" encoding="utf-8"?>
 <p:sld xmlns:a="http://schemas.openxmlformats.org/drawingml/2006/main" xmlns:p="http://schemas.openxmlformats.org/presentationml/2006/main" xmlns:r="http://schemas.openxmlformats.org/officeDocument/2006/relationships">
   <p:cSld>
     <p:spTree>
@@ -3554,14 +3438,102 @@
       </p:sp>
       <p:sp>
         <p:nvSpPr>
-          <p:cNvPr id="3" name="TextBox 2"/>
+          <p:cNvPr id="3" name="Rounded Rectangle 2"/>
+          <p:cNvSpPr/>
+          <p:nvPr/>
+        </p:nvSpPr>
+        <p:spPr>
+          <a:xfrm>
+            <a:off x="1097280" y="1463040"/>
+            <a:ext cx="9994392" cy="3657599"/>
+          </a:xfrm>
+          <a:prstGeom prst="roundRect">
+            <a:avLst/>
+          </a:prstGeom>
+          <a:solidFill>
+            <a:srgbClr val="FFFFFF"/>
+          </a:solidFill>
+          <a:ln w="19050">
+            <a:solidFill>
+              <a:srgbClr val="EC4899"/>
+            </a:solidFill>
+          </a:ln>
+        </p:spPr>
+        <p:style>
+          <a:lnRef idx="1">
+            <a:schemeClr val="accent1"/>
+          </a:lnRef>
+          <a:fillRef idx="3">
+            <a:schemeClr val="accent1"/>
+          </a:fillRef>
+          <a:effectRef idx="2">
+            <a:schemeClr val="accent1"/>
+          </a:effectRef>
+          <a:fontRef idx="minor">
+            <a:schemeClr val="lt1"/>
+          </a:fontRef>
+        </p:style>
+        <p:txBody>
+          <a:bodyPr rtlCol="0" anchor="ctr"/>
+          <a:lstStyle/>
+          <a:p>
+            <a:pPr algn="ctr"/>
+          </a:p>
+        </p:txBody>
+      </p:sp>
+      <p:sp>
+        <p:nvSpPr>
+          <p:cNvPr id="4" name="Rounded Rectangle 3"/>
+          <p:cNvSpPr/>
+          <p:nvPr/>
+        </p:nvSpPr>
+        <p:spPr>
+          <a:xfrm>
+            <a:off x="1097280" y="1463040"/>
+            <a:ext cx="9994392" cy="182879"/>
+          </a:xfrm>
+          <a:prstGeom prst="roundRect">
+            <a:avLst/>
+          </a:prstGeom>
+          <a:solidFill>
+            <a:srgbClr val="EC4899"/>
+          </a:solidFill>
+          <a:ln>
+            <a:noFill/>
+          </a:ln>
+        </p:spPr>
+        <p:style>
+          <a:lnRef idx="1">
+            <a:schemeClr val="accent1"/>
+          </a:lnRef>
+          <a:fillRef idx="3">
+            <a:schemeClr val="accent1"/>
+          </a:fillRef>
+          <a:effectRef idx="2">
+            <a:schemeClr val="accent1"/>
+          </a:effectRef>
+          <a:fontRef idx="minor">
+            <a:schemeClr val="lt1"/>
+          </a:fontRef>
+        </p:style>
+        <p:txBody>
+          <a:bodyPr rtlCol="0" anchor="ctr"/>
+          <a:lstStyle/>
+          <a:p>
+            <a:pPr algn="ctr"/>
+          </a:p>
+        </p:txBody>
+      </p:sp>
+      <p:sp>
+        <p:nvSpPr>
+          <p:cNvPr id="5" name="TextBox 4"/>
           <p:cNvSpPr txBox="1"/>
           <p:nvPr/>
         </p:nvSpPr>
         <p:spPr>
           <a:xfrm>
-            <a:off x="914400" y="1828800"/>
-            <a:ext cx="10360152" cy="1097280"/>
+            <a:off x="1371600" y="1828800"/>
+            <a:ext cx="9445752" cy="457200"/>
           </a:xfrm>
           <a:prstGeom prst="rect">
             <a:avLst/>
@@ -3569,13 +3541,268 @@
           <a:noFill/>
         </p:spPr>
         <p:txBody>
-          <a:bodyPr wrap="square" lIns="73152" rIns="73152">
+          <a:bodyPr wrap="square" lIns="73152" rIns="73152" tIns="54864" bIns="54864">
             <a:spAutoFit/>
           </a:bodyPr>
           <a:lstStyle/>
           <a:p>
             <a:pPr algn="ctr">
-              <a:defRPr sz="3600" b="1">
+              <a:defRPr sz="1500" b="1">
+                <a:solidFill>
+                  <a:srgbClr val="BE185D"/>
+                </a:solidFill>
+                <a:latin typeface="Arial"/>
+              </a:defRPr>
+            </a:pPr>
+            <a:r>
+              <a:t>TRƯỜNG TIỂU HỌC &amp; THCS UNIGO</a:t>
+            </a:r>
+          </a:p>
+        </p:txBody>
+      </p:sp>
+      <p:sp>
+        <p:nvSpPr>
+          <p:cNvPr id="6" name="TextBox 5"/>
+          <p:cNvSpPr txBox="1"/>
+          <p:nvPr/>
+        </p:nvSpPr>
+        <p:spPr>
+          <a:xfrm>
+            <a:off x="1371600" y="2377440"/>
+            <a:ext cx="9445752" cy="1280160"/>
+          </a:xfrm>
+          <a:prstGeom prst="rect">
+            <a:avLst/>
+          </a:prstGeom>
+          <a:noFill/>
+        </p:spPr>
+        <p:txBody>
+          <a:bodyPr wrap="square" lIns="73152" rIns="73152" tIns="54864" bIns="54864">
+            <a:spAutoFit/>
+          </a:bodyPr>
+          <a:lstStyle/>
+          <a:p>
+            <a:pPr algn="ctr">
+              <a:defRPr sz="2800" b="1">
+                <a:solidFill>
+                  <a:srgbClr val="0F172A"/>
+                </a:solidFill>
+                <a:latin typeface="Arial"/>
+              </a:defRPr>
+            </a:pPr>
+            <a:r>
+              <a:t>BÀI 3. TÌM KIẾM THÔNG TIN</a:t>
+            </a:r>
+            <a:br/>
+            <a:r>
+              <a:t>TRONG GIẢI QUYẾT VẤN ĐỀ</a:t>
+            </a:r>
+          </a:p>
+        </p:txBody>
+      </p:sp>
+      <p:sp>
+        <p:nvSpPr>
+          <p:cNvPr id="7" name="TextBox 6"/>
+          <p:cNvSpPr txBox="1"/>
+          <p:nvPr/>
+        </p:nvSpPr>
+        <p:spPr>
+          <a:xfrm>
+            <a:off x="1371600" y="3749039"/>
+            <a:ext cx="9445752" cy="548639"/>
+          </a:xfrm>
+          <a:prstGeom prst="rect">
+            <a:avLst/>
+          </a:prstGeom>
+          <a:noFill/>
+        </p:spPr>
+        <p:txBody>
+          <a:bodyPr wrap="square" lIns="73152" rIns="73152" tIns="54864" bIns="54864">
+            <a:spAutoFit/>
+          </a:bodyPr>
+          <a:lstStyle/>
+          <a:p>
+            <a:pPr algn="ctr">
+              <a:defRPr sz="1800" b="0">
+                <a:solidFill>
+                  <a:srgbClr val="BE185D"/>
+                </a:solidFill>
+                <a:latin typeface="Arial"/>
+              </a:defRPr>
+            </a:pPr>
+            <a:r>
+              <a:t>Tin học • Lớp 5 • Tiết 3 (Chủ đề 3)</a:t>
+            </a:r>
+          </a:p>
+        </p:txBody>
+      </p:sp>
+      <p:sp>
+        <p:nvSpPr>
+          <p:cNvPr id="8" name="TextBox 7"/>
+          <p:cNvSpPr txBox="1"/>
+          <p:nvPr/>
+        </p:nvSpPr>
+        <p:spPr>
+          <a:xfrm>
+            <a:off x="1371600" y="4389120"/>
+            <a:ext cx="9445752" cy="365760"/>
+          </a:xfrm>
+          <a:prstGeom prst="rect">
+            <a:avLst/>
+          </a:prstGeom>
+          <a:noFill/>
+        </p:spPr>
+        <p:txBody>
+          <a:bodyPr wrap="square" lIns="73152" rIns="73152" tIns="54864" bIns="54864">
+            <a:spAutoFit/>
+          </a:bodyPr>
+          <a:lstStyle/>
+          <a:p>
+            <a:pPr algn="ctr">
+              <a:defRPr sz="1400" b="0">
+                <a:solidFill>
+                  <a:srgbClr val="64748B"/>
+                </a:solidFill>
+                <a:latin typeface="Arial"/>
+              </a:defRPr>
+            </a:pPr>
+            <a:r>
+              <a:t>GV: Đậu Đình Nguyên • Bộ môn Tin học</a:t>
+            </a:r>
+          </a:p>
+        </p:txBody>
+      </p:sp>
+    </p:spTree>
+  </p:cSld>
+  <p:clrMapOvr>
+    <a:masterClrMapping/>
+  </p:clrMapOvr>
+  <p:transition spd="med">
+    <p:wipe/>
+  </p:transition>
+</p:sld>
+</file>
+
+<file path=ppt/slides/slide2.xml><?xml version="1.0" encoding="utf-8"?>
+<p:sld xmlns:a="http://schemas.openxmlformats.org/drawingml/2006/main" xmlns:p="http://schemas.openxmlformats.org/presentationml/2006/main" xmlns:r="http://schemas.openxmlformats.org/officeDocument/2006/relationships">
+  <p:cSld>
+    <p:spTree>
+      <p:nvGrpSpPr>
+        <p:cNvPr id="1" name=""/>
+        <p:cNvGrpSpPr/>
+        <p:nvPr/>
+      </p:nvGrpSpPr>
+      <p:grpSpPr/>
+      <p:sp>
+        <p:nvSpPr>
+          <p:cNvPr id="2" name="Rectangle 1"/>
+          <p:cNvSpPr/>
+          <p:nvPr/>
+        </p:nvSpPr>
+        <p:spPr>
+          <a:xfrm>
+            <a:off x="0" y="1051560"/>
+            <a:ext cx="12188952" cy="4754879"/>
+          </a:xfrm>
+          <a:prstGeom prst="rect">
+            <a:avLst/>
+          </a:prstGeom>
+          <a:solidFill>
+            <a:srgbClr val="FDF2F8"/>
+          </a:solidFill>
+          <a:ln>
+            <a:noFill/>
+          </a:ln>
+        </p:spPr>
+        <p:style>
+          <a:lnRef idx="1">
+            <a:schemeClr val="accent1"/>
+          </a:lnRef>
+          <a:fillRef idx="3">
+            <a:schemeClr val="accent1"/>
+          </a:fillRef>
+          <a:effectRef idx="2">
+            <a:schemeClr val="accent1"/>
+          </a:effectRef>
+          <a:fontRef idx="minor">
+            <a:schemeClr val="lt1"/>
+          </a:fontRef>
+        </p:style>
+        <p:txBody>
+          <a:bodyPr rtlCol="0" anchor="ctr"/>
+          <a:lstStyle/>
+          <a:p>
+            <a:pPr algn="ctr"/>
+          </a:p>
+        </p:txBody>
+      </p:sp>
+      <p:sp>
+        <p:nvSpPr>
+          <p:cNvPr id="3" name="Rounded Rectangle 2"/>
+          <p:cNvSpPr/>
+          <p:nvPr/>
+        </p:nvSpPr>
+        <p:spPr>
+          <a:xfrm>
+            <a:off x="365760" y="1143000"/>
+            <a:ext cx="2926080" cy="347471"/>
+          </a:xfrm>
+          <a:prstGeom prst="roundRect">
+            <a:avLst/>
+          </a:prstGeom>
+          <a:solidFill>
+            <a:srgbClr val="BE185D"/>
+          </a:solidFill>
+          <a:ln>
+            <a:noFill/>
+          </a:ln>
+        </p:spPr>
+        <p:style>
+          <a:lnRef idx="1">
+            <a:schemeClr val="accent1"/>
+          </a:lnRef>
+          <a:fillRef idx="3">
+            <a:schemeClr val="accent1"/>
+          </a:fillRef>
+          <a:effectRef idx="2">
+            <a:schemeClr val="accent1"/>
+          </a:effectRef>
+          <a:fontRef idx="minor">
+            <a:schemeClr val="lt1"/>
+          </a:fontRef>
+        </p:style>
+        <p:txBody>
+          <a:bodyPr rtlCol="0" anchor="ctr"/>
+          <a:lstStyle/>
+          <a:p>
+            <a:pPr algn="ctr"/>
+          </a:p>
+        </p:txBody>
+      </p:sp>
+      <p:sp>
+        <p:nvSpPr>
+          <p:cNvPr id="4" name="TextBox 3"/>
+          <p:cNvSpPr txBox="1"/>
+          <p:nvPr/>
+        </p:nvSpPr>
+        <p:spPr>
+          <a:xfrm>
+            <a:off x="365760" y="1143000"/>
+            <a:ext cx="2926080" cy="347471"/>
+          </a:xfrm>
+          <a:prstGeom prst="rect">
+            <a:avLst/>
+          </a:prstGeom>
+          <a:noFill/>
+        </p:spPr>
+        <p:txBody>
+          <a:bodyPr wrap="square" lIns="73152" rIns="73152" tIns="54864" bIns="54864">
+            <a:spAutoFit/>
+          </a:bodyPr>
+          <a:lstStyle/>
+          <a:p>
+            <a:pPr algn="ctr">
+              <a:defRPr sz="1300" b="1">
                 <a:solidFill>
                   <a:srgbClr val="FFFFFF"/>
                 </a:solidFill>
@@ -3583,21 +3810,21 @@
               </a:defRPr>
             </a:pPr>
             <a:r>
-              <a:t>Hoàn thành Tiết 3! ⭐</a:t>
-            </a:r>
-          </a:p>
-        </p:txBody>
-      </p:sp>
-      <p:sp>
-        <p:nvSpPr>
-          <p:cNvPr id="4" name="TextBox 3"/>
+              <a:t>KHỞI ĐỘNG &amp; TÌNH HUỐNG</a:t>
+            </a:r>
+          </a:p>
+        </p:txBody>
+      </p:sp>
+      <p:sp>
+        <p:nvSpPr>
+          <p:cNvPr id="5" name="TextBox 4"/>
           <p:cNvSpPr txBox="1"/>
           <p:nvPr/>
         </p:nvSpPr>
         <p:spPr>
           <a:xfrm>
-            <a:off x="914400" y="3200400"/>
-            <a:ext cx="10360152" cy="914400"/>
+            <a:off x="3474720" y="1115568"/>
+            <a:ext cx="8046720" cy="411479"/>
           </a:xfrm>
           <a:prstGeom prst="rect">
             <a:avLst/>
@@ -3605,13 +3832,137 @@
           <a:noFill/>
         </p:spPr>
         <p:txBody>
-          <a:bodyPr wrap="square" lIns="73152" rIns="73152">
+          <a:bodyPr wrap="square" lIns="73152" rIns="73152" tIns="54864" bIns="54864">
             <a:spAutoFit/>
           </a:bodyPr>
           <a:lstStyle/>
           <a:p>
+            <a:pPr algn="l">
+              <a:defRPr sz="2100" b="1">
+                <a:solidFill>
+                  <a:srgbClr val="831843"/>
+                </a:solidFill>
+                <a:latin typeface="Arial"/>
+              </a:defRPr>
+            </a:pPr>
+            <a:r>
+              <a:t>Tình huống: Chuẩn bị hành lý cho kì nghỉ hè</a:t>
+            </a:r>
+          </a:p>
+        </p:txBody>
+      </p:sp>
+      <p:sp>
+        <p:nvSpPr>
+          <p:cNvPr id="6" name="Rounded Rectangle 5"/>
+          <p:cNvSpPr/>
+          <p:nvPr/>
+        </p:nvSpPr>
+        <p:spPr>
+          <a:xfrm>
+            <a:off x="365760" y="1645920"/>
+            <a:ext cx="3566160" cy="3977639"/>
+          </a:xfrm>
+          <a:prstGeom prst="roundRect">
+            <a:avLst/>
+          </a:prstGeom>
+          <a:solidFill>
+            <a:srgbClr val="FFFFFF"/>
+          </a:solidFill>
+          <a:ln w="19050">
+            <a:solidFill>
+              <a:srgbClr val="EC4899"/>
+            </a:solidFill>
+          </a:ln>
+        </p:spPr>
+        <p:style>
+          <a:lnRef idx="1">
+            <a:schemeClr val="accent1"/>
+          </a:lnRef>
+          <a:fillRef idx="3">
+            <a:schemeClr val="accent1"/>
+          </a:fillRef>
+          <a:effectRef idx="2">
+            <a:schemeClr val="accent1"/>
+          </a:effectRef>
+          <a:fontRef idx="minor">
+            <a:schemeClr val="lt1"/>
+          </a:fontRef>
+        </p:style>
+        <p:txBody>
+          <a:bodyPr rtlCol="0" anchor="ctr"/>
+          <a:lstStyle/>
+          <a:p>
+            <a:pPr algn="ctr"/>
+          </a:p>
+        </p:txBody>
+      </p:sp>
+      <p:sp>
+        <p:nvSpPr>
+          <p:cNvPr id="7" name="Rounded Rectangle 6"/>
+          <p:cNvSpPr/>
+          <p:nvPr/>
+        </p:nvSpPr>
+        <p:spPr>
+          <a:xfrm>
+            <a:off x="365760" y="1645920"/>
+            <a:ext cx="3566160" cy="411479"/>
+          </a:xfrm>
+          <a:prstGeom prst="roundRect">
+            <a:avLst/>
+          </a:prstGeom>
+          <a:solidFill>
+            <a:srgbClr val="BE185D"/>
+          </a:solidFill>
+          <a:ln>
+            <a:noFill/>
+          </a:ln>
+        </p:spPr>
+        <p:style>
+          <a:lnRef idx="1">
+            <a:schemeClr val="accent1"/>
+          </a:lnRef>
+          <a:fillRef idx="3">
+            <a:schemeClr val="accent1"/>
+          </a:fillRef>
+          <a:effectRef idx="2">
+            <a:schemeClr val="accent1"/>
+          </a:effectRef>
+          <a:fontRef idx="minor">
+            <a:schemeClr val="lt1"/>
+          </a:fontRef>
+        </p:style>
+        <p:txBody>
+          <a:bodyPr rtlCol="0" anchor="ctr"/>
+          <a:lstStyle/>
+          <a:p>
+            <a:pPr algn="ctr"/>
+          </a:p>
+        </p:txBody>
+      </p:sp>
+      <p:sp>
+        <p:nvSpPr>
+          <p:cNvPr id="8" name="TextBox 7"/>
+          <p:cNvSpPr txBox="1"/>
+          <p:nvPr/>
+        </p:nvSpPr>
+        <p:spPr>
+          <a:xfrm>
+            <a:off x="365760" y="1691640"/>
+            <a:ext cx="3566160" cy="365759"/>
+          </a:xfrm>
+          <a:prstGeom prst="rect">
+            <a:avLst/>
+          </a:prstGeom>
+          <a:noFill/>
+        </p:spPr>
+        <p:txBody>
+          <a:bodyPr wrap="square" lIns="73152" rIns="73152" tIns="54864" bIns="54864">
+            <a:spAutoFit/>
+          </a:bodyPr>
+          <a:lstStyle/>
+          <a:p>
             <a:pPr algn="ctr">
-              <a:defRPr sz="2200" b="0">
+              <a:defRPr sz="1400" b="1">
                 <a:solidFill>
                   <a:srgbClr val="FFFFFF"/>
                 </a:solidFill>
@@ -3619,7 +3970,435 @@
               </a:defRPr>
             </a:pPr>
             <a:r>
-              <a:t>Chuẩn bị bài tiếp theo: Cây thư mục (Tiết 4) nhé!</a:t>
+              <a:t>1. An đi Nha Trang</a:t>
+            </a:r>
+          </a:p>
+        </p:txBody>
+      </p:sp>
+      <p:pic>
+        <p:nvPicPr>
+          <p:cNvPr id="9" name="Picture 8" descr="sgk_lop5_bai3_khoi_dong.png"/>
+          <p:cNvPicPr>
+            <a:picLocks noChangeAspect="1"/>
+          </p:cNvPicPr>
+          <p:nvPr/>
+        </p:nvPicPr>
+        <p:blipFill>
+          <a:blip r:embed="rId2"/>
+          <a:stretch>
+            <a:fillRect/>
+          </a:stretch>
+        </p:blipFill>
+        <p:spPr>
+          <a:xfrm>
+            <a:off x="502920" y="2148840"/>
+            <a:ext cx="3291840" cy="2103120"/>
+          </a:xfrm>
+          <a:prstGeom prst="rect">
+            <a:avLst/>
+          </a:prstGeom>
+        </p:spPr>
+      </p:pic>
+      <p:sp>
+        <p:nvSpPr>
+          <p:cNvPr id="10" name="TextBox 9"/>
+          <p:cNvSpPr txBox="1"/>
+          <p:nvPr/>
+        </p:nvSpPr>
+        <p:spPr>
+          <a:xfrm>
+            <a:off x="502920" y="4343400"/>
+            <a:ext cx="3291840" cy="1188719"/>
+          </a:xfrm>
+          <a:prstGeom prst="rect">
+            <a:avLst/>
+          </a:prstGeom>
+          <a:noFill/>
+        </p:spPr>
+        <p:txBody>
+          <a:bodyPr wrap="square" lIns="73152" rIns="73152" tIns="54864" bIns="54864">
+            <a:spAutoFit/>
+          </a:bodyPr>
+          <a:lstStyle/>
+          <a:p>
+            <a:pPr algn="ctr">
+              <a:defRPr sz="1300" b="0">
+                <a:solidFill>
+                  <a:srgbClr val="0F172A"/>
+                </a:solidFill>
+                <a:latin typeface="Arial"/>
+              </a:defRPr>
+            </a:pPr>
+            <a:r>
+              <a:t>Nha Trang là thành phố biển, quanh năm nắng ấm. Cần đồ bơi, kem chống nắng...</a:t>
+            </a:r>
+          </a:p>
+        </p:txBody>
+      </p:sp>
+      <p:sp>
+        <p:nvSpPr>
+          <p:cNvPr id="11" name="Rounded Rectangle 10"/>
+          <p:cNvSpPr/>
+          <p:nvPr/>
+        </p:nvSpPr>
+        <p:spPr>
+          <a:xfrm>
+            <a:off x="4206240" y="1645920"/>
+            <a:ext cx="3566160" cy="3977639"/>
+          </a:xfrm>
+          <a:prstGeom prst="roundRect">
+            <a:avLst/>
+          </a:prstGeom>
+          <a:solidFill>
+            <a:srgbClr val="FFFFFF"/>
+          </a:solidFill>
+          <a:ln w="19050">
+            <a:solidFill>
+              <a:srgbClr val="EC4899"/>
+            </a:solidFill>
+          </a:ln>
+        </p:spPr>
+        <p:style>
+          <a:lnRef idx="1">
+            <a:schemeClr val="accent1"/>
+          </a:lnRef>
+          <a:fillRef idx="3">
+            <a:schemeClr val="accent1"/>
+          </a:fillRef>
+          <a:effectRef idx="2">
+            <a:schemeClr val="accent1"/>
+          </a:effectRef>
+          <a:fontRef idx="minor">
+            <a:schemeClr val="lt1"/>
+          </a:fontRef>
+        </p:style>
+        <p:txBody>
+          <a:bodyPr rtlCol="0" anchor="ctr"/>
+          <a:lstStyle/>
+          <a:p>
+            <a:pPr algn="ctr"/>
+          </a:p>
+        </p:txBody>
+      </p:sp>
+      <p:sp>
+        <p:nvSpPr>
+          <p:cNvPr id="12" name="Rounded Rectangle 11"/>
+          <p:cNvSpPr/>
+          <p:nvPr/>
+        </p:nvSpPr>
+        <p:spPr>
+          <a:xfrm>
+            <a:off x="4206240" y="1645920"/>
+            <a:ext cx="3566160" cy="411479"/>
+          </a:xfrm>
+          <a:prstGeom prst="roundRect">
+            <a:avLst/>
+          </a:prstGeom>
+          <a:solidFill>
+            <a:srgbClr val="BE185D"/>
+          </a:solidFill>
+          <a:ln>
+            <a:noFill/>
+          </a:ln>
+        </p:spPr>
+        <p:style>
+          <a:lnRef idx="1">
+            <a:schemeClr val="accent1"/>
+          </a:lnRef>
+          <a:fillRef idx="3">
+            <a:schemeClr val="accent1"/>
+          </a:fillRef>
+          <a:effectRef idx="2">
+            <a:schemeClr val="accent1"/>
+          </a:effectRef>
+          <a:fontRef idx="minor">
+            <a:schemeClr val="lt1"/>
+          </a:fontRef>
+        </p:style>
+        <p:txBody>
+          <a:bodyPr rtlCol="0" anchor="ctr"/>
+          <a:lstStyle/>
+          <a:p>
+            <a:pPr algn="ctr"/>
+          </a:p>
+        </p:txBody>
+      </p:sp>
+      <p:sp>
+        <p:nvSpPr>
+          <p:cNvPr id="13" name="TextBox 12"/>
+          <p:cNvSpPr txBox="1"/>
+          <p:nvPr/>
+        </p:nvSpPr>
+        <p:spPr>
+          <a:xfrm>
+            <a:off x="4206240" y="1691640"/>
+            <a:ext cx="3566160" cy="365759"/>
+          </a:xfrm>
+          <a:prstGeom prst="rect">
+            <a:avLst/>
+          </a:prstGeom>
+          <a:noFill/>
+        </p:spPr>
+        <p:txBody>
+          <a:bodyPr wrap="square" lIns="73152" rIns="73152" tIns="54864" bIns="54864">
+            <a:spAutoFit/>
+          </a:bodyPr>
+          <a:lstStyle/>
+          <a:p>
+            <a:pPr algn="ctr">
+              <a:defRPr sz="1400" b="1">
+                <a:solidFill>
+                  <a:srgbClr val="FFFFFF"/>
+                </a:solidFill>
+                <a:latin typeface="Arial"/>
+              </a:defRPr>
+            </a:pPr>
+            <a:r>
+              <a:t>2. Khoa đi Đà Lạt</a:t>
+            </a:r>
+          </a:p>
+        </p:txBody>
+      </p:sp>
+      <p:pic>
+        <p:nvPicPr>
+          <p:cNvPr id="14" name="Picture 13" descr="sgk_lop5_bai3_khoi_dong.png"/>
+          <p:cNvPicPr>
+            <a:picLocks noChangeAspect="1"/>
+          </p:cNvPicPr>
+          <p:nvPr/>
+        </p:nvPicPr>
+        <p:blipFill>
+          <a:blip r:embed="rId2"/>
+          <a:stretch>
+            <a:fillRect/>
+          </a:stretch>
+        </p:blipFill>
+        <p:spPr>
+          <a:xfrm>
+            <a:off x="4343400" y="2148840"/>
+            <a:ext cx="3291840" cy="2103120"/>
+          </a:xfrm>
+          <a:prstGeom prst="rect">
+            <a:avLst/>
+          </a:prstGeom>
+        </p:spPr>
+      </p:pic>
+      <p:sp>
+        <p:nvSpPr>
+          <p:cNvPr id="15" name="TextBox 14"/>
+          <p:cNvSpPr txBox="1"/>
+          <p:nvPr/>
+        </p:nvSpPr>
+        <p:spPr>
+          <a:xfrm>
+            <a:off x="4343400" y="4343400"/>
+            <a:ext cx="3291840" cy="1188719"/>
+          </a:xfrm>
+          <a:prstGeom prst="rect">
+            <a:avLst/>
+          </a:prstGeom>
+          <a:noFill/>
+        </p:spPr>
+        <p:txBody>
+          <a:bodyPr wrap="square" lIns="73152" rIns="73152" tIns="54864" bIns="54864">
+            <a:spAutoFit/>
+          </a:bodyPr>
+          <a:lstStyle/>
+          <a:p>
+            <a:pPr algn="ctr">
+              <a:defRPr sz="1300" b="0">
+                <a:solidFill>
+                  <a:srgbClr val="0F172A"/>
+                </a:solidFill>
+                <a:latin typeface="Arial"/>
+              </a:defRPr>
+            </a:pPr>
+            <a:r>
+              <a:t>Đà Lạt nằm ở vùng cao nguyên, đêm se lạnh. Cần áo ấm, áo khoác gió...</a:t>
+            </a:r>
+          </a:p>
+        </p:txBody>
+      </p:sp>
+      <p:sp>
+        <p:nvSpPr>
+          <p:cNvPr id="16" name="Rounded Rectangle 15"/>
+          <p:cNvSpPr/>
+          <p:nvPr/>
+        </p:nvSpPr>
+        <p:spPr>
+          <a:xfrm>
+            <a:off x="8046720" y="1645920"/>
+            <a:ext cx="3566160" cy="3977639"/>
+          </a:xfrm>
+          <a:prstGeom prst="roundRect">
+            <a:avLst/>
+          </a:prstGeom>
+          <a:solidFill>
+            <a:srgbClr val="FFFFFF"/>
+          </a:solidFill>
+          <a:ln w="19050">
+            <a:solidFill>
+              <a:srgbClr val="EC4899"/>
+            </a:solidFill>
+          </a:ln>
+        </p:spPr>
+        <p:style>
+          <a:lnRef idx="1">
+            <a:schemeClr val="accent1"/>
+          </a:lnRef>
+          <a:fillRef idx="3">
+            <a:schemeClr val="accent1"/>
+          </a:fillRef>
+          <a:effectRef idx="2">
+            <a:schemeClr val="accent1"/>
+          </a:effectRef>
+          <a:fontRef idx="minor">
+            <a:schemeClr val="lt1"/>
+          </a:fontRef>
+        </p:style>
+        <p:txBody>
+          <a:bodyPr rtlCol="0" anchor="ctr"/>
+          <a:lstStyle/>
+          <a:p>
+            <a:pPr algn="ctr"/>
+          </a:p>
+        </p:txBody>
+      </p:sp>
+      <p:sp>
+        <p:nvSpPr>
+          <p:cNvPr id="17" name="Rounded Rectangle 16"/>
+          <p:cNvSpPr/>
+          <p:nvPr/>
+        </p:nvSpPr>
+        <p:spPr>
+          <a:xfrm>
+            <a:off x="8046720" y="1645920"/>
+            <a:ext cx="3566160" cy="411479"/>
+          </a:xfrm>
+          <a:prstGeom prst="roundRect">
+            <a:avLst/>
+          </a:prstGeom>
+          <a:solidFill>
+            <a:srgbClr val="BE185D"/>
+          </a:solidFill>
+          <a:ln>
+            <a:noFill/>
+          </a:ln>
+        </p:spPr>
+        <p:style>
+          <a:lnRef idx="1">
+            <a:schemeClr val="accent1"/>
+          </a:lnRef>
+          <a:fillRef idx="3">
+            <a:schemeClr val="accent1"/>
+          </a:fillRef>
+          <a:effectRef idx="2">
+            <a:schemeClr val="accent1"/>
+          </a:effectRef>
+          <a:fontRef idx="minor">
+            <a:schemeClr val="lt1"/>
+          </a:fontRef>
+        </p:style>
+        <p:txBody>
+          <a:bodyPr rtlCol="0" anchor="ctr"/>
+          <a:lstStyle/>
+          <a:p>
+            <a:pPr algn="ctr"/>
+          </a:p>
+        </p:txBody>
+      </p:sp>
+      <p:sp>
+        <p:nvSpPr>
+          <p:cNvPr id="18" name="TextBox 17"/>
+          <p:cNvSpPr txBox="1"/>
+          <p:nvPr/>
+        </p:nvSpPr>
+        <p:spPr>
+          <a:xfrm>
+            <a:off x="8046720" y="1691640"/>
+            <a:ext cx="3566160" cy="365759"/>
+          </a:xfrm>
+          <a:prstGeom prst="rect">
+            <a:avLst/>
+          </a:prstGeom>
+          <a:noFill/>
+        </p:spPr>
+        <p:txBody>
+          <a:bodyPr wrap="square" lIns="73152" rIns="73152" tIns="54864" bIns="54864">
+            <a:spAutoFit/>
+          </a:bodyPr>
+          <a:lstStyle/>
+          <a:p>
+            <a:pPr algn="ctr">
+              <a:defRPr sz="1400" b="1">
+                <a:solidFill>
+                  <a:srgbClr val="FFFFFF"/>
+                </a:solidFill>
+                <a:latin typeface="Arial"/>
+              </a:defRPr>
+            </a:pPr>
+            <a:r>
+              <a:t>3. Minh đi Úc</a:t>
+            </a:r>
+          </a:p>
+        </p:txBody>
+      </p:sp>
+      <p:pic>
+        <p:nvPicPr>
+          <p:cNvPr id="19" name="Picture 18" descr="sgk_lop5_bai3_khoi_dong.png"/>
+          <p:cNvPicPr>
+            <a:picLocks noChangeAspect="1"/>
+          </p:cNvPicPr>
+          <p:nvPr/>
+        </p:nvPicPr>
+        <p:blipFill>
+          <a:blip r:embed="rId2"/>
+          <a:stretch>
+            <a:fillRect/>
+          </a:stretch>
+        </p:blipFill>
+        <p:spPr>
+          <a:xfrm>
+            <a:off x="8183880" y="2148840"/>
+            <a:ext cx="3291840" cy="2103120"/>
+          </a:xfrm>
+          <a:prstGeom prst="rect">
+            <a:avLst/>
+          </a:prstGeom>
+        </p:spPr>
+      </p:pic>
+      <p:sp>
+        <p:nvSpPr>
+          <p:cNvPr id="20" name="TextBox 19"/>
+          <p:cNvSpPr txBox="1"/>
+          <p:nvPr/>
+        </p:nvSpPr>
+        <p:spPr>
+          <a:xfrm>
+            <a:off x="8183880" y="4343400"/>
+            <a:ext cx="3291840" cy="1188719"/>
+          </a:xfrm>
+          <a:prstGeom prst="rect">
+            <a:avLst/>
+          </a:prstGeom>
+          <a:noFill/>
+        </p:spPr>
+        <p:txBody>
+          <a:bodyPr wrap="square" lIns="73152" rIns="73152" tIns="54864" bIns="54864">
+            <a:spAutoFit/>
+          </a:bodyPr>
+          <a:lstStyle/>
+          <a:p>
+            <a:pPr algn="ctr">
+              <a:defRPr sz="1300" b="0">
+                <a:solidFill>
+                  <a:srgbClr val="0F172A"/>
+                </a:solidFill>
+                <a:latin typeface="Arial"/>
+              </a:defRPr>
+            </a:pPr>
+            <a:r>
+              <a:t>Nước Úc ở Nam bán cầu. Mùa hè Việt Nam là mùa đông ở Úc! Cần áo phao dày.</a:t>
             </a:r>
           </a:p>
         </p:txBody>
@@ -3635,8 +4414,8 @@
 </p:sld>
 </file>
 
-<file path=ppt/slides/slide2.xml><?xml version="1.0" encoding="utf-8"?>
-<p:sld xmlns:a="http://schemas.openxmlformats.org/drawingml/2006/main" xmlns:r="http://schemas.openxmlformats.org/officeDocument/2006/relationships" xmlns:p="http://schemas.openxmlformats.org/presentationml/2006/main">
+<file path=ppt/slides/slide3.xml><?xml version="1.0" encoding="utf-8"?>
+<p:sld xmlns:a="http://schemas.openxmlformats.org/drawingml/2006/main" xmlns:p="http://schemas.openxmlformats.org/presentationml/2006/main" xmlns:r="http://schemas.openxmlformats.org/officeDocument/2006/relationships">
   <p:cSld>
     <p:spTree>
       <p:nvGrpSpPr>
@@ -3644,237 +4423,479 @@
         <p:cNvGrpSpPr/>
         <p:nvPr/>
       </p:nvGrpSpPr>
-      <p:grpSpPr>
-        <a:xfrm>
-          <a:off x="0" y="0"/>
-          <a:ext cx="0" cy="0"/>
-          <a:chOff x="0" y="0"/>
-          <a:chExt cx="0" cy="0"/>
-        </a:xfrm>
-      </p:grpSpPr>
-      <p:sp>
-        <p:nvSpPr>
-          <p:cNvPr id="2" name="Title 1">
-            <a:extLst>
-              <a:ext uri="{FF2B5EF4-FFF2-40B4-BE49-F238E27FC236}">
-                <a16:creationId xmlns:a16="http://schemas.microsoft.com/office/drawing/2014/main" id="{19A0AB71-A960-5C29-67C4-E061282DF716}"/>
-              </a:ext>
-            </a:extLst>
-          </p:cNvPr>
-          <p:cNvSpPr>
-            <a:spLocks noGrp="1"/>
-          </p:cNvSpPr>
-          <p:nvPr>
-            <p:ph type="title"/>
-          </p:nvPr>
-        </p:nvSpPr>
-        <p:spPr>
-          <a:xfrm>
-            <a:off x="3930315" y="215531"/>
-            <a:ext cx="3826042" cy="861546"/>
-          </a:xfrm>
-        </p:spPr>
-        <p:txBody>
-          <a:bodyPr>
-            <a:normAutofit/>
+      <p:grpSpPr/>
+      <p:sp>
+        <p:nvSpPr>
+          <p:cNvPr id="2" name="Rectangle 1"/>
+          <p:cNvSpPr/>
+          <p:nvPr/>
+        </p:nvSpPr>
+        <p:spPr>
+          <a:xfrm>
+            <a:off x="0" y="1051560"/>
+            <a:ext cx="12188952" cy="4754879"/>
+          </a:xfrm>
+          <a:prstGeom prst="rect">
+            <a:avLst/>
+          </a:prstGeom>
+          <a:solidFill>
+            <a:srgbClr val="FDF2F8"/>
+          </a:solidFill>
+          <a:ln>
+            <a:noFill/>
+          </a:ln>
+        </p:spPr>
+        <p:style>
+          <a:lnRef idx="1">
+            <a:schemeClr val="accent1"/>
+          </a:lnRef>
+          <a:fillRef idx="3">
+            <a:schemeClr val="accent1"/>
+          </a:fillRef>
+          <a:effectRef idx="2">
+            <a:schemeClr val="accent1"/>
+          </a:effectRef>
+          <a:fontRef idx="minor">
+            <a:schemeClr val="lt1"/>
+          </a:fontRef>
+        </p:style>
+        <p:txBody>
+          <a:bodyPr rtlCol="0" anchor="ctr"/>
+          <a:lstStyle/>
+          <a:p>
+            <a:pPr algn="ctr"/>
+          </a:p>
+        </p:txBody>
+      </p:sp>
+      <p:sp>
+        <p:nvSpPr>
+          <p:cNvPr id="3" name="Rounded Rectangle 2"/>
+          <p:cNvSpPr/>
+          <p:nvPr/>
+        </p:nvSpPr>
+        <p:spPr>
+          <a:xfrm>
+            <a:off x="365760" y="1143000"/>
+            <a:ext cx="2926080" cy="347471"/>
+          </a:xfrm>
+          <a:prstGeom prst="roundRect">
+            <a:avLst/>
+          </a:prstGeom>
+          <a:solidFill>
+            <a:srgbClr val="BE185D"/>
+          </a:solidFill>
+          <a:ln>
+            <a:noFill/>
+          </a:ln>
+        </p:spPr>
+        <p:style>
+          <a:lnRef idx="1">
+            <a:schemeClr val="accent1"/>
+          </a:lnRef>
+          <a:fillRef idx="3">
+            <a:schemeClr val="accent1"/>
+          </a:fillRef>
+          <a:effectRef idx="2">
+            <a:schemeClr val="accent1"/>
+          </a:effectRef>
+          <a:fontRef idx="minor">
+            <a:schemeClr val="lt1"/>
+          </a:fontRef>
+        </p:style>
+        <p:txBody>
+          <a:bodyPr rtlCol="0" anchor="ctr"/>
+          <a:lstStyle/>
+          <a:p>
+            <a:pPr algn="ctr"/>
+          </a:p>
+        </p:txBody>
+      </p:sp>
+      <p:sp>
+        <p:nvSpPr>
+          <p:cNvPr id="4" name="TextBox 3"/>
+          <p:cNvSpPr txBox="1"/>
+          <p:nvPr/>
+        </p:nvSpPr>
+        <p:spPr>
+          <a:xfrm>
+            <a:off x="365760" y="1143000"/>
+            <a:ext cx="2926080" cy="347471"/>
+          </a:xfrm>
+          <a:prstGeom prst="rect">
+            <a:avLst/>
+          </a:prstGeom>
+          <a:noFill/>
+        </p:spPr>
+        <p:txBody>
+          <a:bodyPr wrap="square" lIns="73152" rIns="73152" tIns="54864" bIns="54864">
+            <a:spAutoFit/>
           </a:bodyPr>
           <a:lstStyle/>
           <a:p>
-            <a:r>
-              <a:rPr lang="en-US" dirty="0">
+            <a:pPr algn="ctr">
+              <a:defRPr sz="1300" b="1">
                 <a:solidFill>
-                  <a:schemeClr val="tx2">
-                    <a:lumMod val="75000"/>
-                    <a:lumOff val="25000"/>
-                  </a:schemeClr>
+                  <a:srgbClr val="FFFFFF"/>
                 </a:solidFill>
-              </a:rPr>
-              <a:t>Môn Tin </a:t>
-            </a:r>
-            <a:r>
-              <a:rPr lang="en-US" dirty="0" err="1">
+                <a:latin typeface="Arial"/>
+              </a:defRPr>
+            </a:pPr>
+            <a:r>
+              <a:t>HOẠT ĐỘNG KHÁM PHÁ</a:t>
+            </a:r>
+          </a:p>
+        </p:txBody>
+      </p:sp>
+      <p:sp>
+        <p:nvSpPr>
+          <p:cNvPr id="5" name="TextBox 4"/>
+          <p:cNvSpPr txBox="1"/>
+          <p:nvPr/>
+        </p:nvSpPr>
+        <p:spPr>
+          <a:xfrm>
+            <a:off x="3474720" y="1115568"/>
+            <a:ext cx="8046720" cy="411479"/>
+          </a:xfrm>
+          <a:prstGeom prst="rect">
+            <a:avLst/>
+          </a:prstGeom>
+          <a:noFill/>
+        </p:spPr>
+        <p:txBody>
+          <a:bodyPr wrap="square" lIns="73152" rIns="73152" tIns="54864" bIns="54864">
+            <a:spAutoFit/>
+          </a:bodyPr>
+          <a:lstStyle/>
+          <a:p>
+            <a:pPr algn="l">
+              <a:defRPr sz="2100" b="1">
                 <a:solidFill>
-                  <a:schemeClr val="tx2">
-                    <a:lumMod val="75000"/>
-                    <a:lumOff val="25000"/>
-                  </a:schemeClr>
+                  <a:srgbClr val="831843"/>
                 </a:solidFill>
-              </a:rPr>
-              <a:t>học</a:t>
-            </a:r>
-            <a:r>
-              <a:rPr lang="en-US" dirty="0">
+                <a:latin typeface="Arial"/>
+              </a:defRPr>
+            </a:pPr>
+            <a:r>
+              <a:t>Sự cần thiết của việc thu thập thông tin</a:t>
+            </a:r>
+          </a:p>
+        </p:txBody>
+      </p:sp>
+      <p:sp>
+        <p:nvSpPr>
+          <p:cNvPr id="6" name="Rounded Rectangle 5"/>
+          <p:cNvSpPr/>
+          <p:nvPr/>
+        </p:nvSpPr>
+        <p:spPr>
+          <a:xfrm>
+            <a:off x="365760" y="1645920"/>
+            <a:ext cx="3840480" cy="3977639"/>
+          </a:xfrm>
+          <a:prstGeom prst="roundRect">
+            <a:avLst/>
+          </a:prstGeom>
+          <a:solidFill>
+            <a:srgbClr val="FFFFFF"/>
+          </a:solidFill>
+          <a:ln w="19050">
+            <a:solidFill>
+              <a:srgbClr val="EC4899"/>
+            </a:solidFill>
+          </a:ln>
+        </p:spPr>
+        <p:style>
+          <a:lnRef idx="1">
+            <a:schemeClr val="accent1"/>
+          </a:lnRef>
+          <a:fillRef idx="3">
+            <a:schemeClr val="accent1"/>
+          </a:fillRef>
+          <a:effectRef idx="2">
+            <a:schemeClr val="accent1"/>
+          </a:effectRef>
+          <a:fontRef idx="minor">
+            <a:schemeClr val="lt1"/>
+          </a:fontRef>
+        </p:style>
+        <p:txBody>
+          <a:bodyPr rtlCol="0" anchor="ctr"/>
+          <a:lstStyle/>
+          <a:p>
+            <a:pPr algn="ctr"/>
+          </a:p>
+        </p:txBody>
+      </p:sp>
+      <p:sp>
+        <p:nvSpPr>
+          <p:cNvPr id="7" name="Rounded Rectangle 6"/>
+          <p:cNvSpPr/>
+          <p:nvPr/>
+        </p:nvSpPr>
+        <p:spPr>
+          <a:xfrm>
+            <a:off x="365760" y="1645920"/>
+            <a:ext cx="164592" cy="3977639"/>
+          </a:xfrm>
+          <a:prstGeom prst="roundRect">
+            <a:avLst/>
+          </a:prstGeom>
+          <a:solidFill>
+            <a:srgbClr val="EC4899"/>
+          </a:solidFill>
+          <a:ln>
+            <a:noFill/>
+          </a:ln>
+        </p:spPr>
+        <p:style>
+          <a:lnRef idx="1">
+            <a:schemeClr val="accent1"/>
+          </a:lnRef>
+          <a:fillRef idx="3">
+            <a:schemeClr val="accent1"/>
+          </a:fillRef>
+          <a:effectRef idx="2">
+            <a:schemeClr val="accent1"/>
+          </a:effectRef>
+          <a:fontRef idx="minor">
+            <a:schemeClr val="lt1"/>
+          </a:fontRef>
+        </p:style>
+        <p:txBody>
+          <a:bodyPr rtlCol="0" anchor="ctr"/>
+          <a:lstStyle/>
+          <a:p>
+            <a:pPr algn="ctr"/>
+          </a:p>
+        </p:txBody>
+      </p:sp>
+      <p:sp>
+        <p:nvSpPr>
+          <p:cNvPr id="8" name="TextBox 7"/>
+          <p:cNvSpPr txBox="1"/>
+          <p:nvPr/>
+        </p:nvSpPr>
+        <p:spPr>
+          <a:xfrm>
+            <a:off x="640080" y="1783080"/>
+            <a:ext cx="3429000" cy="640080"/>
+          </a:xfrm>
+          <a:prstGeom prst="rect">
+            <a:avLst/>
+          </a:prstGeom>
+          <a:noFill/>
+        </p:spPr>
+        <p:txBody>
+          <a:bodyPr wrap="square" lIns="73152" rIns="73152" tIns="54864" bIns="54864">
+            <a:spAutoFit/>
+          </a:bodyPr>
+          <a:lstStyle/>
+          <a:p>
+            <a:pPr algn="l">
+              <a:defRPr sz="1500" b="1">
                 <a:solidFill>
-                  <a:schemeClr val="tx2">
-                    <a:lumMod val="75000"/>
-                    <a:lumOff val="25000"/>
-                  </a:schemeClr>
+                  <a:srgbClr val="0F172A"/>
                 </a:solidFill>
-              </a:rPr>
-              <a:t> </a:t>
-            </a:r>
-            <a:r>
-              <a:rPr lang="en-US" dirty="0" err="1">
+                <a:latin typeface="Arial"/>
+              </a:defRPr>
+            </a:pPr>
+            <a:r>
+              <a:t>• Thông tin giúp em hiểu rõ hoàn cảnh thực tế</a:t>
+            </a:r>
+          </a:p>
+        </p:txBody>
+      </p:sp>
+      <p:sp>
+        <p:nvSpPr>
+          <p:cNvPr id="9" name="TextBox 8"/>
+          <p:cNvSpPr txBox="1"/>
+          <p:nvPr/>
+        </p:nvSpPr>
+        <p:spPr>
+          <a:xfrm>
+            <a:off x="640080" y="2468880"/>
+            <a:ext cx="3429000" cy="640080"/>
+          </a:xfrm>
+          <a:prstGeom prst="rect">
+            <a:avLst/>
+          </a:prstGeom>
+          <a:noFill/>
+        </p:spPr>
+        <p:txBody>
+          <a:bodyPr wrap="square" lIns="73152" rIns="73152" tIns="54864" bIns="54864">
+            <a:spAutoFit/>
+          </a:bodyPr>
+          <a:lstStyle/>
+          <a:p>
+            <a:pPr algn="l">
+              <a:defRPr sz="1500" b="1">
                 <a:solidFill>
-                  <a:schemeClr val="tx2">
-                    <a:lumMod val="75000"/>
-                    <a:lumOff val="25000"/>
-                  </a:schemeClr>
+                  <a:srgbClr val="0F172A"/>
                 </a:solidFill>
-              </a:rPr>
-              <a:t>lớp</a:t>
-            </a:r>
-            <a:r>
-              <a:rPr lang="en-US" dirty="0">
+                <a:latin typeface="Arial"/>
+              </a:defRPr>
+            </a:pPr>
+            <a:r>
+              <a:t>• Lựa chọn đồ dùng, trang phục phù hợp</a:t>
+            </a:r>
+          </a:p>
+        </p:txBody>
+      </p:sp>
+      <p:sp>
+        <p:nvSpPr>
+          <p:cNvPr id="10" name="TextBox 9"/>
+          <p:cNvSpPr txBox="1"/>
+          <p:nvPr/>
+        </p:nvSpPr>
+        <p:spPr>
+          <a:xfrm>
+            <a:off x="640080" y="3154680"/>
+            <a:ext cx="3429000" cy="640080"/>
+          </a:xfrm>
+          <a:prstGeom prst="rect">
+            <a:avLst/>
+          </a:prstGeom>
+          <a:noFill/>
+        </p:spPr>
+        <p:txBody>
+          <a:bodyPr wrap="square" lIns="73152" rIns="73152" tIns="54864" bIns="54864">
+            <a:spAutoFit/>
+          </a:bodyPr>
+          <a:lstStyle/>
+          <a:p>
+            <a:pPr algn="l">
+              <a:defRPr sz="1500" b="1">
                 <a:solidFill>
-                  <a:schemeClr val="tx2">
-                    <a:lumMod val="75000"/>
-                    <a:lumOff val="25000"/>
-                  </a:schemeClr>
+                  <a:srgbClr val="0F172A"/>
                 </a:solidFill>
-              </a:rPr>
-              <a:t> </a:t>
-            </a:r>
-          </a:p>
-        </p:txBody>
-      </p:sp>
+                <a:latin typeface="Arial"/>
+              </a:defRPr>
+            </a:pPr>
+            <a:r>
+              <a:t>• Tránh gặp rủi ro thời tiết bất ngờ</a:t>
+            </a:r>
+          </a:p>
+        </p:txBody>
+      </p:sp>
+      <p:sp>
+        <p:nvSpPr>
+          <p:cNvPr id="11" name="TextBox 10"/>
+          <p:cNvSpPr txBox="1"/>
+          <p:nvPr/>
+        </p:nvSpPr>
+        <p:spPr>
+          <a:xfrm>
+            <a:off x="640080" y="3840480"/>
+            <a:ext cx="3429000" cy="640080"/>
+          </a:xfrm>
+          <a:prstGeom prst="rect">
+            <a:avLst/>
+          </a:prstGeom>
+          <a:noFill/>
+        </p:spPr>
+        <p:txBody>
+          <a:bodyPr wrap="square" lIns="73152" rIns="73152" tIns="54864" bIns="54864">
+            <a:spAutoFit/>
+          </a:bodyPr>
+          <a:lstStyle/>
+          <a:p>
+            <a:pPr algn="l">
+              <a:defRPr sz="1500" b="1">
+                <a:solidFill>
+                  <a:srgbClr val="0F172A"/>
+                </a:solidFill>
+                <a:latin typeface="Arial"/>
+              </a:defRPr>
+            </a:pPr>
+            <a:r>
+              <a:t>• Giúp giải quyết vấn đề thành công và hiệu quả</a:t>
+            </a:r>
+          </a:p>
+        </p:txBody>
+      </p:sp>
+      <p:sp>
+        <p:nvSpPr>
+          <p:cNvPr id="12" name="Rounded Rectangle 11"/>
+          <p:cNvSpPr/>
+          <p:nvPr/>
+        </p:nvSpPr>
+        <p:spPr>
+          <a:xfrm>
+            <a:off x="4480560" y="1645920"/>
+            <a:ext cx="7223760" cy="3977639"/>
+          </a:xfrm>
+          <a:prstGeom prst="roundRect">
+            <a:avLst/>
+          </a:prstGeom>
+          <a:solidFill>
+            <a:srgbClr val="FFFFFF"/>
+          </a:solidFill>
+          <a:ln w="19050">
+            <a:solidFill>
+              <a:srgbClr val="CBD5E1"/>
+            </a:solidFill>
+          </a:ln>
+        </p:spPr>
+        <p:style>
+          <a:lnRef idx="1">
+            <a:schemeClr val="accent1"/>
+          </a:lnRef>
+          <a:fillRef idx="3">
+            <a:schemeClr val="accent1"/>
+          </a:fillRef>
+          <a:effectRef idx="2">
+            <a:schemeClr val="accent1"/>
+          </a:effectRef>
+          <a:fontRef idx="minor">
+            <a:schemeClr val="lt1"/>
+          </a:fontRef>
+        </p:style>
+        <p:txBody>
+          <a:bodyPr rtlCol="0" anchor="ctr"/>
+          <a:lstStyle/>
+          <a:p>
+            <a:pPr algn="ctr"/>
+          </a:p>
+        </p:txBody>
+      </p:sp>
+      <p:pic>
+        <p:nvPicPr>
+          <p:cNvPr id="13" name="Picture 12" descr="sgk_lop5_bai3_cac_buoc_tim_kiem.png"/>
+          <p:cNvPicPr>
+            <a:picLocks noChangeAspect="1"/>
+          </p:cNvPicPr>
+          <p:nvPr/>
+        </p:nvPicPr>
+        <p:blipFill>
+          <a:blip r:embed="rId2"/>
+          <a:stretch>
+            <a:fillRect/>
+          </a:stretch>
+        </p:blipFill>
+        <p:spPr>
+          <a:xfrm>
+            <a:off x="4572000" y="1737360"/>
+            <a:ext cx="7040880" cy="3794760"/>
+          </a:xfrm>
+          <a:prstGeom prst="rect">
+            <a:avLst/>
+          </a:prstGeom>
+        </p:spPr>
+      </p:pic>
     </p:spTree>
-    <p:extLst>
-      <p:ext uri="{BB962C8B-B14F-4D97-AF65-F5344CB8AC3E}">
-        <p14:creationId xmlns:p14="http://schemas.microsoft.com/office/powerpoint/2010/main" val="2914658586"/>
-      </p:ext>
-    </p:extLst>
   </p:cSld>
   <p:clrMapOvr>
     <a:masterClrMapping/>
   </p:clrMapOvr>
-</p:sld>
-</file>
-
-<file path=ppt/slides/slide3.xml><?xml version="1.0" encoding="utf-8"?>
-<p:sld xmlns:a="http://schemas.openxmlformats.org/drawingml/2006/main" xmlns:r="http://schemas.openxmlformats.org/officeDocument/2006/relationships" xmlns:p="http://schemas.openxmlformats.org/presentationml/2006/main">
-  <p:cSld>
-    <p:spTree>
-      <p:nvGrpSpPr>
-        <p:cNvPr id="1" name="">
-          <a:extLst>
-            <a:ext uri="{FF2B5EF4-FFF2-40B4-BE49-F238E27FC236}">
-              <a16:creationId xmlns:a16="http://schemas.microsoft.com/office/drawing/2014/main" id="{D3F3F47A-2A03-62D2-8A5D-F03932A437A1}"/>
-            </a:ext>
-          </a:extLst>
-        </p:cNvPr>
-        <p:cNvGrpSpPr/>
-        <p:nvPr/>
-      </p:nvGrpSpPr>
-      <p:grpSpPr>
-        <a:xfrm>
-          <a:off x="0" y="0"/>
-          <a:ext cx="0" cy="0"/>
-          <a:chOff x="0" y="0"/>
-          <a:chExt cx="0" cy="0"/>
-        </a:xfrm>
-      </p:grpSpPr>
-      <p:sp>
-        <p:nvSpPr>
-          <p:cNvPr id="2" name="Title 1">
-            <a:extLst>
-              <a:ext uri="{FF2B5EF4-FFF2-40B4-BE49-F238E27FC236}">
-                <a16:creationId xmlns:a16="http://schemas.microsoft.com/office/drawing/2014/main" id="{32DE052A-67C4-3C30-0BE8-A144FDC576E8}"/>
-              </a:ext>
-            </a:extLst>
-          </p:cNvPr>
-          <p:cNvSpPr>
-            <a:spLocks noGrp="1"/>
-          </p:cNvSpPr>
-          <p:nvPr>
-            <p:ph type="title"/>
-          </p:nvPr>
-        </p:nvSpPr>
-        <p:spPr>
-          <a:xfrm>
-            <a:off x="3605463" y="335847"/>
-            <a:ext cx="3826042" cy="861546"/>
-          </a:xfrm>
-        </p:spPr>
-        <p:txBody>
-          <a:bodyPr>
-            <a:normAutofit/>
-          </a:bodyPr>
-          <a:lstStyle/>
-          <a:p>
-            <a:r>
-              <a:rPr lang="en-US" dirty="0">
-                <a:solidFill>
-                  <a:schemeClr val="tx2">
-                    <a:lumMod val="75000"/>
-                    <a:lumOff val="25000"/>
-                  </a:schemeClr>
-                </a:solidFill>
-              </a:rPr>
-              <a:t>Môn Tin </a:t>
-            </a:r>
-            <a:r>
-              <a:rPr lang="en-US" dirty="0" err="1">
-                <a:solidFill>
-                  <a:schemeClr val="tx2">
-                    <a:lumMod val="75000"/>
-                    <a:lumOff val="25000"/>
-                  </a:schemeClr>
-                </a:solidFill>
-              </a:rPr>
-              <a:t>học</a:t>
-            </a:r>
-            <a:r>
-              <a:rPr lang="en-US" dirty="0">
-                <a:solidFill>
-                  <a:schemeClr val="tx2">
-                    <a:lumMod val="75000"/>
-                    <a:lumOff val="25000"/>
-                  </a:schemeClr>
-                </a:solidFill>
-              </a:rPr>
-              <a:t> </a:t>
-            </a:r>
-            <a:r>
-              <a:rPr lang="en-US" dirty="0" err="1">
-                <a:solidFill>
-                  <a:schemeClr val="tx2">
-                    <a:lumMod val="75000"/>
-                    <a:lumOff val="25000"/>
-                  </a:schemeClr>
-                </a:solidFill>
-              </a:rPr>
-              <a:t>lớp</a:t>
-            </a:r>
-            <a:r>
-              <a:rPr lang="en-US" dirty="0">
-                <a:solidFill>
-                  <a:schemeClr val="tx2">
-                    <a:lumMod val="75000"/>
-                    <a:lumOff val="25000"/>
-                  </a:schemeClr>
-                </a:solidFill>
-              </a:rPr>
-              <a:t> </a:t>
-            </a:r>
-          </a:p>
-        </p:txBody>
-      </p:sp>
-    </p:spTree>
-    <p:extLst>
-      <p:ext uri="{BB962C8B-B14F-4D97-AF65-F5344CB8AC3E}">
-        <p14:creationId xmlns:p14="http://schemas.microsoft.com/office/powerpoint/2010/main" val="504304636"/>
-      </p:ext>
-    </p:extLst>
-  </p:cSld>
-  <p:clrMapOvr>
-    <a:masterClrMapping/>
-  </p:clrMapOvr>
+  <p:transition spd="med">
+    <p:fade/>
+  </p:transition>
 </p:sld>
 </file>
 
 <file path=ppt/slides/slide4.xml><?xml version="1.0" encoding="utf-8"?>
-<p:sld xmlns:a="http://schemas.openxmlformats.org/drawingml/2006/main" xmlns:r="http://schemas.openxmlformats.org/officeDocument/2006/relationships" xmlns:p="http://schemas.openxmlformats.org/presentationml/2006/main">
+<p:sld xmlns:a="http://schemas.openxmlformats.org/drawingml/2006/main" xmlns:p="http://schemas.openxmlformats.org/presentationml/2006/main" xmlns:r="http://schemas.openxmlformats.org/officeDocument/2006/relationships">
   <p:cSld>
     <p:spTree>
       <p:nvGrpSpPr>
@@ -3882,73 +4903,558 @@
         <p:cNvGrpSpPr/>
         <p:nvPr/>
       </p:nvGrpSpPr>
-      <p:grpSpPr>
-        <a:xfrm>
-          <a:off x="0" y="0"/>
-          <a:ext cx="0" cy="0"/>
-          <a:chOff x="0" y="0"/>
-          <a:chExt cx="0" cy="0"/>
-        </a:xfrm>
-      </p:grpSpPr>
-      <p:sp>
-        <p:nvSpPr>
-          <p:cNvPr id="9" name="TextBox 39">
-            <a:extLst>
-              <a:ext uri="{FF2B5EF4-FFF2-40B4-BE49-F238E27FC236}">
-                <a16:creationId xmlns:a16="http://schemas.microsoft.com/office/drawing/2014/main" id="{9F8C78EA-1C6B-6C35-6191-129F37672DA8}"/>
-              </a:ext>
-            </a:extLst>
-          </p:cNvPr>
-          <p:cNvSpPr txBox="1"/>
-          <p:nvPr/>
-        </p:nvSpPr>
-        <p:spPr>
-          <a:xfrm>
-            <a:off x="320174" y="2413337"/>
-            <a:ext cx="11551651" cy="1015663"/>
+      <p:grpSpPr/>
+      <p:sp>
+        <p:nvSpPr>
+          <p:cNvPr id="2" name="Rectangle 1"/>
+          <p:cNvSpPr/>
+          <p:nvPr/>
+        </p:nvSpPr>
+        <p:spPr>
+          <a:xfrm>
+            <a:off x="0" y="1051560"/>
+            <a:ext cx="12188952" cy="4754879"/>
           </a:xfrm>
           <a:prstGeom prst="rect">
             <a:avLst/>
           </a:prstGeom>
+          <a:solidFill>
+            <a:srgbClr val="FDF2F8"/>
+          </a:solidFill>
           <a:ln>
             <a:noFill/>
           </a:ln>
         </p:spPr>
-        <p:txBody>
-          <a:bodyPr wrap="square" lIns="0" tIns="0" rIns="0" bIns="0" rtlCol="0" anchor="t">
+        <p:style>
+          <a:lnRef idx="1">
+            <a:schemeClr val="accent1"/>
+          </a:lnRef>
+          <a:fillRef idx="3">
+            <a:schemeClr val="accent1"/>
+          </a:fillRef>
+          <a:effectRef idx="2">
+            <a:schemeClr val="accent1"/>
+          </a:effectRef>
+          <a:fontRef idx="minor">
+            <a:schemeClr val="lt1"/>
+          </a:fontRef>
+        </p:style>
+        <p:txBody>
+          <a:bodyPr rtlCol="0" anchor="ctr"/>
+          <a:lstStyle/>
+          <a:p>
+            <a:pPr algn="ctr"/>
+          </a:p>
+        </p:txBody>
+      </p:sp>
+      <p:sp>
+        <p:nvSpPr>
+          <p:cNvPr id="3" name="Rounded Rectangle 2"/>
+          <p:cNvSpPr/>
+          <p:nvPr/>
+        </p:nvSpPr>
+        <p:spPr>
+          <a:xfrm>
+            <a:off x="365760" y="1143000"/>
+            <a:ext cx="2926080" cy="347471"/>
+          </a:xfrm>
+          <a:prstGeom prst="roundRect">
+            <a:avLst/>
+          </a:prstGeom>
+          <a:solidFill>
+            <a:srgbClr val="BE185D"/>
+          </a:solidFill>
+          <a:ln>
+            <a:noFill/>
+          </a:ln>
+        </p:spPr>
+        <p:style>
+          <a:lnRef idx="1">
+            <a:schemeClr val="accent1"/>
+          </a:lnRef>
+          <a:fillRef idx="3">
+            <a:schemeClr val="accent1"/>
+          </a:fillRef>
+          <a:effectRef idx="2">
+            <a:schemeClr val="accent1"/>
+          </a:effectRef>
+          <a:fontRef idx="minor">
+            <a:schemeClr val="lt1"/>
+          </a:fontRef>
+        </p:style>
+        <p:txBody>
+          <a:bodyPr rtlCol="0" anchor="ctr"/>
+          <a:lstStyle/>
+          <a:p>
+            <a:pPr algn="ctr"/>
+          </a:p>
+        </p:txBody>
+      </p:sp>
+      <p:sp>
+        <p:nvSpPr>
+          <p:cNvPr id="4" name="TextBox 3"/>
+          <p:cNvSpPr txBox="1"/>
+          <p:nvPr/>
+        </p:nvSpPr>
+        <p:spPr>
+          <a:xfrm>
+            <a:off x="365760" y="1143000"/>
+            <a:ext cx="2926080" cy="347471"/>
+          </a:xfrm>
+          <a:prstGeom prst="rect">
+            <a:avLst/>
+          </a:prstGeom>
+          <a:noFill/>
+        </p:spPr>
+        <p:txBody>
+          <a:bodyPr wrap="square" lIns="73152" rIns="73152" tIns="54864" bIns="54864">
             <a:spAutoFit/>
           </a:bodyPr>
           <a:lstStyle/>
           <a:p>
+            <a:pPr algn="ctr">
+              <a:defRPr sz="1300" b="1">
+                <a:solidFill>
+                  <a:srgbClr val="FFFFFF"/>
+                </a:solidFill>
+                <a:latin typeface="Arial"/>
+              </a:defRPr>
+            </a:pPr>
+            <a:r>
+              <a:t>QUY TRÌNH &amp; THAO TÁC</a:t>
+            </a:r>
+          </a:p>
+        </p:txBody>
+      </p:sp>
+      <p:sp>
+        <p:nvSpPr>
+          <p:cNvPr id="5" name="TextBox 4"/>
+          <p:cNvSpPr txBox="1"/>
+          <p:nvPr/>
+        </p:nvSpPr>
+        <p:spPr>
+          <a:xfrm>
+            <a:off x="3474720" y="1115568"/>
+            <a:ext cx="8046720" cy="411479"/>
+          </a:xfrm>
+          <a:prstGeom prst="rect">
+            <a:avLst/>
+          </a:prstGeom>
+          <a:noFill/>
+        </p:spPr>
+        <p:txBody>
+          <a:bodyPr wrap="square" lIns="73152" rIns="73152" tIns="54864" bIns="54864">
+            <a:spAutoFit/>
+          </a:bodyPr>
+          <a:lstStyle/>
+          <a:p>
+            <a:pPr algn="l">
+              <a:defRPr sz="2100" b="1">
+                <a:solidFill>
+                  <a:srgbClr val="831843"/>
+                </a:solidFill>
+                <a:latin typeface="Arial"/>
+              </a:defRPr>
+            </a:pPr>
+            <a:r>
+              <a:t>Kỹ thuật sử dụng từ khóa tìm kiếm trên Internet</a:t>
+            </a:r>
+          </a:p>
+        </p:txBody>
+      </p:sp>
+      <p:sp>
+        <p:nvSpPr>
+          <p:cNvPr id="6" name="Chevron 5"/>
+          <p:cNvSpPr/>
+          <p:nvPr/>
+        </p:nvSpPr>
+        <p:spPr>
+          <a:xfrm>
+            <a:off x="365760" y="1645920"/>
+            <a:ext cx="4754880" cy="868680"/>
+          </a:xfrm>
+          <a:prstGeom prst="chevron">
+            <a:avLst/>
+          </a:prstGeom>
+          <a:solidFill>
+            <a:srgbClr val="BE185D"/>
+          </a:solidFill>
+          <a:ln>
+            <a:noFill/>
+          </a:ln>
+        </p:spPr>
+        <p:style>
+          <a:lnRef idx="1">
+            <a:schemeClr val="accent1"/>
+          </a:lnRef>
+          <a:fillRef idx="3">
+            <a:schemeClr val="accent1"/>
+          </a:fillRef>
+          <a:effectRef idx="2">
+            <a:schemeClr val="accent1"/>
+          </a:effectRef>
+          <a:fontRef idx="minor">
+            <a:schemeClr val="lt1"/>
+          </a:fontRef>
+        </p:style>
+        <p:txBody>
+          <a:bodyPr rtlCol="0" anchor="ctr"/>
+          <a:lstStyle/>
+          <a:p>
             <a:pPr algn="ctr"/>
-            <a:r>
-              <a:rPr lang="en-US" sz="6600" dirty="0">
+          </a:p>
+        </p:txBody>
+      </p:sp>
+      <p:sp>
+        <p:nvSpPr>
+          <p:cNvPr id="7" name="TextBox 6"/>
+          <p:cNvSpPr txBox="1"/>
+          <p:nvPr/>
+        </p:nvSpPr>
+        <p:spPr>
+          <a:xfrm>
+            <a:off x="640080" y="1719072"/>
+            <a:ext cx="4206240" cy="731520"/>
+          </a:xfrm>
+          <a:prstGeom prst="rect">
+            <a:avLst/>
+          </a:prstGeom>
+          <a:noFill/>
+        </p:spPr>
+        <p:txBody>
+          <a:bodyPr wrap="square" lIns="73152" rIns="73152" tIns="54864" bIns="54864">
+            <a:spAutoFit/>
+          </a:bodyPr>
+          <a:lstStyle/>
+          <a:p>
+            <a:pPr algn="l">
+              <a:defRPr sz="1400" b="1">
                 <a:solidFill>
-                  <a:schemeClr val="tx2">
-                    <a:lumMod val="75000"/>
-                    <a:lumOff val="25000"/>
-                  </a:schemeClr>
+                  <a:srgbClr val="FFFFFF"/>
                 </a:solidFill>
-                <a:latin typeface="Monotype Corsiva" panose="03010101010201010101" pitchFamily="66" charset="0"/>
-                <a:ea typeface="Monggirella script"/>
-                <a:cs typeface="Monggirella script"/>
-                <a:sym typeface="Monggirella script"/>
-              </a:rPr>
-              <a:t>Thanks for listening</a:t>
-            </a:r>
-          </a:p>
-        </p:txBody>
-      </p:sp>
+                <a:latin typeface="Arial"/>
+              </a:defRPr>
+            </a:pPr>
+            <a:r>
+              <a:t>1. Chọn từ khóa ngắn gọn, chính xác (Keyword)</a:t>
+            </a:r>
+          </a:p>
+        </p:txBody>
+      </p:sp>
+      <p:sp>
+        <p:nvSpPr>
+          <p:cNvPr id="8" name="Chevron 7"/>
+          <p:cNvSpPr/>
+          <p:nvPr/>
+        </p:nvSpPr>
+        <p:spPr>
+          <a:xfrm>
+            <a:off x="365760" y="2624328"/>
+            <a:ext cx="4754880" cy="868680"/>
+          </a:xfrm>
+          <a:prstGeom prst="chevron">
+            <a:avLst/>
+          </a:prstGeom>
+          <a:solidFill>
+            <a:srgbClr val="EC4899"/>
+          </a:solidFill>
+          <a:ln>
+            <a:noFill/>
+          </a:ln>
+        </p:spPr>
+        <p:style>
+          <a:lnRef idx="1">
+            <a:schemeClr val="accent1"/>
+          </a:lnRef>
+          <a:fillRef idx="3">
+            <a:schemeClr val="accent1"/>
+          </a:fillRef>
+          <a:effectRef idx="2">
+            <a:schemeClr val="accent1"/>
+          </a:effectRef>
+          <a:fontRef idx="minor">
+            <a:schemeClr val="lt1"/>
+          </a:fontRef>
+        </p:style>
+        <p:txBody>
+          <a:bodyPr rtlCol="0" anchor="ctr"/>
+          <a:lstStyle/>
+          <a:p>
+            <a:pPr algn="ctr"/>
+          </a:p>
+        </p:txBody>
+      </p:sp>
+      <p:sp>
+        <p:nvSpPr>
+          <p:cNvPr id="9" name="TextBox 8"/>
+          <p:cNvSpPr txBox="1"/>
+          <p:nvPr/>
+        </p:nvSpPr>
+        <p:spPr>
+          <a:xfrm>
+            <a:off x="640080" y="2697480"/>
+            <a:ext cx="4206240" cy="731519"/>
+          </a:xfrm>
+          <a:prstGeom prst="rect">
+            <a:avLst/>
+          </a:prstGeom>
+          <a:noFill/>
+        </p:spPr>
+        <p:txBody>
+          <a:bodyPr wrap="square" lIns="73152" rIns="73152" tIns="54864" bIns="54864">
+            <a:spAutoFit/>
+          </a:bodyPr>
+          <a:lstStyle/>
+          <a:p>
+            <a:pPr algn="l">
+              <a:defRPr sz="1400" b="1">
+                <a:solidFill>
+                  <a:srgbClr val="FFFFFF"/>
+                </a:solidFill>
+                <a:latin typeface="Arial"/>
+              </a:defRPr>
+            </a:pPr>
+            <a:r>
+              <a:t>2. Đặt từ khóa trong dấu ngoặc kép " " để tìm chuẩn xác</a:t>
+            </a:r>
+          </a:p>
+        </p:txBody>
+      </p:sp>
+      <p:sp>
+        <p:nvSpPr>
+          <p:cNvPr id="10" name="Chevron 9"/>
+          <p:cNvSpPr/>
+          <p:nvPr/>
+        </p:nvSpPr>
+        <p:spPr>
+          <a:xfrm>
+            <a:off x="365760" y="3602736"/>
+            <a:ext cx="4754880" cy="868679"/>
+          </a:xfrm>
+          <a:prstGeom prst="chevron">
+            <a:avLst/>
+          </a:prstGeom>
+          <a:solidFill>
+            <a:srgbClr val="0D9488"/>
+          </a:solidFill>
+          <a:ln>
+            <a:noFill/>
+          </a:ln>
+        </p:spPr>
+        <p:style>
+          <a:lnRef idx="1">
+            <a:schemeClr val="accent1"/>
+          </a:lnRef>
+          <a:fillRef idx="3">
+            <a:schemeClr val="accent1"/>
+          </a:fillRef>
+          <a:effectRef idx="2">
+            <a:schemeClr val="accent1"/>
+          </a:effectRef>
+          <a:fontRef idx="minor">
+            <a:schemeClr val="lt1"/>
+          </a:fontRef>
+        </p:style>
+        <p:txBody>
+          <a:bodyPr rtlCol="0" anchor="ctr"/>
+          <a:lstStyle/>
+          <a:p>
+            <a:pPr algn="ctr"/>
+          </a:p>
+        </p:txBody>
+      </p:sp>
+      <p:sp>
+        <p:nvSpPr>
+          <p:cNvPr id="11" name="TextBox 10"/>
+          <p:cNvSpPr txBox="1"/>
+          <p:nvPr/>
+        </p:nvSpPr>
+        <p:spPr>
+          <a:xfrm>
+            <a:off x="640080" y="3675887"/>
+            <a:ext cx="4206240" cy="731519"/>
+          </a:xfrm>
+          <a:prstGeom prst="rect">
+            <a:avLst/>
+          </a:prstGeom>
+          <a:noFill/>
+        </p:spPr>
+        <p:txBody>
+          <a:bodyPr wrap="square" lIns="73152" rIns="73152" tIns="54864" bIns="54864">
+            <a:spAutoFit/>
+          </a:bodyPr>
+          <a:lstStyle/>
+          <a:p>
+            <a:pPr algn="l">
+              <a:defRPr sz="1400" b="1">
+                <a:solidFill>
+                  <a:srgbClr val="FFFFFF"/>
+                </a:solidFill>
+                <a:latin typeface="Arial"/>
+              </a:defRPr>
+            </a:pPr>
+            <a:r>
+              <a:t>3. Chọn lọc từ website tin cậy (.gov.vn, .edu.vn)</a:t>
+            </a:r>
+          </a:p>
+        </p:txBody>
+      </p:sp>
+      <p:sp>
+        <p:nvSpPr>
+          <p:cNvPr id="12" name="Chevron 11"/>
+          <p:cNvSpPr/>
+          <p:nvPr/>
+        </p:nvSpPr>
+        <p:spPr>
+          <a:xfrm>
+            <a:off x="365760" y="4581144"/>
+            <a:ext cx="4754880" cy="868680"/>
+          </a:xfrm>
+          <a:prstGeom prst="chevron">
+            <a:avLst/>
+          </a:prstGeom>
+          <a:solidFill>
+            <a:srgbClr val="D97706"/>
+          </a:solidFill>
+          <a:ln>
+            <a:noFill/>
+          </a:ln>
+        </p:spPr>
+        <p:style>
+          <a:lnRef idx="1">
+            <a:schemeClr val="accent1"/>
+          </a:lnRef>
+          <a:fillRef idx="3">
+            <a:schemeClr val="accent1"/>
+          </a:fillRef>
+          <a:effectRef idx="2">
+            <a:schemeClr val="accent1"/>
+          </a:effectRef>
+          <a:fontRef idx="minor">
+            <a:schemeClr val="lt1"/>
+          </a:fontRef>
+        </p:style>
+        <p:txBody>
+          <a:bodyPr rtlCol="0" anchor="ctr"/>
+          <a:lstStyle/>
+          <a:p>
+            <a:pPr algn="ctr"/>
+          </a:p>
+        </p:txBody>
+      </p:sp>
+      <p:sp>
+        <p:nvSpPr>
+          <p:cNvPr id="13" name="TextBox 12"/>
+          <p:cNvSpPr txBox="1"/>
+          <p:nvPr/>
+        </p:nvSpPr>
+        <p:spPr>
+          <a:xfrm>
+            <a:off x="640080" y="4654296"/>
+            <a:ext cx="4206240" cy="731519"/>
+          </a:xfrm>
+          <a:prstGeom prst="rect">
+            <a:avLst/>
+          </a:prstGeom>
+          <a:noFill/>
+        </p:spPr>
+        <p:txBody>
+          <a:bodyPr wrap="square" lIns="73152" rIns="73152" tIns="54864" bIns="54864">
+            <a:spAutoFit/>
+          </a:bodyPr>
+          <a:lstStyle/>
+          <a:p>
+            <a:pPr algn="l">
+              <a:defRPr sz="1400" b="1">
+                <a:solidFill>
+                  <a:srgbClr val="FFFFFF"/>
+                </a:solidFill>
+                <a:latin typeface="Arial"/>
+              </a:defRPr>
+            </a:pPr>
+            <a:r>
+              <a:t>4. Đánh giá và tổng hợp thông tin trước khi áp dụng</a:t>
+            </a:r>
+          </a:p>
+        </p:txBody>
+      </p:sp>
+      <p:sp>
+        <p:nvSpPr>
+          <p:cNvPr id="14" name="Rounded Rectangle 13"/>
+          <p:cNvSpPr/>
+          <p:nvPr/>
+        </p:nvSpPr>
+        <p:spPr>
+          <a:xfrm>
+            <a:off x="5394960" y="1645920"/>
+            <a:ext cx="6309360" cy="3977639"/>
+          </a:xfrm>
+          <a:prstGeom prst="roundRect">
+            <a:avLst/>
+          </a:prstGeom>
+          <a:solidFill>
+            <a:srgbClr val="FFFFFF"/>
+          </a:solidFill>
+          <a:ln w="19050">
+            <a:solidFill>
+              <a:srgbClr val="CBD5E1"/>
+            </a:solidFill>
+          </a:ln>
+        </p:spPr>
+        <p:style>
+          <a:lnRef idx="1">
+            <a:schemeClr val="accent1"/>
+          </a:lnRef>
+          <a:fillRef idx="3">
+            <a:schemeClr val="accent1"/>
+          </a:fillRef>
+          <a:effectRef idx="2">
+            <a:schemeClr val="accent1"/>
+          </a:effectRef>
+          <a:fontRef idx="minor">
+            <a:schemeClr val="lt1"/>
+          </a:fontRef>
+        </p:style>
+        <p:txBody>
+          <a:bodyPr rtlCol="0" anchor="ctr"/>
+          <a:lstStyle/>
+          <a:p>
+            <a:pPr algn="ctr"/>
+          </a:p>
+        </p:txBody>
+      </p:sp>
+      <p:pic>
+        <p:nvPicPr>
+          <p:cNvPr id="15" name="Picture 14" descr="sgk_lop5_bai3_thuc_hanh_search.png"/>
+          <p:cNvPicPr>
+            <a:picLocks noChangeAspect="1"/>
+          </p:cNvPicPr>
+          <p:nvPr/>
+        </p:nvPicPr>
+        <p:blipFill>
+          <a:blip r:embed="rId2"/>
+          <a:stretch>
+            <a:fillRect/>
+          </a:stretch>
+        </p:blipFill>
+        <p:spPr>
+          <a:xfrm>
+            <a:off x="5486400" y="1737360"/>
+            <a:ext cx="6126480" cy="3794760"/>
+          </a:xfrm>
+          <a:prstGeom prst="rect">
+            <a:avLst/>
+          </a:prstGeom>
+        </p:spPr>
+      </p:pic>
     </p:spTree>
-    <p:extLst>
-      <p:ext uri="{BB962C8B-B14F-4D97-AF65-F5344CB8AC3E}">
-        <p14:creationId xmlns:p14="http://schemas.microsoft.com/office/powerpoint/2010/main" val="1292696729"/>
-      </p:ext>
-    </p:extLst>
   </p:cSld>
   <p:clrMapOvr>
     <a:masterClrMapping/>
   </p:clrMapOvr>
+  <p:transition spd="med">
+    <p:fade/>
+  </p:transition>
 </p:sld>
 </file>
 
@@ -3964,16 +5470,183 @@
       <p:grpSpPr/>
       <p:sp>
         <p:nvSpPr>
-          <p:cNvPr id="3" name="Rectangle 2"/>
+          <p:cNvPr id="2" name="Rectangle 1"/>
           <p:cNvSpPr/>
           <p:nvPr/>
         </p:nvSpPr>
         <p:spPr>
           <a:xfrm>
             <a:off x="0" y="1051560"/>
-            <a:ext cx="12188952" cy="1645920"/>
+            <a:ext cx="12188952" cy="4754879"/>
           </a:xfrm>
           <a:prstGeom prst="rect">
+            <a:avLst/>
+          </a:prstGeom>
+          <a:solidFill>
+            <a:srgbClr val="FDF2F8"/>
+          </a:solidFill>
+          <a:ln>
+            <a:noFill/>
+          </a:ln>
+        </p:spPr>
+        <p:style>
+          <a:lnRef idx="1">
+            <a:schemeClr val="accent1"/>
+          </a:lnRef>
+          <a:fillRef idx="3">
+            <a:schemeClr val="accent1"/>
+          </a:fillRef>
+          <a:effectRef idx="2">
+            <a:schemeClr val="accent1"/>
+          </a:effectRef>
+          <a:fontRef idx="minor">
+            <a:schemeClr val="lt1"/>
+          </a:fontRef>
+        </p:style>
+        <p:txBody>
+          <a:bodyPr rtlCol="0" anchor="ctr"/>
+          <a:lstStyle/>
+          <a:p>
+            <a:pPr algn="ctr"/>
+          </a:p>
+        </p:txBody>
+      </p:sp>
+      <p:sp>
+        <p:nvSpPr>
+          <p:cNvPr id="3" name="Rounded Rectangle 2"/>
+          <p:cNvSpPr/>
+          <p:nvPr/>
+        </p:nvSpPr>
+        <p:spPr>
+          <a:xfrm>
+            <a:off x="365760" y="1188720"/>
+            <a:ext cx="11247120" cy="822960"/>
+          </a:xfrm>
+          <a:prstGeom prst="roundRect">
+            <a:avLst/>
+          </a:prstGeom>
+          <a:solidFill>
+            <a:srgbClr val="BE185D"/>
+          </a:solidFill>
+          <a:ln>
+            <a:noFill/>
+          </a:ln>
+        </p:spPr>
+        <p:style>
+          <a:lnRef idx="1">
+            <a:schemeClr val="accent1"/>
+          </a:lnRef>
+          <a:fillRef idx="3">
+            <a:schemeClr val="accent1"/>
+          </a:fillRef>
+          <a:effectRef idx="2">
+            <a:schemeClr val="accent1"/>
+          </a:effectRef>
+          <a:fontRef idx="minor">
+            <a:schemeClr val="lt1"/>
+          </a:fontRef>
+        </p:style>
+        <p:txBody>
+          <a:bodyPr rtlCol="0" anchor="ctr"/>
+          <a:lstStyle/>
+          <a:p>
+            <a:pPr algn="ctr"/>
+          </a:p>
+        </p:txBody>
+      </p:sp>
+      <p:sp>
+        <p:nvSpPr>
+          <p:cNvPr id="4" name="TextBox 3"/>
+          <p:cNvSpPr txBox="1"/>
+          <p:nvPr/>
+        </p:nvSpPr>
+        <p:spPr>
+          <a:xfrm>
+            <a:off x="640080" y="1234440"/>
+            <a:ext cx="10698480" cy="731520"/>
+          </a:xfrm>
+          <a:prstGeom prst="rect">
+            <a:avLst/>
+          </a:prstGeom>
+          <a:noFill/>
+        </p:spPr>
+        <p:txBody>
+          <a:bodyPr wrap="square" lIns="73152" rIns="73152" tIns="54864" bIns="54864">
+            <a:spAutoFit/>
+          </a:bodyPr>
+          <a:lstStyle/>
+          <a:p>
+            <a:pPr algn="l">
+              <a:defRPr sz="1800" b="1">
+                <a:solidFill>
+                  <a:srgbClr val="FFFFFF"/>
+                </a:solidFill>
+                <a:latin typeface="Arial"/>
+              </a:defRPr>
+            </a:pPr>
+            <a:r>
+              <a:t>❓ Vì sao phải tìm kiếm thông tin trước khi giải quyết một vấn đề?</a:t>
+            </a:r>
+          </a:p>
+        </p:txBody>
+      </p:sp>
+      <p:sp>
+        <p:nvSpPr>
+          <p:cNvPr id="5" name="Rounded Rectangle 4"/>
+          <p:cNvSpPr/>
+          <p:nvPr/>
+        </p:nvSpPr>
+        <p:spPr>
+          <a:xfrm>
+            <a:off x="365760" y="2103120"/>
+            <a:ext cx="6400800" cy="2194559"/>
+          </a:xfrm>
+          <a:prstGeom prst="roundRect">
+            <a:avLst/>
+          </a:prstGeom>
+          <a:solidFill>
+            <a:srgbClr val="FFFFFF"/>
+          </a:solidFill>
+          <a:ln w="19050">
+            <a:solidFill>
+              <a:srgbClr val="EC4899"/>
+            </a:solidFill>
+          </a:ln>
+        </p:spPr>
+        <p:style>
+          <a:lnRef idx="1">
+            <a:schemeClr val="accent1"/>
+          </a:lnRef>
+          <a:fillRef idx="3">
+            <a:schemeClr val="accent1"/>
+          </a:fillRef>
+          <a:effectRef idx="2">
+            <a:schemeClr val="accent1"/>
+          </a:effectRef>
+          <a:fontRef idx="minor">
+            <a:schemeClr val="lt1"/>
+          </a:fontRef>
+        </p:style>
+        <p:txBody>
+          <a:bodyPr rtlCol="0" anchor="ctr"/>
+          <a:lstStyle/>
+          <a:p>
+            <a:pPr algn="ctr"/>
+          </a:p>
+        </p:txBody>
+      </p:sp>
+      <p:sp>
+        <p:nvSpPr>
+          <p:cNvPr id="6" name="Rounded Rectangle 5"/>
+          <p:cNvSpPr/>
+          <p:nvPr/>
+        </p:nvSpPr>
+        <p:spPr>
+          <a:xfrm>
+            <a:off x="365760" y="2103120"/>
+            <a:ext cx="164592" cy="2194559"/>
+          </a:xfrm>
+          <a:prstGeom prst="roundRect">
             <a:avLst/>
           </a:prstGeom>
           <a:solidFill>
@@ -4007,23 +5680,97 @@
       </p:sp>
       <p:sp>
         <p:nvSpPr>
-          <p:cNvPr id="2" name="Rectangle 1"/>
+          <p:cNvPr id="7" name="TextBox 6"/>
+          <p:cNvSpPr txBox="1"/>
+          <p:nvPr/>
+        </p:nvSpPr>
+        <p:spPr>
+          <a:xfrm>
+            <a:off x="640080" y="2240280"/>
+            <a:ext cx="5943600" cy="822959"/>
+          </a:xfrm>
+          <a:prstGeom prst="rect">
+            <a:avLst/>
+          </a:prstGeom>
+          <a:noFill/>
+        </p:spPr>
+        <p:txBody>
+          <a:bodyPr wrap="square" lIns="73152" rIns="73152" tIns="54864" bIns="54864">
+            <a:spAutoFit/>
+          </a:bodyPr>
+          <a:lstStyle/>
+          <a:p>
+            <a:pPr algn="l">
+              <a:defRPr sz="1500" b="0">
+                <a:solidFill>
+                  <a:srgbClr val="0F172A"/>
+                </a:solidFill>
+                <a:latin typeface="Arial"/>
+              </a:defRPr>
+            </a:pPr>
+            <a:r>
+              <a:t>👉 Giúp nắm bắt đầy đủ dữ liệu thực tế và điều kiện liên quan.</a:t>
+            </a:r>
+          </a:p>
+        </p:txBody>
+      </p:sp>
+      <p:sp>
+        <p:nvSpPr>
+          <p:cNvPr id="8" name="TextBox 7"/>
+          <p:cNvSpPr txBox="1"/>
+          <p:nvPr/>
+        </p:nvSpPr>
+        <p:spPr>
+          <a:xfrm>
+            <a:off x="640080" y="3200400"/>
+            <a:ext cx="5943600" cy="822960"/>
+          </a:xfrm>
+          <a:prstGeom prst="rect">
+            <a:avLst/>
+          </a:prstGeom>
+          <a:noFill/>
+        </p:spPr>
+        <p:txBody>
+          <a:bodyPr wrap="square" lIns="73152" rIns="73152" tIns="54864" bIns="54864">
+            <a:spAutoFit/>
+          </a:bodyPr>
+          <a:lstStyle/>
+          <a:p>
+            <a:pPr algn="l">
+              <a:defRPr sz="1500" b="0">
+                <a:solidFill>
+                  <a:srgbClr val="0F172A"/>
+                </a:solidFill>
+                <a:latin typeface="Arial"/>
+              </a:defRPr>
+            </a:pPr>
+            <a:r>
+              <a:t>👉 Đưa ra quyết định chính xác, tiết kiệm thời gian và công sức.</a:t>
+            </a:r>
+          </a:p>
+        </p:txBody>
+      </p:sp>
+      <p:sp>
+        <p:nvSpPr>
+          <p:cNvPr id="9" name="Rounded Rectangle 8"/>
           <p:cNvSpPr/>
           <p:nvPr/>
         </p:nvSpPr>
         <p:spPr>
           <a:xfrm>
-            <a:off x="0" y="1051560"/>
-            <a:ext cx="12188952" cy="4754879"/>
-          </a:xfrm>
-          <a:prstGeom prst="rect">
+            <a:off x="6949440" y="2103120"/>
+            <a:ext cx="4663440" cy="2194559"/>
+          </a:xfrm>
+          <a:prstGeom prst="roundRect">
             <a:avLst/>
           </a:prstGeom>
           <a:solidFill>
-            <a:srgbClr val="BE185D"/>
+            <a:srgbClr val="FFFFFF"/>
           </a:solidFill>
-          <a:ln>
-            <a:noFill/>
+          <a:ln w="19050">
+            <a:solidFill>
+              <a:srgbClr val="CBD5E1"/>
+            </a:solidFill>
           </a:ln>
         </p:spPr>
         <p:style>
@@ -4048,16 +5795,83 @@
           </a:p>
         </p:txBody>
       </p:sp>
-      <p:sp>
-        <p:nvSpPr>
-          <p:cNvPr id="4" name="TextBox 3"/>
+      <p:pic>
+        <p:nvPicPr>
+          <p:cNvPr id="10" name="Picture 9" descr="sgk_lop5_bai3_cac_buoc_tim_kiem.png"/>
+          <p:cNvPicPr>
+            <a:picLocks noChangeAspect="1"/>
+          </p:cNvPicPr>
+          <p:nvPr/>
+        </p:nvPicPr>
+        <p:blipFill>
+          <a:blip r:embed="rId2"/>
+          <a:stretch>
+            <a:fillRect/>
+          </a:stretch>
+        </p:blipFill>
+        <p:spPr>
+          <a:xfrm>
+            <a:off x="7040880" y="2148840"/>
+            <a:ext cx="4480560" cy="2103120"/>
+          </a:xfrm>
+          <a:prstGeom prst="rect">
+            <a:avLst/>
+          </a:prstGeom>
+        </p:spPr>
+      </p:pic>
+      <p:sp>
+        <p:nvSpPr>
+          <p:cNvPr id="11" name="Rounded Rectangle 10"/>
+          <p:cNvSpPr/>
+          <p:nvPr/>
+        </p:nvSpPr>
+        <p:spPr>
+          <a:xfrm>
+            <a:off x="365760" y="4434840"/>
+            <a:ext cx="11247120" cy="1188719"/>
+          </a:xfrm>
+          <a:prstGeom prst="roundRect">
+            <a:avLst/>
+          </a:prstGeom>
+          <a:solidFill>
+            <a:srgbClr val="EA580C"/>
+          </a:solidFill>
+          <a:ln>
+            <a:noFill/>
+          </a:ln>
+        </p:spPr>
+        <p:style>
+          <a:lnRef idx="1">
+            <a:schemeClr val="accent1"/>
+          </a:lnRef>
+          <a:fillRef idx="3">
+            <a:schemeClr val="accent1"/>
+          </a:fillRef>
+          <a:effectRef idx="2">
+            <a:schemeClr val="accent1"/>
+          </a:effectRef>
+          <a:fontRef idx="minor">
+            <a:schemeClr val="lt1"/>
+          </a:fontRef>
+        </p:style>
+        <p:txBody>
+          <a:bodyPr rtlCol="0" anchor="ctr"/>
+          <a:lstStyle/>
+          <a:p>
+            <a:pPr algn="ctr"/>
+          </a:p>
+        </p:txBody>
+      </p:sp>
+      <p:sp>
+        <p:nvSpPr>
+          <p:cNvPr id="12" name="TextBox 11"/>
           <p:cNvSpPr txBox="1"/>
           <p:nvPr/>
         </p:nvSpPr>
         <p:spPr>
           <a:xfrm>
-            <a:off x="731520" y="1828800"/>
-            <a:ext cx="6858000" cy="1371600"/>
+            <a:off x="640080" y="4480560"/>
+            <a:ext cx="10698480" cy="320039"/>
           </a:xfrm>
           <a:prstGeom prst="rect">
             <a:avLst/>
@@ -4065,13 +5879,49 @@
           <a:noFill/>
         </p:spPr>
         <p:txBody>
-          <a:bodyPr wrap="square" lIns="73152" rIns="73152">
+          <a:bodyPr wrap="square" lIns="73152" rIns="73152" tIns="54864" bIns="54864">
             <a:spAutoFit/>
           </a:bodyPr>
           <a:lstStyle/>
           <a:p>
             <a:pPr algn="l">
-              <a:defRPr sz="3400" b="1">
+              <a:defRPr sz="1400" b="1">
+                <a:solidFill>
+                  <a:srgbClr val="FEF08A"/>
+                </a:solidFill>
+                <a:latin typeface="Arial"/>
+              </a:defRPr>
+            </a:pPr>
+            <a:r>
+              <a:t>📌 GHI NHỚ TRỌNG TÂM (SGK)</a:t>
+            </a:r>
+          </a:p>
+        </p:txBody>
+      </p:sp>
+      <p:sp>
+        <p:nvSpPr>
+          <p:cNvPr id="13" name="TextBox 12"/>
+          <p:cNvSpPr txBox="1"/>
+          <p:nvPr/>
+        </p:nvSpPr>
+        <p:spPr>
+          <a:xfrm>
+            <a:off x="640080" y="4800600"/>
+            <a:ext cx="10698480" cy="777239"/>
+          </a:xfrm>
+          <a:prstGeom prst="rect">
+            <a:avLst/>
+          </a:prstGeom>
+          <a:noFill/>
+        </p:spPr>
+        <p:txBody>
+          <a:bodyPr wrap="square" lIns="73152" rIns="73152" tIns="54864" bIns="54864">
+            <a:spAutoFit/>
+          </a:bodyPr>
+          <a:lstStyle/>
+          <a:p>
+            <a:pPr algn="l">
+              <a:defRPr sz="1600" b="1">
                 <a:solidFill>
                   <a:srgbClr val="FFFFFF"/>
                 </a:solidFill>
@@ -4079,43 +5929,7 @@
               </a:defRPr>
             </a:pPr>
             <a:r>
-              <a:t>Tìm kiếm thông tin hiệu quả 🔍</a:t>
-            </a:r>
-          </a:p>
-        </p:txBody>
-      </p:sp>
-      <p:sp>
-        <p:nvSpPr>
-          <p:cNvPr id="5" name="TextBox 4"/>
-          <p:cNvSpPr txBox="1"/>
-          <p:nvPr/>
-        </p:nvSpPr>
-        <p:spPr>
-          <a:xfrm>
-            <a:off x="731520" y="3474720"/>
-            <a:ext cx="6858000" cy="731519"/>
-          </a:xfrm>
-          <a:prstGeom prst="rect">
-            <a:avLst/>
-          </a:prstGeom>
-          <a:noFill/>
-        </p:spPr>
-        <p:txBody>
-          <a:bodyPr wrap="square" lIns="73152" rIns="73152">
-            <a:spAutoFit/>
-          </a:bodyPr>
-          <a:lstStyle/>
-          <a:p>
-            <a:pPr algn="l">
-              <a:defRPr sz="2000" b="0">
-                <a:solidFill>
-                  <a:srgbClr val="FFFFFF"/>
-                </a:solidFill>
-                <a:latin typeface="Arial"/>
-              </a:defRPr>
-            </a:pPr>
-            <a:r>
-              <a:t>Tin học • Lớp 5 • Tiết 3</a:t>
+              <a:t>Thu thập và tìm kiếm thông tin là bước đầu tiên cực kỳ quan trọng giúp em giải quyết mọi vấn đề một cách khoa học!</a:t>
             </a:r>
           </a:p>
         </p:txBody>
@@ -4186,20 +6000,20 @@
       </p:sp>
       <p:sp>
         <p:nvSpPr>
-          <p:cNvPr id="3" name="Rectangle 2"/>
+          <p:cNvPr id="3" name="Rounded Rectangle 2"/>
           <p:cNvSpPr/>
           <p:nvPr/>
         </p:nvSpPr>
         <p:spPr>
           <a:xfrm>
-            <a:off x="0" y="1097280"/>
-            <a:ext cx="12188952" cy="411479"/>
-          </a:xfrm>
-          <a:prstGeom prst="rect">
+            <a:off x="365760" y="1143000"/>
+            <a:ext cx="2926080" cy="347471"/>
+          </a:xfrm>
+          <a:prstGeom prst="roundRect">
             <a:avLst/>
           </a:prstGeom>
           <a:solidFill>
-            <a:srgbClr val="BE185D"/>
+            <a:srgbClr val="EA580C"/>
           </a:solidFill>
           <a:ln>
             <a:noFill/>
@@ -4235,8 +6049,8 @@
         </p:nvSpPr>
         <p:spPr>
           <a:xfrm>
-            <a:off x="274320" y="1124712"/>
-            <a:ext cx="11640312" cy="365759"/>
+            <a:off x="365760" y="1143000"/>
+            <a:ext cx="2926080" cy="347471"/>
           </a:xfrm>
           <a:prstGeom prst="rect">
             <a:avLst/>
@@ -4244,12 +6058,12 @@
           <a:noFill/>
         </p:spPr>
         <p:txBody>
-          <a:bodyPr wrap="square" lIns="73152" rIns="73152">
+          <a:bodyPr wrap="square" lIns="73152" rIns="73152" tIns="54864" bIns="54864">
             <a:spAutoFit/>
           </a:bodyPr>
           <a:lstStyle/>
           <a:p>
-            <a:pPr algn="l">
+            <a:pPr algn="ctr">
               <a:defRPr sz="1300" b="1">
                 <a:solidFill>
                   <a:srgbClr val="FFFFFF"/>
@@ -4258,57 +6072,21 @@
               </a:defRPr>
             </a:pPr>
             <a:r>
-              <a:t>  LỚP 5 • VÍ DỤ MINH HỌA TRỰC QUAN</a:t>
-            </a:r>
-          </a:p>
-        </p:txBody>
-      </p:sp>
-      <p:sp>
-        <p:nvSpPr>
-          <p:cNvPr id="5" name="TextBox 4"/>
-          <p:cNvSpPr txBox="1"/>
-          <p:nvPr/>
-        </p:nvSpPr>
-        <p:spPr>
-          <a:xfrm>
-            <a:off x="457200" y="1600200"/>
-            <a:ext cx="11274552" cy="594359"/>
-          </a:xfrm>
-          <a:prstGeom prst="rect">
-            <a:avLst/>
-          </a:prstGeom>
-          <a:noFill/>
-        </p:spPr>
-        <p:txBody>
-          <a:bodyPr wrap="square" lIns="73152" rIns="73152">
-            <a:spAutoFit/>
-          </a:bodyPr>
-          <a:lstStyle/>
-          <a:p>
-            <a:pPr algn="l">
-              <a:defRPr sz="2600" b="1">
-                <a:solidFill>
-                  <a:srgbClr val="831843"/>
-                </a:solidFill>
-                <a:latin typeface="Arial"/>
-              </a:defRPr>
-            </a:pPr>
-            <a:r>
-              <a:t>Kỹ thuật sử dụng Từ khóa tìm kiếm</a:t>
-            </a:r>
-          </a:p>
-        </p:txBody>
-      </p:sp>
-      <p:sp>
-        <p:nvSpPr>
-          <p:cNvPr id="6" name="Rounded Rectangle 5"/>
+              <a:t>LUYỆN TẬP NHANH</a:t>
+            </a:r>
+          </a:p>
+        </p:txBody>
+      </p:sp>
+      <p:sp>
+        <p:nvSpPr>
+          <p:cNvPr id="5" name="Rounded Rectangle 4"/>
           <p:cNvSpPr/>
           <p:nvPr/>
         </p:nvSpPr>
         <p:spPr>
           <a:xfrm>
-            <a:off x="457200" y="2286000"/>
-            <a:ext cx="4206240" cy="3383279"/>
+            <a:off x="365760" y="1600200"/>
+            <a:ext cx="11247120" cy="914400"/>
           </a:xfrm>
           <a:prstGeom prst="roundRect">
             <a:avLst/>
@@ -4318,7 +6096,7 @@
           </a:solidFill>
           <a:ln w="19050">
             <a:solidFill>
-              <a:srgbClr val="EC4899"/>
+              <a:srgbClr val="BE185D"/>
             </a:solidFill>
           </a:ln>
         </p:spPr>
@@ -4346,20 +6124,20 @@
       </p:sp>
       <p:sp>
         <p:nvSpPr>
-          <p:cNvPr id="7" name="Rectangle 6"/>
+          <p:cNvPr id="6" name="Rounded Rectangle 5"/>
           <p:cNvSpPr/>
           <p:nvPr/>
         </p:nvSpPr>
         <p:spPr>
           <a:xfrm>
-            <a:off x="457200" y="2286000"/>
-            <a:ext cx="109728" cy="3383279"/>
-          </a:xfrm>
-          <a:prstGeom prst="rect">
+            <a:off x="365760" y="1600200"/>
+            <a:ext cx="182880" cy="914400"/>
+          </a:xfrm>
+          <a:prstGeom prst="roundRect">
             <a:avLst/>
           </a:prstGeom>
           <a:solidFill>
-            <a:srgbClr val="EC4899"/>
+            <a:srgbClr val="BE185D"/>
           </a:solidFill>
           <a:ln>
             <a:noFill/>
@@ -4389,14 +6167,14 @@
       </p:sp>
       <p:sp>
         <p:nvSpPr>
-          <p:cNvPr id="8" name="TextBox 7"/>
+          <p:cNvPr id="7" name="TextBox 6"/>
           <p:cNvSpPr txBox="1"/>
           <p:nvPr/>
         </p:nvSpPr>
         <p:spPr>
           <a:xfrm>
-            <a:off x="731520" y="2560320"/>
-            <a:ext cx="3749039" cy="2834639"/>
+            <a:off x="640080" y="1691640"/>
+            <a:ext cx="10698480" cy="731520"/>
           </a:xfrm>
           <a:prstGeom prst="rect">
             <a:avLst/>
@@ -4404,16 +6182,13 @@
           <a:noFill/>
         </p:spPr>
         <p:txBody>
-          <a:bodyPr wrap="square" lIns="73152" rIns="73152">
+          <a:bodyPr wrap="square" lIns="73152" rIns="73152" tIns="54864" bIns="54864">
             <a:spAutoFit/>
           </a:bodyPr>
           <a:lstStyle/>
           <a:p>
             <a:pPr algn="l">
-              <a:spcAft>
-                <a:spcPts val="600"/>
-              </a:spcAft>
-              <a:defRPr sz="2000" b="1">
+              <a:defRPr sz="1700" b="1">
                 <a:solidFill>
                   <a:srgbClr val="0F172A"/>
                 </a:solidFill>
@@ -4421,15 +6196,159 @@
               </a:defRPr>
             </a:pPr>
             <a:r>
-              <a:t>• Chọn từ khóa ngắn gọn, chính xác</a:t>
-            </a:r>
-          </a:p>
+              <a:t>❓ Để tìm chính xác cụm từ 'dự báo thời tiết Đà Lạt', em nên gõ như thế nào?</a:t>
+            </a:r>
+          </a:p>
+        </p:txBody>
+      </p:sp>
+      <p:sp>
+        <p:nvSpPr>
+          <p:cNvPr id="8" name="Rounded Rectangle 7"/>
+          <p:cNvSpPr/>
+          <p:nvPr/>
+        </p:nvSpPr>
+        <p:spPr>
+          <a:xfrm>
+            <a:off x="365760" y="2651760"/>
+            <a:ext cx="5440680" cy="1325879"/>
+          </a:xfrm>
+          <a:prstGeom prst="roundRect">
+            <a:avLst/>
+          </a:prstGeom>
+          <a:solidFill>
+            <a:srgbClr val="FFFFFF"/>
+          </a:solidFill>
+          <a:ln w="19050">
+            <a:solidFill>
+              <a:srgbClr val="CBD5E1"/>
+            </a:solidFill>
+          </a:ln>
+        </p:spPr>
+        <p:style>
+          <a:lnRef idx="1">
+            <a:schemeClr val="accent1"/>
+          </a:lnRef>
+          <a:fillRef idx="3">
+            <a:schemeClr val="accent1"/>
+          </a:fillRef>
+          <a:effectRef idx="2">
+            <a:schemeClr val="accent1"/>
+          </a:effectRef>
+          <a:fontRef idx="minor">
+            <a:schemeClr val="lt1"/>
+          </a:fontRef>
+        </p:style>
+        <p:txBody>
+          <a:bodyPr rtlCol="0" anchor="ctr"/>
+          <a:lstStyle/>
+          <a:p>
+            <a:pPr algn="ctr"/>
+          </a:p>
+        </p:txBody>
+      </p:sp>
+      <p:sp>
+        <p:nvSpPr>
+          <p:cNvPr id="9" name="Oval 8"/>
+          <p:cNvSpPr/>
+          <p:nvPr/>
+        </p:nvSpPr>
+        <p:spPr>
+          <a:xfrm>
+            <a:off x="548640" y="2880360"/>
+            <a:ext cx="822960" cy="822959"/>
+          </a:xfrm>
+          <a:prstGeom prst="ellipse">
+            <a:avLst/>
+          </a:prstGeom>
+          <a:solidFill>
+            <a:srgbClr val="BE185D"/>
+          </a:solidFill>
+          <a:ln>
+            <a:noFill/>
+          </a:ln>
+        </p:spPr>
+        <p:style>
+          <a:lnRef idx="1">
+            <a:schemeClr val="accent1"/>
+          </a:lnRef>
+          <a:fillRef idx="3">
+            <a:schemeClr val="accent1"/>
+          </a:fillRef>
+          <a:effectRef idx="2">
+            <a:schemeClr val="accent1"/>
+          </a:effectRef>
+          <a:fontRef idx="minor">
+            <a:schemeClr val="lt1"/>
+          </a:fontRef>
+        </p:style>
+        <p:txBody>
+          <a:bodyPr rtlCol="0" anchor="ctr"/>
+          <a:lstStyle/>
+          <a:p>
+            <a:pPr algn="ctr"/>
+          </a:p>
+        </p:txBody>
+      </p:sp>
+      <p:sp>
+        <p:nvSpPr>
+          <p:cNvPr id="10" name="TextBox 9"/>
+          <p:cNvSpPr txBox="1"/>
+          <p:nvPr/>
+        </p:nvSpPr>
+        <p:spPr>
+          <a:xfrm>
+            <a:off x="548640" y="3063240"/>
+            <a:ext cx="822960" cy="457200"/>
+          </a:xfrm>
+          <a:prstGeom prst="rect">
+            <a:avLst/>
+          </a:prstGeom>
+          <a:noFill/>
+        </p:spPr>
+        <p:txBody>
+          <a:bodyPr wrap="square" lIns="73152" rIns="73152" tIns="54864" bIns="54864">
+            <a:spAutoFit/>
+          </a:bodyPr>
+          <a:lstStyle/>
+          <a:p>
+            <a:pPr algn="ctr">
+              <a:defRPr sz="1800" b="1">
+                <a:solidFill>
+                  <a:srgbClr val="FFFFFF"/>
+                </a:solidFill>
+                <a:latin typeface="Arial"/>
+              </a:defRPr>
+            </a:pPr>
+            <a:r>
+              <a:t>A.</a:t>
+            </a:r>
+          </a:p>
+        </p:txBody>
+      </p:sp>
+      <p:sp>
+        <p:nvSpPr>
+          <p:cNvPr id="11" name="TextBox 10"/>
+          <p:cNvSpPr txBox="1"/>
+          <p:nvPr/>
+        </p:nvSpPr>
+        <p:spPr>
+          <a:xfrm>
+            <a:off x="1508760" y="2880360"/>
+            <a:ext cx="4160520" cy="960119"/>
+          </a:xfrm>
+          <a:prstGeom prst="rect">
+            <a:avLst/>
+          </a:prstGeom>
+          <a:noFill/>
+        </p:spPr>
+        <p:txBody>
+          <a:bodyPr wrap="square" lIns="73152" rIns="73152" tIns="54864" bIns="54864">
+            <a:spAutoFit/>
+          </a:bodyPr>
+          <a:lstStyle/>
           <a:p>
             <a:pPr algn="l">
-              <a:spcAft>
-                <a:spcPts val="600"/>
-              </a:spcAft>
-              <a:defRPr sz="2000" b="1">
+              <a:defRPr sz="1500" b="0">
                 <a:solidFill>
                   <a:srgbClr val="0F172A"/>
                 </a:solidFill>
@@ -4437,15 +6356,159 @@
               </a:defRPr>
             </a:pPr>
             <a:r>
-              <a:t>• Đặt từ khóa trong dấu ngoặc kép " "</a:t>
-            </a:r>
-          </a:p>
+              <a:t>"dự báo thời tiết Đà Lạt"</a:t>
+            </a:r>
+          </a:p>
+        </p:txBody>
+      </p:sp>
+      <p:sp>
+        <p:nvSpPr>
+          <p:cNvPr id="12" name="Rounded Rectangle 11"/>
+          <p:cNvSpPr/>
+          <p:nvPr/>
+        </p:nvSpPr>
+        <p:spPr>
+          <a:xfrm>
+            <a:off x="6172200" y="2651760"/>
+            <a:ext cx="5440680" cy="1325879"/>
+          </a:xfrm>
+          <a:prstGeom prst="roundRect">
+            <a:avLst/>
+          </a:prstGeom>
+          <a:solidFill>
+            <a:srgbClr val="FFFFFF"/>
+          </a:solidFill>
+          <a:ln w="19050">
+            <a:solidFill>
+              <a:srgbClr val="CBD5E1"/>
+            </a:solidFill>
+          </a:ln>
+        </p:spPr>
+        <p:style>
+          <a:lnRef idx="1">
+            <a:schemeClr val="accent1"/>
+          </a:lnRef>
+          <a:fillRef idx="3">
+            <a:schemeClr val="accent1"/>
+          </a:fillRef>
+          <a:effectRef idx="2">
+            <a:schemeClr val="accent1"/>
+          </a:effectRef>
+          <a:fontRef idx="minor">
+            <a:schemeClr val="lt1"/>
+          </a:fontRef>
+        </p:style>
+        <p:txBody>
+          <a:bodyPr rtlCol="0" anchor="ctr"/>
+          <a:lstStyle/>
+          <a:p>
+            <a:pPr algn="ctr"/>
+          </a:p>
+        </p:txBody>
+      </p:sp>
+      <p:sp>
+        <p:nvSpPr>
+          <p:cNvPr id="13" name="Oval 12"/>
+          <p:cNvSpPr/>
+          <p:nvPr/>
+        </p:nvSpPr>
+        <p:spPr>
+          <a:xfrm>
+            <a:off x="6355080" y="2880360"/>
+            <a:ext cx="822960" cy="822959"/>
+          </a:xfrm>
+          <a:prstGeom prst="ellipse">
+            <a:avLst/>
+          </a:prstGeom>
+          <a:solidFill>
+            <a:srgbClr val="0D9488"/>
+          </a:solidFill>
+          <a:ln>
+            <a:noFill/>
+          </a:ln>
+        </p:spPr>
+        <p:style>
+          <a:lnRef idx="1">
+            <a:schemeClr val="accent1"/>
+          </a:lnRef>
+          <a:fillRef idx="3">
+            <a:schemeClr val="accent1"/>
+          </a:fillRef>
+          <a:effectRef idx="2">
+            <a:schemeClr val="accent1"/>
+          </a:effectRef>
+          <a:fontRef idx="minor">
+            <a:schemeClr val="lt1"/>
+          </a:fontRef>
+        </p:style>
+        <p:txBody>
+          <a:bodyPr rtlCol="0" anchor="ctr"/>
+          <a:lstStyle/>
+          <a:p>
+            <a:pPr algn="ctr"/>
+          </a:p>
+        </p:txBody>
+      </p:sp>
+      <p:sp>
+        <p:nvSpPr>
+          <p:cNvPr id="14" name="TextBox 13"/>
+          <p:cNvSpPr txBox="1"/>
+          <p:nvPr/>
+        </p:nvSpPr>
+        <p:spPr>
+          <a:xfrm>
+            <a:off x="6355080" y="3063240"/>
+            <a:ext cx="822960" cy="457200"/>
+          </a:xfrm>
+          <a:prstGeom prst="rect">
+            <a:avLst/>
+          </a:prstGeom>
+          <a:noFill/>
+        </p:spPr>
+        <p:txBody>
+          <a:bodyPr wrap="square" lIns="73152" rIns="73152" tIns="54864" bIns="54864">
+            <a:spAutoFit/>
+          </a:bodyPr>
+          <a:lstStyle/>
+          <a:p>
+            <a:pPr algn="ctr">
+              <a:defRPr sz="1800" b="1">
+                <a:solidFill>
+                  <a:srgbClr val="FFFFFF"/>
+                </a:solidFill>
+                <a:latin typeface="Arial"/>
+              </a:defRPr>
+            </a:pPr>
+            <a:r>
+              <a:t>B.</a:t>
+            </a:r>
+          </a:p>
+        </p:txBody>
+      </p:sp>
+      <p:sp>
+        <p:nvSpPr>
+          <p:cNvPr id="15" name="TextBox 14"/>
+          <p:cNvSpPr txBox="1"/>
+          <p:nvPr/>
+        </p:nvSpPr>
+        <p:spPr>
+          <a:xfrm>
+            <a:off x="7315200" y="2880360"/>
+            <a:ext cx="4160520" cy="960119"/>
+          </a:xfrm>
+          <a:prstGeom prst="rect">
+            <a:avLst/>
+          </a:prstGeom>
+          <a:noFill/>
+        </p:spPr>
+        <p:txBody>
+          <a:bodyPr wrap="square" lIns="73152" rIns="73152" tIns="54864" bIns="54864">
+            <a:spAutoFit/>
+          </a:bodyPr>
+          <a:lstStyle/>
           <a:p>
             <a:pPr algn="l">
-              <a:spcAft>
-                <a:spcPts val="600"/>
-              </a:spcAft>
-              <a:defRPr sz="2000" b="1">
+              <a:defRPr sz="1500" b="0">
                 <a:solidFill>
                   <a:srgbClr val="0F172A"/>
                 </a:solidFill>
@@ -4453,15 +6516,159 @@
               </a:defRPr>
             </a:pPr>
             <a:r>
-              <a:t>• Tìm chính xác nguyên cụm từ</a:t>
-            </a:r>
-          </a:p>
+              <a:t>thời tiết và mọi thứ ở Đà Lạt</a:t>
+            </a:r>
+          </a:p>
+        </p:txBody>
+      </p:sp>
+      <p:sp>
+        <p:nvSpPr>
+          <p:cNvPr id="16" name="Rounded Rectangle 15"/>
+          <p:cNvSpPr/>
+          <p:nvPr/>
+        </p:nvSpPr>
+        <p:spPr>
+          <a:xfrm>
+            <a:off x="365760" y="4114800"/>
+            <a:ext cx="5440680" cy="1325880"/>
+          </a:xfrm>
+          <a:prstGeom prst="roundRect">
+            <a:avLst/>
+          </a:prstGeom>
+          <a:solidFill>
+            <a:srgbClr val="FFFFFF"/>
+          </a:solidFill>
+          <a:ln w="19050">
+            <a:solidFill>
+              <a:srgbClr val="CBD5E1"/>
+            </a:solidFill>
+          </a:ln>
+        </p:spPr>
+        <p:style>
+          <a:lnRef idx="1">
+            <a:schemeClr val="accent1"/>
+          </a:lnRef>
+          <a:fillRef idx="3">
+            <a:schemeClr val="accent1"/>
+          </a:fillRef>
+          <a:effectRef idx="2">
+            <a:schemeClr val="accent1"/>
+          </a:effectRef>
+          <a:fontRef idx="minor">
+            <a:schemeClr val="lt1"/>
+          </a:fontRef>
+        </p:style>
+        <p:txBody>
+          <a:bodyPr rtlCol="0" anchor="ctr"/>
+          <a:lstStyle/>
+          <a:p>
+            <a:pPr algn="ctr"/>
+          </a:p>
+        </p:txBody>
+      </p:sp>
+      <p:sp>
+        <p:nvSpPr>
+          <p:cNvPr id="17" name="Oval 16"/>
+          <p:cNvSpPr/>
+          <p:nvPr/>
+        </p:nvSpPr>
+        <p:spPr>
+          <a:xfrm>
+            <a:off x="548640" y="4343400"/>
+            <a:ext cx="822960" cy="822960"/>
+          </a:xfrm>
+          <a:prstGeom prst="ellipse">
+            <a:avLst/>
+          </a:prstGeom>
+          <a:solidFill>
+            <a:srgbClr val="D97706"/>
+          </a:solidFill>
+          <a:ln>
+            <a:noFill/>
+          </a:ln>
+        </p:spPr>
+        <p:style>
+          <a:lnRef idx="1">
+            <a:schemeClr val="accent1"/>
+          </a:lnRef>
+          <a:fillRef idx="3">
+            <a:schemeClr val="accent1"/>
+          </a:fillRef>
+          <a:effectRef idx="2">
+            <a:schemeClr val="accent1"/>
+          </a:effectRef>
+          <a:fontRef idx="minor">
+            <a:schemeClr val="lt1"/>
+          </a:fontRef>
+        </p:style>
+        <p:txBody>
+          <a:bodyPr rtlCol="0" anchor="ctr"/>
+          <a:lstStyle/>
+          <a:p>
+            <a:pPr algn="ctr"/>
+          </a:p>
+        </p:txBody>
+      </p:sp>
+      <p:sp>
+        <p:nvSpPr>
+          <p:cNvPr id="18" name="TextBox 17"/>
+          <p:cNvSpPr txBox="1"/>
+          <p:nvPr/>
+        </p:nvSpPr>
+        <p:spPr>
+          <a:xfrm>
+            <a:off x="548640" y="4526280"/>
+            <a:ext cx="822960" cy="457200"/>
+          </a:xfrm>
+          <a:prstGeom prst="rect">
+            <a:avLst/>
+          </a:prstGeom>
+          <a:noFill/>
+        </p:spPr>
+        <p:txBody>
+          <a:bodyPr wrap="square" lIns="73152" rIns="73152" tIns="54864" bIns="54864">
+            <a:spAutoFit/>
+          </a:bodyPr>
+          <a:lstStyle/>
+          <a:p>
+            <a:pPr algn="ctr">
+              <a:defRPr sz="1800" b="1">
+                <a:solidFill>
+                  <a:srgbClr val="FFFFFF"/>
+                </a:solidFill>
+                <a:latin typeface="Arial"/>
+              </a:defRPr>
+            </a:pPr>
+            <a:r>
+              <a:t>C.</a:t>
+            </a:r>
+          </a:p>
+        </p:txBody>
+      </p:sp>
+      <p:sp>
+        <p:nvSpPr>
+          <p:cNvPr id="19" name="TextBox 18"/>
+          <p:cNvSpPr txBox="1"/>
+          <p:nvPr/>
+        </p:nvSpPr>
+        <p:spPr>
+          <a:xfrm>
+            <a:off x="1508760" y="4343400"/>
+            <a:ext cx="4160520" cy="960119"/>
+          </a:xfrm>
+          <a:prstGeom prst="rect">
+            <a:avLst/>
+          </a:prstGeom>
+          <a:noFill/>
+        </p:spPr>
+        <p:txBody>
+          <a:bodyPr wrap="square" lIns="73152" rIns="73152" tIns="54864" bIns="54864">
+            <a:spAutoFit/>
+          </a:bodyPr>
+          <a:lstStyle/>
           <a:p>
             <a:pPr algn="l">
-              <a:spcAft>
-                <a:spcPts val="600"/>
-              </a:spcAft>
-              <a:defRPr sz="2000" b="1">
+              <a:defRPr sz="1500" b="0">
                 <a:solidFill>
                   <a:srgbClr val="0F172A"/>
                 </a:solidFill>
@@ -4469,42 +6676,178 @@
               </a:defRPr>
             </a:pPr>
             <a:r>
-              <a:t>• Tiết kiệm thời gian tra cứu dữ liệu</a:t>
-            </a:r>
-          </a:p>
-        </p:txBody>
-      </p:sp>
-      <p:pic>
-        <p:nvPicPr>
-          <p:cNvPr id="9" name="Picture 8" descr="learn1_card1.png"/>
-          <p:cNvPicPr>
-            <a:picLocks noChangeAspect="1"/>
-          </p:cNvPicPr>
-          <p:nvPr/>
-        </p:nvPicPr>
-        <p:blipFill>
-          <a:blip r:embed="rId2"/>
-          <a:stretch>
-            <a:fillRect/>
-          </a:stretch>
-        </p:blipFill>
-        <p:spPr>
-          <a:xfrm>
-            <a:off x="4937760" y="2286000"/>
-            <a:ext cx="6793992" cy="3383279"/>
+              <a:t>tìm cho tôi thời tiết</a:t>
+            </a:r>
+          </a:p>
+        </p:txBody>
+      </p:sp>
+      <p:sp>
+        <p:nvSpPr>
+          <p:cNvPr id="20" name="Rounded Rectangle 19"/>
+          <p:cNvSpPr/>
+          <p:nvPr/>
+        </p:nvSpPr>
+        <p:spPr>
+          <a:xfrm>
+            <a:off x="6172200" y="4114800"/>
+            <a:ext cx="5440680" cy="1325880"/>
+          </a:xfrm>
+          <a:prstGeom prst="roundRect">
+            <a:avLst/>
+          </a:prstGeom>
+          <a:solidFill>
+            <a:srgbClr val="FFFFFF"/>
+          </a:solidFill>
+          <a:ln w="19050">
+            <a:solidFill>
+              <a:srgbClr val="CBD5E1"/>
+            </a:solidFill>
+          </a:ln>
+        </p:spPr>
+        <p:style>
+          <a:lnRef idx="1">
+            <a:schemeClr val="accent1"/>
+          </a:lnRef>
+          <a:fillRef idx="3">
+            <a:schemeClr val="accent1"/>
+          </a:fillRef>
+          <a:effectRef idx="2">
+            <a:schemeClr val="accent1"/>
+          </a:effectRef>
+          <a:fontRef idx="minor">
+            <a:schemeClr val="lt1"/>
+          </a:fontRef>
+        </p:style>
+        <p:txBody>
+          <a:bodyPr rtlCol="0" anchor="ctr"/>
+          <a:lstStyle/>
+          <a:p>
+            <a:pPr algn="ctr"/>
+          </a:p>
+        </p:txBody>
+      </p:sp>
+      <p:sp>
+        <p:nvSpPr>
+          <p:cNvPr id="21" name="Oval 20"/>
+          <p:cNvSpPr/>
+          <p:nvPr/>
+        </p:nvSpPr>
+        <p:spPr>
+          <a:xfrm>
+            <a:off x="6355080" y="4343400"/>
+            <a:ext cx="822960" cy="822960"/>
+          </a:xfrm>
+          <a:prstGeom prst="ellipse">
+            <a:avLst/>
+          </a:prstGeom>
+          <a:solidFill>
+            <a:srgbClr val="7C3AED"/>
+          </a:solidFill>
+          <a:ln>
+            <a:noFill/>
+          </a:ln>
+        </p:spPr>
+        <p:style>
+          <a:lnRef idx="1">
+            <a:schemeClr val="accent1"/>
+          </a:lnRef>
+          <a:fillRef idx="3">
+            <a:schemeClr val="accent1"/>
+          </a:fillRef>
+          <a:effectRef idx="2">
+            <a:schemeClr val="accent1"/>
+          </a:effectRef>
+          <a:fontRef idx="minor">
+            <a:schemeClr val="lt1"/>
+          </a:fontRef>
+        </p:style>
+        <p:txBody>
+          <a:bodyPr rtlCol="0" anchor="ctr"/>
+          <a:lstStyle/>
+          <a:p>
+            <a:pPr algn="ctr"/>
+          </a:p>
+        </p:txBody>
+      </p:sp>
+      <p:sp>
+        <p:nvSpPr>
+          <p:cNvPr id="22" name="TextBox 21"/>
+          <p:cNvSpPr txBox="1"/>
+          <p:nvPr/>
+        </p:nvSpPr>
+        <p:spPr>
+          <a:xfrm>
+            <a:off x="6355080" y="4526280"/>
+            <a:ext cx="822960" cy="457200"/>
           </a:xfrm>
           <a:prstGeom prst="rect">
             <a:avLst/>
           </a:prstGeom>
-        </p:spPr>
-      </p:pic>
+          <a:noFill/>
+        </p:spPr>
+        <p:txBody>
+          <a:bodyPr wrap="square" lIns="73152" rIns="73152" tIns="54864" bIns="54864">
+            <a:spAutoFit/>
+          </a:bodyPr>
+          <a:lstStyle/>
+          <a:p>
+            <a:pPr algn="ctr">
+              <a:defRPr sz="1800" b="1">
+                <a:solidFill>
+                  <a:srgbClr val="FFFFFF"/>
+                </a:solidFill>
+                <a:latin typeface="Arial"/>
+              </a:defRPr>
+            </a:pPr>
+            <a:r>
+              <a:t>D.</a:t>
+            </a:r>
+          </a:p>
+        </p:txBody>
+      </p:sp>
+      <p:sp>
+        <p:nvSpPr>
+          <p:cNvPr id="23" name="TextBox 22"/>
+          <p:cNvSpPr txBox="1"/>
+          <p:nvPr/>
+        </p:nvSpPr>
+        <p:spPr>
+          <a:xfrm>
+            <a:off x="7315200" y="4343400"/>
+            <a:ext cx="4160520" cy="960119"/>
+          </a:xfrm>
+          <a:prstGeom prst="rect">
+            <a:avLst/>
+          </a:prstGeom>
+          <a:noFill/>
+        </p:spPr>
+        <p:txBody>
+          <a:bodyPr wrap="square" lIns="73152" rIns="73152" tIns="54864" bIns="54864">
+            <a:spAutoFit/>
+          </a:bodyPr>
+          <a:lstStyle/>
+          <a:p>
+            <a:pPr algn="l">
+              <a:defRPr sz="1500" b="0">
+                <a:solidFill>
+                  <a:srgbClr val="0F172A"/>
+                </a:solidFill>
+                <a:latin typeface="Arial"/>
+              </a:defRPr>
+            </a:pPr>
+            <a:r>
+              <a:t>da lat hom nay the nao</a:t>
+            </a:r>
+          </a:p>
+        </p:txBody>
+      </p:sp>
     </p:spTree>
   </p:cSld>
   <p:clrMapOvr>
     <a:masterClrMapping/>
   </p:clrMapOvr>
   <p:transition spd="med">
-    <p:wipe/>
+    <p:fade/>
   </p:transition>
 </p:sld>
 </file>
@@ -4534,7 +6877,7 @@
             <a:avLst/>
           </a:prstGeom>
           <a:solidFill>
-            <a:srgbClr val="FDF2F8"/>
+            <a:srgbClr val="BE185D"/>
           </a:solidFill>
           <a:ln>
             <a:noFill/>
@@ -4564,792 +6907,14 @@
       </p:sp>
       <p:sp>
         <p:nvSpPr>
-          <p:cNvPr id="3" name="Rectangle 2"/>
+          <p:cNvPr id="3" name="Rounded Rectangle 2"/>
           <p:cNvSpPr/>
           <p:nvPr/>
         </p:nvSpPr>
         <p:spPr>
           <a:xfrm>
-            <a:off x="0" y="1097280"/>
-            <a:ext cx="12188952" cy="411479"/>
-          </a:xfrm>
-          <a:prstGeom prst="rect">
-            <a:avLst/>
-          </a:prstGeom>
-          <a:solidFill>
-            <a:srgbClr val="BE185D"/>
-          </a:solidFill>
-          <a:ln>
-            <a:noFill/>
-          </a:ln>
-        </p:spPr>
-        <p:style>
-          <a:lnRef idx="1">
-            <a:schemeClr val="accent1"/>
-          </a:lnRef>
-          <a:fillRef idx="3">
-            <a:schemeClr val="accent1"/>
-          </a:fillRef>
-          <a:effectRef idx="2">
-            <a:schemeClr val="accent1"/>
-          </a:effectRef>
-          <a:fontRef idx="minor">
-            <a:schemeClr val="lt1"/>
-          </a:fontRef>
-        </p:style>
-        <p:txBody>
-          <a:bodyPr rtlCol="0" anchor="ctr"/>
-          <a:lstStyle/>
-          <a:p>
-            <a:pPr algn="ctr"/>
-          </a:p>
-        </p:txBody>
-      </p:sp>
-      <p:sp>
-        <p:nvSpPr>
-          <p:cNvPr id="4" name="TextBox 3"/>
-          <p:cNvSpPr txBox="1"/>
-          <p:nvPr/>
-        </p:nvSpPr>
-        <p:spPr>
-          <a:xfrm>
-            <a:off x="274320" y="1124712"/>
-            <a:ext cx="11640312" cy="365759"/>
-          </a:xfrm>
-          <a:prstGeom prst="rect">
-            <a:avLst/>
-          </a:prstGeom>
-          <a:noFill/>
-        </p:spPr>
-        <p:txBody>
-          <a:bodyPr wrap="square" lIns="73152" rIns="73152">
-            <a:spAutoFit/>
-          </a:bodyPr>
-          <a:lstStyle/>
-          <a:p>
-            <a:pPr algn="l">
-              <a:defRPr sz="1300" b="1">
-                <a:solidFill>
-                  <a:srgbClr val="FFFFFF"/>
-                </a:solidFill>
-                <a:latin typeface="Arial"/>
-              </a:defRPr>
-            </a:pPr>
-            <a:r>
-              <a:t>  LỚP 5 • QUY CHUẨN TRỰC QUAN</a:t>
-            </a:r>
-          </a:p>
-        </p:txBody>
-      </p:sp>
-      <p:sp>
-        <p:nvSpPr>
-          <p:cNvPr id="5" name="TextBox 4"/>
-          <p:cNvSpPr txBox="1"/>
-          <p:nvPr/>
-        </p:nvSpPr>
-        <p:spPr>
-          <a:xfrm>
-            <a:off x="457200" y="1600200"/>
-            <a:ext cx="11274552" cy="594359"/>
-          </a:xfrm>
-          <a:prstGeom prst="rect">
-            <a:avLst/>
-          </a:prstGeom>
-          <a:noFill/>
-        </p:spPr>
-        <p:txBody>
-          <a:bodyPr wrap="square" lIns="73152" rIns="73152">
-            <a:spAutoFit/>
-          </a:bodyPr>
-          <a:lstStyle/>
-          <a:p>
-            <a:pPr algn="l">
-              <a:defRPr sz="2600" b="1">
-                <a:solidFill>
-                  <a:srgbClr val="831843"/>
-                </a:solidFill>
-                <a:latin typeface="Arial"/>
-              </a:defRPr>
-            </a:pPr>
-            <a:r>
-              <a:t>Đánh giá &amp; Kiểm chứng thông tin</a:t>
-            </a:r>
-          </a:p>
-        </p:txBody>
-      </p:sp>
-      <p:sp>
-        <p:nvSpPr>
-          <p:cNvPr id="6" name="Rounded Rectangle 5"/>
-          <p:cNvSpPr/>
-          <p:nvPr/>
-        </p:nvSpPr>
-        <p:spPr>
-          <a:xfrm>
-            <a:off x="457200" y="2286000"/>
-            <a:ext cx="5669280" cy="640080"/>
-          </a:xfrm>
-          <a:prstGeom prst="roundRect">
-            <a:avLst/>
-          </a:prstGeom>
-          <a:solidFill>
-            <a:srgbClr val="FFFFFF"/>
-          </a:solidFill>
-          <a:ln w="19050">
-            <a:solidFill>
-              <a:srgbClr val="EA580C"/>
-            </a:solidFill>
-          </a:ln>
-        </p:spPr>
-        <p:style>
-          <a:lnRef idx="1">
-            <a:schemeClr val="accent1"/>
-          </a:lnRef>
-          <a:fillRef idx="3">
-            <a:schemeClr val="accent1"/>
-          </a:fillRef>
-          <a:effectRef idx="2">
-            <a:schemeClr val="accent1"/>
-          </a:effectRef>
-          <a:fontRef idx="minor">
-            <a:schemeClr val="lt1"/>
-          </a:fontRef>
-        </p:style>
-        <p:txBody>
-          <a:bodyPr rtlCol="0" anchor="ctr"/>
-          <a:lstStyle/>
-          <a:p>
-            <a:pPr algn="ctr"/>
-          </a:p>
-        </p:txBody>
-      </p:sp>
-      <p:sp>
-        <p:nvSpPr>
-          <p:cNvPr id="7" name="Rectangle 6"/>
-          <p:cNvSpPr/>
-          <p:nvPr/>
-        </p:nvSpPr>
-        <p:spPr>
-          <a:xfrm>
-            <a:off x="457200" y="2286000"/>
-            <a:ext cx="182880" cy="640080"/>
-          </a:xfrm>
-          <a:prstGeom prst="rect">
-            <a:avLst/>
-          </a:prstGeom>
-          <a:solidFill>
-            <a:srgbClr val="EA580C"/>
-          </a:solidFill>
-          <a:ln>
-            <a:noFill/>
-          </a:ln>
-        </p:spPr>
-        <p:style>
-          <a:lnRef idx="1">
-            <a:schemeClr val="accent1"/>
-          </a:lnRef>
-          <a:fillRef idx="3">
-            <a:schemeClr val="accent1"/>
-          </a:fillRef>
-          <a:effectRef idx="2">
-            <a:schemeClr val="accent1"/>
-          </a:effectRef>
-          <a:fontRef idx="minor">
-            <a:schemeClr val="lt1"/>
-          </a:fontRef>
-        </p:style>
-        <p:txBody>
-          <a:bodyPr rtlCol="0" anchor="ctr"/>
-          <a:lstStyle/>
-          <a:p>
-            <a:pPr algn="ctr"/>
-          </a:p>
-        </p:txBody>
-      </p:sp>
-      <p:sp>
-        <p:nvSpPr>
-          <p:cNvPr id="8" name="TextBox 7"/>
-          <p:cNvSpPr txBox="1"/>
-          <p:nvPr/>
-        </p:nvSpPr>
-        <p:spPr>
-          <a:xfrm>
-            <a:off x="822960" y="2395728"/>
-            <a:ext cx="5120640" cy="420623"/>
-          </a:xfrm>
-          <a:prstGeom prst="rect">
-            <a:avLst/>
-          </a:prstGeom>
-          <a:noFill/>
-        </p:spPr>
-        <p:txBody>
-          <a:bodyPr wrap="square" lIns="73152" rIns="73152">
-            <a:spAutoFit/>
-          </a:bodyPr>
-          <a:lstStyle/>
-          <a:p>
-            <a:pPr algn="l">
-              <a:defRPr sz="1700" b="1">
-                <a:solidFill>
-                  <a:srgbClr val="0F172A"/>
-                </a:solidFill>
-                <a:latin typeface="Arial"/>
-              </a:defRPr>
-            </a:pPr>
-            <a:r>
-              <a:t>Ưu tiên website uy tín (.gov.vn, .edu.vn)</a:t>
-            </a:r>
-          </a:p>
-        </p:txBody>
-      </p:sp>
-      <p:sp>
-        <p:nvSpPr>
-          <p:cNvPr id="9" name="Rounded Rectangle 8"/>
-          <p:cNvSpPr/>
-          <p:nvPr/>
-        </p:nvSpPr>
-        <p:spPr>
-          <a:xfrm>
-            <a:off x="457200" y="3054096"/>
-            <a:ext cx="5669280" cy="640080"/>
-          </a:xfrm>
-          <a:prstGeom prst="roundRect">
-            <a:avLst/>
-          </a:prstGeom>
-          <a:solidFill>
-            <a:srgbClr val="FFFFFF"/>
-          </a:solidFill>
-          <a:ln w="19050">
-            <a:solidFill>
-              <a:srgbClr val="2563EB"/>
-            </a:solidFill>
-          </a:ln>
-        </p:spPr>
-        <p:style>
-          <a:lnRef idx="1">
-            <a:schemeClr val="accent1"/>
-          </a:lnRef>
-          <a:fillRef idx="3">
-            <a:schemeClr val="accent1"/>
-          </a:fillRef>
-          <a:effectRef idx="2">
-            <a:schemeClr val="accent1"/>
-          </a:effectRef>
-          <a:fontRef idx="minor">
-            <a:schemeClr val="lt1"/>
-          </a:fontRef>
-        </p:style>
-        <p:txBody>
-          <a:bodyPr rtlCol="0" anchor="ctr"/>
-          <a:lstStyle/>
-          <a:p>
-            <a:pPr algn="ctr"/>
-          </a:p>
-        </p:txBody>
-      </p:sp>
-      <p:sp>
-        <p:nvSpPr>
-          <p:cNvPr id="10" name="Rectangle 9"/>
-          <p:cNvSpPr/>
-          <p:nvPr/>
-        </p:nvSpPr>
-        <p:spPr>
-          <a:xfrm>
-            <a:off x="457200" y="3054096"/>
-            <a:ext cx="182880" cy="640080"/>
-          </a:xfrm>
-          <a:prstGeom prst="rect">
-            <a:avLst/>
-          </a:prstGeom>
-          <a:solidFill>
-            <a:srgbClr val="2563EB"/>
-          </a:solidFill>
-          <a:ln>
-            <a:noFill/>
-          </a:ln>
-        </p:spPr>
-        <p:style>
-          <a:lnRef idx="1">
-            <a:schemeClr val="accent1"/>
-          </a:lnRef>
-          <a:fillRef idx="3">
-            <a:schemeClr val="accent1"/>
-          </a:fillRef>
-          <a:effectRef idx="2">
-            <a:schemeClr val="accent1"/>
-          </a:effectRef>
-          <a:fontRef idx="minor">
-            <a:schemeClr val="lt1"/>
-          </a:fontRef>
-        </p:style>
-        <p:txBody>
-          <a:bodyPr rtlCol="0" anchor="ctr"/>
-          <a:lstStyle/>
-          <a:p>
-            <a:pPr algn="ctr"/>
-          </a:p>
-        </p:txBody>
-      </p:sp>
-      <p:sp>
-        <p:nvSpPr>
-          <p:cNvPr id="11" name="TextBox 10"/>
-          <p:cNvSpPr txBox="1"/>
-          <p:nvPr/>
-        </p:nvSpPr>
-        <p:spPr>
-          <a:xfrm>
-            <a:off x="822960" y="3163824"/>
-            <a:ext cx="5120640" cy="420623"/>
-          </a:xfrm>
-          <a:prstGeom prst="rect">
-            <a:avLst/>
-          </a:prstGeom>
-          <a:noFill/>
-        </p:spPr>
-        <p:txBody>
-          <a:bodyPr wrap="square" lIns="73152" rIns="73152">
-            <a:spAutoFit/>
-          </a:bodyPr>
-          <a:lstStyle/>
-          <a:p>
-            <a:pPr algn="l">
-              <a:defRPr sz="1700" b="1">
-                <a:solidFill>
-                  <a:srgbClr val="0F172A"/>
-                </a:solidFill>
-                <a:latin typeface="Arial"/>
-              </a:defRPr>
-            </a:pPr>
-            <a:r>
-              <a:t>Kiểm tra tác giả và ngày đăng bài</a:t>
-            </a:r>
-          </a:p>
-        </p:txBody>
-      </p:sp>
-      <p:sp>
-        <p:nvSpPr>
-          <p:cNvPr id="12" name="Rounded Rectangle 11"/>
-          <p:cNvSpPr/>
-          <p:nvPr/>
-        </p:nvSpPr>
-        <p:spPr>
-          <a:xfrm>
-            <a:off x="457200" y="3822191"/>
-            <a:ext cx="5669280" cy="640080"/>
-          </a:xfrm>
-          <a:prstGeom prst="roundRect">
-            <a:avLst/>
-          </a:prstGeom>
-          <a:solidFill>
-            <a:srgbClr val="FFFFFF"/>
-          </a:solidFill>
-          <a:ln w="19050">
-            <a:solidFill>
-              <a:srgbClr val="059669"/>
-            </a:solidFill>
-          </a:ln>
-        </p:spPr>
-        <p:style>
-          <a:lnRef idx="1">
-            <a:schemeClr val="accent1"/>
-          </a:lnRef>
-          <a:fillRef idx="3">
-            <a:schemeClr val="accent1"/>
-          </a:fillRef>
-          <a:effectRef idx="2">
-            <a:schemeClr val="accent1"/>
-          </a:effectRef>
-          <a:fontRef idx="minor">
-            <a:schemeClr val="lt1"/>
-          </a:fontRef>
-        </p:style>
-        <p:txBody>
-          <a:bodyPr rtlCol="0" anchor="ctr"/>
-          <a:lstStyle/>
-          <a:p>
-            <a:pPr algn="ctr"/>
-          </a:p>
-        </p:txBody>
-      </p:sp>
-      <p:sp>
-        <p:nvSpPr>
-          <p:cNvPr id="13" name="Rectangle 12"/>
-          <p:cNvSpPr/>
-          <p:nvPr/>
-        </p:nvSpPr>
-        <p:spPr>
-          <a:xfrm>
-            <a:off x="457200" y="3822191"/>
-            <a:ext cx="182880" cy="640080"/>
-          </a:xfrm>
-          <a:prstGeom prst="rect">
-            <a:avLst/>
-          </a:prstGeom>
-          <a:solidFill>
-            <a:srgbClr val="059669"/>
-          </a:solidFill>
-          <a:ln>
-            <a:noFill/>
-          </a:ln>
-        </p:spPr>
-        <p:style>
-          <a:lnRef idx="1">
-            <a:schemeClr val="accent1"/>
-          </a:lnRef>
-          <a:fillRef idx="3">
-            <a:schemeClr val="accent1"/>
-          </a:fillRef>
-          <a:effectRef idx="2">
-            <a:schemeClr val="accent1"/>
-          </a:effectRef>
-          <a:fontRef idx="minor">
-            <a:schemeClr val="lt1"/>
-          </a:fontRef>
-        </p:style>
-        <p:txBody>
-          <a:bodyPr rtlCol="0" anchor="ctr"/>
-          <a:lstStyle/>
-          <a:p>
-            <a:pPr algn="ctr"/>
-          </a:p>
-        </p:txBody>
-      </p:sp>
-      <p:sp>
-        <p:nvSpPr>
-          <p:cNvPr id="14" name="TextBox 13"/>
-          <p:cNvSpPr txBox="1"/>
-          <p:nvPr/>
-        </p:nvSpPr>
-        <p:spPr>
-          <a:xfrm>
-            <a:off x="822960" y="3931920"/>
-            <a:ext cx="5120640" cy="420623"/>
-          </a:xfrm>
-          <a:prstGeom prst="rect">
-            <a:avLst/>
-          </a:prstGeom>
-          <a:noFill/>
-        </p:spPr>
-        <p:txBody>
-          <a:bodyPr wrap="square" lIns="73152" rIns="73152">
-            <a:spAutoFit/>
-          </a:bodyPr>
-          <a:lstStyle/>
-          <a:p>
-            <a:pPr algn="l">
-              <a:defRPr sz="1700" b="1">
-                <a:solidFill>
-                  <a:srgbClr val="0F172A"/>
-                </a:solidFill>
-                <a:latin typeface="Arial"/>
-              </a:defRPr>
-            </a:pPr>
-            <a:r>
-              <a:t>Đối chiếu nhiều nguồn thông tin khác nhau</a:t>
-            </a:r>
-          </a:p>
-        </p:txBody>
-      </p:sp>
-      <p:sp>
-        <p:nvSpPr>
-          <p:cNvPr id="15" name="Rounded Rectangle 14"/>
-          <p:cNvSpPr/>
-          <p:nvPr/>
-        </p:nvSpPr>
-        <p:spPr>
-          <a:xfrm>
-            <a:off x="457200" y="4590288"/>
-            <a:ext cx="5669280" cy="640080"/>
-          </a:xfrm>
-          <a:prstGeom prst="roundRect">
-            <a:avLst/>
-          </a:prstGeom>
-          <a:solidFill>
-            <a:srgbClr val="FFFFFF"/>
-          </a:solidFill>
-          <a:ln w="19050">
-            <a:solidFill>
-              <a:srgbClr val="D97706"/>
-            </a:solidFill>
-          </a:ln>
-        </p:spPr>
-        <p:style>
-          <a:lnRef idx="1">
-            <a:schemeClr val="accent1"/>
-          </a:lnRef>
-          <a:fillRef idx="3">
-            <a:schemeClr val="accent1"/>
-          </a:fillRef>
-          <a:effectRef idx="2">
-            <a:schemeClr val="accent1"/>
-          </a:effectRef>
-          <a:fontRef idx="minor">
-            <a:schemeClr val="lt1"/>
-          </a:fontRef>
-        </p:style>
-        <p:txBody>
-          <a:bodyPr rtlCol="0" anchor="ctr"/>
-          <a:lstStyle/>
-          <a:p>
-            <a:pPr algn="ctr"/>
-          </a:p>
-        </p:txBody>
-      </p:sp>
-      <p:sp>
-        <p:nvSpPr>
-          <p:cNvPr id="16" name="Rectangle 15"/>
-          <p:cNvSpPr/>
-          <p:nvPr/>
-        </p:nvSpPr>
-        <p:spPr>
-          <a:xfrm>
-            <a:off x="457200" y="4590288"/>
-            <a:ext cx="182880" cy="640080"/>
-          </a:xfrm>
-          <a:prstGeom prst="rect">
-            <a:avLst/>
-          </a:prstGeom>
-          <a:solidFill>
-            <a:srgbClr val="D97706"/>
-          </a:solidFill>
-          <a:ln>
-            <a:noFill/>
-          </a:ln>
-        </p:spPr>
-        <p:style>
-          <a:lnRef idx="1">
-            <a:schemeClr val="accent1"/>
-          </a:lnRef>
-          <a:fillRef idx="3">
-            <a:schemeClr val="accent1"/>
-          </a:fillRef>
-          <a:effectRef idx="2">
-            <a:schemeClr val="accent1"/>
-          </a:effectRef>
-          <a:fontRef idx="minor">
-            <a:schemeClr val="lt1"/>
-          </a:fontRef>
-        </p:style>
-        <p:txBody>
-          <a:bodyPr rtlCol="0" anchor="ctr"/>
-          <a:lstStyle/>
-          <a:p>
-            <a:pPr algn="ctr"/>
-          </a:p>
-        </p:txBody>
-      </p:sp>
-      <p:sp>
-        <p:nvSpPr>
-          <p:cNvPr id="17" name="TextBox 16"/>
-          <p:cNvSpPr txBox="1"/>
-          <p:nvPr/>
-        </p:nvSpPr>
-        <p:spPr>
-          <a:xfrm>
-            <a:off x="822960" y="4700016"/>
-            <a:ext cx="5120640" cy="420623"/>
-          </a:xfrm>
-          <a:prstGeom prst="rect">
-            <a:avLst/>
-          </a:prstGeom>
-          <a:noFill/>
-        </p:spPr>
-        <p:txBody>
-          <a:bodyPr wrap="square" lIns="73152" rIns="73152">
-            <a:spAutoFit/>
-          </a:bodyPr>
-          <a:lstStyle/>
-          <a:p>
-            <a:pPr algn="l">
-              <a:defRPr sz="1700" b="1">
-                <a:solidFill>
-                  <a:srgbClr val="0F172A"/>
-                </a:solidFill>
-                <a:latin typeface="Arial"/>
-              </a:defRPr>
-            </a:pPr>
-            <a:r>
-              <a:t>Không chia sẻ thông tin chưa kiểm chứng</a:t>
-            </a:r>
-          </a:p>
-        </p:txBody>
-      </p:sp>
-      <p:pic>
-        <p:nvPicPr>
-          <p:cNvPr id="18" name="Picture 17" descr="learn1_card3.png"/>
-          <p:cNvPicPr>
-            <a:picLocks noChangeAspect="1"/>
-          </p:cNvPicPr>
-          <p:nvPr/>
-        </p:nvPicPr>
-        <p:blipFill>
-          <a:blip r:embed="rId2"/>
-          <a:stretch>
-            <a:fillRect/>
-          </a:stretch>
-        </p:blipFill>
-        <p:spPr>
-          <a:xfrm>
-            <a:off x="6400800" y="2286000"/>
-            <a:ext cx="5330952" cy="3383279"/>
-          </a:xfrm>
-          <a:prstGeom prst="rect">
-            <a:avLst/>
-          </a:prstGeom>
-        </p:spPr>
-      </p:pic>
-    </p:spTree>
-  </p:cSld>
-  <p:clrMapOvr>
-    <a:masterClrMapping/>
-  </p:clrMapOvr>
-  <p:transition spd="med">
-    <p:wipe/>
-  </p:transition>
-</p:sld>
-</file>
-
-<file path=ppt/slides/slide8.xml><?xml version="1.0" encoding="utf-8"?>
-<p:sld xmlns:a="http://schemas.openxmlformats.org/drawingml/2006/main" xmlns:p="http://schemas.openxmlformats.org/presentationml/2006/main" xmlns:r="http://schemas.openxmlformats.org/officeDocument/2006/relationships">
-  <p:cSld>
-    <p:spTree>
-      <p:nvGrpSpPr>
-        <p:cNvPr id="1" name=""/>
-        <p:cNvGrpSpPr/>
-        <p:nvPr/>
-      </p:nvGrpSpPr>
-      <p:grpSpPr/>
-      <p:sp>
-        <p:nvSpPr>
-          <p:cNvPr id="2" name="Rectangle 1"/>
-          <p:cNvSpPr/>
-          <p:nvPr/>
-        </p:nvSpPr>
-        <p:spPr>
-          <a:xfrm>
-            <a:off x="0" y="1051560"/>
-            <a:ext cx="12188952" cy="4754879"/>
-          </a:xfrm>
-          <a:prstGeom prst="rect">
-            <a:avLst/>
-          </a:prstGeom>
-          <a:solidFill>
-            <a:srgbClr val="FDF2F8"/>
-          </a:solidFill>
-          <a:ln>
-            <a:noFill/>
-          </a:ln>
-        </p:spPr>
-        <p:style>
-          <a:lnRef idx="1">
-            <a:schemeClr val="accent1"/>
-          </a:lnRef>
-          <a:fillRef idx="3">
-            <a:schemeClr val="accent1"/>
-          </a:fillRef>
-          <a:effectRef idx="2">
-            <a:schemeClr val="accent1"/>
-          </a:effectRef>
-          <a:fontRef idx="minor">
-            <a:schemeClr val="lt1"/>
-          </a:fontRef>
-        </p:style>
-        <p:txBody>
-          <a:bodyPr rtlCol="0" anchor="ctr"/>
-          <a:lstStyle/>
-          <a:p>
-            <a:pPr algn="ctr"/>
-          </a:p>
-        </p:txBody>
-      </p:sp>
-      <p:sp>
-        <p:nvSpPr>
-          <p:cNvPr id="3" name="Rectangle 2"/>
-          <p:cNvSpPr/>
-          <p:nvPr/>
-        </p:nvSpPr>
-        <p:spPr>
-          <a:xfrm>
-            <a:off x="0" y="1097280"/>
-            <a:ext cx="12188952" cy="411479"/>
-          </a:xfrm>
-          <a:prstGeom prst="rect">
-            <a:avLst/>
-          </a:prstGeom>
-          <a:solidFill>
-            <a:srgbClr val="BE185D"/>
-          </a:solidFill>
-          <a:ln>
-            <a:noFill/>
-          </a:ln>
-        </p:spPr>
-        <p:style>
-          <a:lnRef idx="1">
-            <a:schemeClr val="accent1"/>
-          </a:lnRef>
-          <a:fillRef idx="3">
-            <a:schemeClr val="accent1"/>
-          </a:fillRef>
-          <a:effectRef idx="2">
-            <a:schemeClr val="accent1"/>
-          </a:effectRef>
-          <a:fontRef idx="minor">
-            <a:schemeClr val="lt1"/>
-          </a:fontRef>
-        </p:style>
-        <p:txBody>
-          <a:bodyPr rtlCol="0" anchor="ctr"/>
-          <a:lstStyle/>
-          <a:p>
-            <a:pPr algn="ctr"/>
-          </a:p>
-        </p:txBody>
-      </p:sp>
-      <p:sp>
-        <p:nvSpPr>
-          <p:cNvPr id="4" name="TextBox 3"/>
-          <p:cNvSpPr txBox="1"/>
-          <p:nvPr/>
-        </p:nvSpPr>
-        <p:spPr>
-          <a:xfrm>
-            <a:off x="274320" y="1124712"/>
-            <a:ext cx="11640312" cy="365759"/>
-          </a:xfrm>
-          <a:prstGeom prst="rect">
-            <a:avLst/>
-          </a:prstGeom>
-          <a:noFill/>
-        </p:spPr>
-        <p:txBody>
-          <a:bodyPr wrap="square" lIns="73152" rIns="73152">
-            <a:spAutoFit/>
-          </a:bodyPr>
-          <a:lstStyle/>
-          <a:p>
-            <a:pPr algn="l">
-              <a:defRPr sz="1300" b="1">
-                <a:solidFill>
-                  <a:srgbClr val="FFFFFF"/>
-                </a:solidFill>
-                <a:latin typeface="Arial"/>
-              </a:defRPr>
-            </a:pPr>
-            <a:r>
-              <a:t>  LỚP 5 • BÀI HỌC VÀ KẾT LUẬN</a:t>
-            </a:r>
-          </a:p>
-        </p:txBody>
-      </p:sp>
-      <p:sp>
-        <p:nvSpPr>
-          <p:cNvPr id="5" name="Rounded Rectangle 4"/>
-          <p:cNvSpPr/>
-          <p:nvPr/>
-        </p:nvSpPr>
-        <p:spPr>
-          <a:xfrm>
-            <a:off x="548640" y="1645919"/>
-            <a:ext cx="7772400" cy="822959"/>
+            <a:off x="1828800" y="1645920"/>
+            <a:ext cx="8531352" cy="3474720"/>
           </a:xfrm>
           <a:prstGeom prst="roundRect">
             <a:avLst/>
@@ -5387,14 +6952,57 @@
       </p:sp>
       <p:sp>
         <p:nvSpPr>
-          <p:cNvPr id="6" name="TextBox 5"/>
+          <p:cNvPr id="4" name="Rounded Rectangle 3"/>
+          <p:cNvSpPr/>
+          <p:nvPr/>
+        </p:nvSpPr>
+        <p:spPr>
+          <a:xfrm>
+            <a:off x="1828800" y="1645920"/>
+            <a:ext cx="8531352" cy="182879"/>
+          </a:xfrm>
+          <a:prstGeom prst="roundRect">
+            <a:avLst/>
+          </a:prstGeom>
+          <a:solidFill>
+            <a:srgbClr val="EC4899"/>
+          </a:solidFill>
+          <a:ln>
+            <a:noFill/>
+          </a:ln>
+        </p:spPr>
+        <p:style>
+          <a:lnRef idx="1">
+            <a:schemeClr val="accent1"/>
+          </a:lnRef>
+          <a:fillRef idx="3">
+            <a:schemeClr val="accent1"/>
+          </a:fillRef>
+          <a:effectRef idx="2">
+            <a:schemeClr val="accent1"/>
+          </a:effectRef>
+          <a:fontRef idx="minor">
+            <a:schemeClr val="lt1"/>
+          </a:fontRef>
+        </p:style>
+        <p:txBody>
+          <a:bodyPr rtlCol="0" anchor="ctr"/>
+          <a:lstStyle/>
+          <a:p>
+            <a:pPr algn="ctr"/>
+          </a:p>
+        </p:txBody>
+      </p:sp>
+      <p:sp>
+        <p:nvSpPr>
+          <p:cNvPr id="5" name="TextBox 4"/>
           <p:cNvSpPr txBox="1"/>
           <p:nvPr/>
         </p:nvSpPr>
         <p:spPr>
           <a:xfrm>
-            <a:off x="822960" y="1783079"/>
-            <a:ext cx="7315200" cy="548640"/>
+            <a:off x="2011680" y="2011680"/>
+            <a:ext cx="8165592" cy="731519"/>
           </a:xfrm>
           <a:prstGeom prst="rect">
             <a:avLst/>
@@ -5402,13 +7010,13 @@
           <a:noFill/>
         </p:spPr>
         <p:txBody>
-          <a:bodyPr wrap="square" lIns="73152" rIns="73152">
+          <a:bodyPr wrap="square" lIns="73152" rIns="73152" tIns="54864" bIns="54864">
             <a:spAutoFit/>
           </a:bodyPr>
           <a:lstStyle/>
           <a:p>
-            <a:pPr algn="l">
-              <a:defRPr sz="2000" b="1">
+            <a:pPr algn="ctr">
+              <a:defRPr sz="2400" b="1">
                 <a:solidFill>
                   <a:srgbClr val="BE185D"/>
                 </a:solidFill>
@@ -5416,21 +7024,21 @@
               </a:defRPr>
             </a:pPr>
             <a:r>
-              <a:t>💬 Tại sao nên đặt từ khóa trong dấu ngoặc kép " "?</a:t>
-            </a:r>
-          </a:p>
-        </p:txBody>
-      </p:sp>
-      <p:sp>
-        <p:nvSpPr>
-          <p:cNvPr id="7" name="TextBox 6"/>
+              <a:t>HOÀN THÀNH TIẾT 3! 🌟</a:t>
+            </a:r>
+          </a:p>
+        </p:txBody>
+      </p:sp>
+      <p:sp>
+        <p:nvSpPr>
+          <p:cNvPr id="6" name="TextBox 5"/>
           <p:cNvSpPr txBox="1"/>
           <p:nvPr/>
         </p:nvSpPr>
         <p:spPr>
           <a:xfrm>
-            <a:off x="731520" y="2651760"/>
-            <a:ext cx="7315200" cy="1188720"/>
+            <a:off x="2011680" y="2834640"/>
+            <a:ext cx="8165592" cy="1097279"/>
           </a:xfrm>
           <a:prstGeom prst="rect">
             <a:avLst/>
@@ -5438,16 +7046,13 @@
           <a:noFill/>
         </p:spPr>
         <p:txBody>
-          <a:bodyPr wrap="square" lIns="73152" rIns="73152">
+          <a:bodyPr wrap="square" lIns="73152" rIns="73152" tIns="54864" bIns="54864">
             <a:spAutoFit/>
           </a:bodyPr>
           <a:lstStyle/>
           <a:p>
-            <a:pPr algn="l">
-              <a:spcAft>
-                <a:spcPts val="600"/>
-              </a:spcAft>
-              <a:defRPr sz="1800" b="0">
+            <a:pPr algn="ctr">
+              <a:defRPr sz="1700" b="0">
                 <a:solidFill>
                   <a:srgbClr val="0F172A"/>
                 </a:solidFill>
@@ -5455,171 +7060,43 @@
               </a:defRPr>
             </a:pPr>
             <a:r>
-              <a:t>👉 Máy tìm kiếm sẽ tìm chính xác cả cụm từ theo đúng thứ tự.</a:t>
-            </a:r>
-          </a:p>
-          <a:p>
-            <a:pPr algn="l">
-              <a:spcAft>
-                <a:spcPts val="600"/>
-              </a:spcAft>
-              <a:defRPr sz="1800" b="0">
+              <a:t>BTVN: Cùng bố mẹ tìm hiểu thông tin thời tiết địa điểm du lịch cuối tuần này nhé!</a:t>
+            </a:r>
+          </a:p>
+        </p:txBody>
+      </p:sp>
+      <p:sp>
+        <p:nvSpPr>
+          <p:cNvPr id="7" name="TextBox 6"/>
+          <p:cNvSpPr txBox="1"/>
+          <p:nvPr/>
+        </p:nvSpPr>
+        <p:spPr>
+          <a:xfrm>
+            <a:off x="2011680" y="4114800"/>
+            <a:ext cx="8165592" cy="548639"/>
+          </a:xfrm>
+          <a:prstGeom prst="rect">
+            <a:avLst/>
+          </a:prstGeom>
+          <a:noFill/>
+        </p:spPr>
+        <p:txBody>
+          <a:bodyPr wrap="square" lIns="73152" rIns="73152" tIns="54864" bIns="54864">
+            <a:spAutoFit/>
+          </a:bodyPr>
+          <a:lstStyle/>
+          <a:p>
+            <a:pPr algn="ctr">
+              <a:defRPr sz="1600" b="1">
                 <a:solidFill>
-                  <a:srgbClr val="0F172A"/>
+                  <a:srgbClr val="EC4899"/>
                 </a:solidFill>
                 <a:latin typeface="Arial"/>
               </a:defRPr>
             </a:pPr>
             <a:r>
-              <a:t>👉 Loại bỏ hàng triệu kết quả rời rạc không liên quan.</a:t>
-            </a:r>
-          </a:p>
-        </p:txBody>
-      </p:sp>
-      <p:pic>
-        <p:nvPicPr>
-          <p:cNvPr id="8" name="Picture 7" descr="learn1_card2.png"/>
-          <p:cNvPicPr>
-            <a:picLocks noChangeAspect="1"/>
-          </p:cNvPicPr>
-          <p:nvPr/>
-        </p:nvPicPr>
-        <p:blipFill>
-          <a:blip r:embed="rId2"/>
-          <a:stretch>
-            <a:fillRect/>
-          </a:stretch>
-        </p:blipFill>
-        <p:spPr>
-          <a:xfrm>
-            <a:off x="8686800" y="1645919"/>
-            <a:ext cx="2926080" cy="2103120"/>
-          </a:xfrm>
-          <a:prstGeom prst="rect">
-            <a:avLst/>
-          </a:prstGeom>
-        </p:spPr>
-      </p:pic>
-      <p:sp>
-        <p:nvSpPr>
-          <p:cNvPr id="9" name="Rounded Rectangle 8"/>
-          <p:cNvSpPr/>
-          <p:nvPr/>
-        </p:nvSpPr>
-        <p:spPr>
-          <a:xfrm>
-            <a:off x="548640" y="4526279"/>
-            <a:ext cx="11091672" cy="1143000"/>
-          </a:xfrm>
-          <a:prstGeom prst="roundRect">
-            <a:avLst/>
-          </a:prstGeom>
-          <a:solidFill>
-            <a:srgbClr val="FFF7ED"/>
-          </a:solidFill>
-          <a:ln w="19050">
-            <a:solidFill>
-              <a:srgbClr val="EA580C"/>
-            </a:solidFill>
-          </a:ln>
-        </p:spPr>
-        <p:style>
-          <a:lnRef idx="1">
-            <a:schemeClr val="accent1"/>
-          </a:lnRef>
-          <a:fillRef idx="3">
-            <a:schemeClr val="accent1"/>
-          </a:fillRef>
-          <a:effectRef idx="2">
-            <a:schemeClr val="accent1"/>
-          </a:effectRef>
-          <a:fontRef idx="minor">
-            <a:schemeClr val="lt1"/>
-          </a:fontRef>
-        </p:style>
-        <p:txBody>
-          <a:bodyPr rtlCol="0" anchor="ctr"/>
-          <a:lstStyle/>
-          <a:p>
-            <a:pPr algn="ctr"/>
-          </a:p>
-        </p:txBody>
-      </p:sp>
-      <p:sp>
-        <p:nvSpPr>
-          <p:cNvPr id="10" name="Rectangle 9"/>
-          <p:cNvSpPr/>
-          <p:nvPr/>
-        </p:nvSpPr>
-        <p:spPr>
-          <a:xfrm>
-            <a:off x="548640" y="4526279"/>
-            <a:ext cx="182880" cy="1143000"/>
-          </a:xfrm>
-          <a:prstGeom prst="rect">
-            <a:avLst/>
-          </a:prstGeom>
-          <a:solidFill>
-            <a:srgbClr val="EA580C"/>
-          </a:solidFill>
-          <a:ln>
-            <a:noFill/>
-          </a:ln>
-        </p:spPr>
-        <p:style>
-          <a:lnRef idx="1">
-            <a:schemeClr val="accent1"/>
-          </a:lnRef>
-          <a:fillRef idx="3">
-            <a:schemeClr val="accent1"/>
-          </a:fillRef>
-          <a:effectRef idx="2">
-            <a:schemeClr val="accent1"/>
-          </a:effectRef>
-          <a:fontRef idx="minor">
-            <a:schemeClr val="lt1"/>
-          </a:fontRef>
-        </p:style>
-        <p:txBody>
-          <a:bodyPr rtlCol="0" anchor="ctr"/>
-          <a:lstStyle/>
-          <a:p>
-            <a:pPr algn="ctr"/>
-          </a:p>
-        </p:txBody>
-      </p:sp>
-      <p:sp>
-        <p:nvSpPr>
-          <p:cNvPr id="11" name="TextBox 10"/>
-          <p:cNvSpPr txBox="1"/>
-          <p:nvPr/>
-        </p:nvSpPr>
-        <p:spPr>
-          <a:xfrm>
-            <a:off x="914400" y="4709159"/>
-            <a:ext cx="10543032" cy="777239"/>
-          </a:xfrm>
-          <a:prstGeom prst="rect">
-            <a:avLst/>
-          </a:prstGeom>
-          <a:noFill/>
-        </p:spPr>
-        <p:txBody>
-          <a:bodyPr wrap="square" lIns="73152" rIns="73152">
-            <a:spAutoFit/>
-          </a:bodyPr>
-          <a:lstStyle/>
-          <a:p>
-            <a:pPr algn="l">
-              <a:defRPr sz="2000" b="1">
-                <a:solidFill>
-                  <a:srgbClr val="9A3412"/>
-                </a:solidFill>
-                <a:latin typeface="Arial"/>
-              </a:defRPr>
-            </a:pPr>
-            <a:r>
-              <a:t>💡 KẾT LUẬN: Tìm kiếm thông minh với từ khóa chuẩn xác và luôn kiểm chứng độ tin cậy của thông tin!</a:t>
+              <a:t>Hẹn gặp lại các em ở bài học tuần sau! 🚀</a:t>
             </a:r>
           </a:p>
         </p:txBody>
@@ -5631,681 +7108,6 @@
   </p:clrMapOvr>
   <p:transition spd="med">
     <p:cover/>
-  </p:transition>
-</p:sld>
-</file>
-
-<file path=ppt/slides/slide9.xml><?xml version="1.0" encoding="utf-8"?>
-<p:sld xmlns:a="http://schemas.openxmlformats.org/drawingml/2006/main" xmlns:p="http://schemas.openxmlformats.org/presentationml/2006/main" xmlns:r="http://schemas.openxmlformats.org/officeDocument/2006/relationships">
-  <p:cSld>
-    <p:spTree>
-      <p:nvGrpSpPr>
-        <p:cNvPr id="1" name=""/>
-        <p:cNvGrpSpPr/>
-        <p:nvPr/>
-      </p:nvGrpSpPr>
-      <p:grpSpPr/>
-      <p:sp>
-        <p:nvSpPr>
-          <p:cNvPr id="2" name="Rectangle 1"/>
-          <p:cNvSpPr/>
-          <p:nvPr/>
-        </p:nvSpPr>
-        <p:spPr>
-          <a:xfrm>
-            <a:off x="0" y="1051560"/>
-            <a:ext cx="12188952" cy="4754879"/>
-          </a:xfrm>
-          <a:prstGeom prst="rect">
-            <a:avLst/>
-          </a:prstGeom>
-          <a:solidFill>
-            <a:srgbClr val="FDF2F8"/>
-          </a:solidFill>
-          <a:ln>
-            <a:noFill/>
-          </a:ln>
-        </p:spPr>
-        <p:style>
-          <a:lnRef idx="1">
-            <a:schemeClr val="accent1"/>
-          </a:lnRef>
-          <a:fillRef idx="3">
-            <a:schemeClr val="accent1"/>
-          </a:fillRef>
-          <a:effectRef idx="2">
-            <a:schemeClr val="accent1"/>
-          </a:effectRef>
-          <a:fontRef idx="minor">
-            <a:schemeClr val="lt1"/>
-          </a:fontRef>
-        </p:style>
-        <p:txBody>
-          <a:bodyPr rtlCol="0" anchor="ctr"/>
-          <a:lstStyle/>
-          <a:p>
-            <a:pPr algn="ctr"/>
-          </a:p>
-        </p:txBody>
-      </p:sp>
-      <p:sp>
-        <p:nvSpPr>
-          <p:cNvPr id="3" name="Rectangle 2"/>
-          <p:cNvSpPr/>
-          <p:nvPr/>
-        </p:nvSpPr>
-        <p:spPr>
-          <a:xfrm>
-            <a:off x="0" y="1097280"/>
-            <a:ext cx="12188952" cy="411479"/>
-          </a:xfrm>
-          <a:prstGeom prst="rect">
-            <a:avLst/>
-          </a:prstGeom>
-          <a:solidFill>
-            <a:srgbClr val="D97706"/>
-          </a:solidFill>
-          <a:ln>
-            <a:noFill/>
-          </a:ln>
-        </p:spPr>
-        <p:style>
-          <a:lnRef idx="1">
-            <a:schemeClr val="accent1"/>
-          </a:lnRef>
-          <a:fillRef idx="3">
-            <a:schemeClr val="accent1"/>
-          </a:fillRef>
-          <a:effectRef idx="2">
-            <a:schemeClr val="accent1"/>
-          </a:effectRef>
-          <a:fontRef idx="minor">
-            <a:schemeClr val="lt1"/>
-          </a:fontRef>
-        </p:style>
-        <p:txBody>
-          <a:bodyPr rtlCol="0" anchor="ctr"/>
-          <a:lstStyle/>
-          <a:p>
-            <a:pPr algn="ctr"/>
-          </a:p>
-        </p:txBody>
-      </p:sp>
-      <p:sp>
-        <p:nvSpPr>
-          <p:cNvPr id="4" name="TextBox 3"/>
-          <p:cNvSpPr txBox="1"/>
-          <p:nvPr/>
-        </p:nvSpPr>
-        <p:spPr>
-          <a:xfrm>
-            <a:off x="274320" y="1124712"/>
-            <a:ext cx="11640312" cy="365759"/>
-          </a:xfrm>
-          <a:prstGeom prst="rect">
-            <a:avLst/>
-          </a:prstGeom>
-          <a:noFill/>
-        </p:spPr>
-        <p:txBody>
-          <a:bodyPr wrap="square" lIns="73152" rIns="73152">
-            <a:spAutoFit/>
-          </a:bodyPr>
-          <a:lstStyle/>
-          <a:p>
-            <a:pPr algn="l">
-              <a:defRPr sz="1300" b="1">
-                <a:solidFill>
-                  <a:srgbClr val="FFFFFF"/>
-                </a:solidFill>
-                <a:latin typeface="Arial"/>
-              </a:defRPr>
-            </a:pPr>
-            <a:r>
-              <a:t>  LỚP 5 • THỬ THÁCH TRẮC NGHIỆM VUI</a:t>
-            </a:r>
-          </a:p>
-        </p:txBody>
-      </p:sp>
-      <p:sp>
-        <p:nvSpPr>
-          <p:cNvPr id="5" name="TextBox 4"/>
-          <p:cNvSpPr txBox="1"/>
-          <p:nvPr/>
-        </p:nvSpPr>
-        <p:spPr>
-          <a:xfrm>
-            <a:off x="457200" y="1600200"/>
-            <a:ext cx="11274552" cy="640080"/>
-          </a:xfrm>
-          <a:prstGeom prst="rect">
-            <a:avLst/>
-          </a:prstGeom>
-          <a:noFill/>
-        </p:spPr>
-        <p:txBody>
-          <a:bodyPr wrap="square" lIns="73152" rIns="73152">
-            <a:spAutoFit/>
-          </a:bodyPr>
-          <a:lstStyle/>
-          <a:p>
-            <a:pPr algn="l">
-              <a:defRPr sz="2200" b="1">
-                <a:solidFill>
-                  <a:srgbClr val="1E293B"/>
-                </a:solidFill>
-                <a:latin typeface="Arial"/>
-              </a:defRPr>
-            </a:pPr>
-            <a:r>
-              <a:t>❓ Đuôi tên miền nào sau đây đại diện cho các cơ quan giáo dục?</a:t>
-            </a:r>
-          </a:p>
-        </p:txBody>
-      </p:sp>
-      <p:sp>
-        <p:nvSpPr>
-          <p:cNvPr id="6" name="Rounded Rectangle 5"/>
-          <p:cNvSpPr/>
-          <p:nvPr/>
-        </p:nvSpPr>
-        <p:spPr>
-          <a:xfrm>
-            <a:off x="457200" y="2377440"/>
-            <a:ext cx="5477256" cy="1463040"/>
-          </a:xfrm>
-          <a:prstGeom prst="roundRect">
-            <a:avLst/>
-          </a:prstGeom>
-          <a:solidFill>
-            <a:srgbClr val="FFFBEB"/>
-          </a:solidFill>
-          <a:ln w="19050">
-            <a:solidFill>
-              <a:srgbClr val="F59E0B"/>
-            </a:solidFill>
-          </a:ln>
-        </p:spPr>
-        <p:style>
-          <a:lnRef idx="1">
-            <a:schemeClr val="accent1"/>
-          </a:lnRef>
-          <a:fillRef idx="3">
-            <a:schemeClr val="accent1"/>
-          </a:fillRef>
-          <a:effectRef idx="2">
-            <a:schemeClr val="accent1"/>
-          </a:effectRef>
-          <a:fontRef idx="minor">
-            <a:schemeClr val="lt1"/>
-          </a:fontRef>
-        </p:style>
-        <p:txBody>
-          <a:bodyPr rtlCol="0" anchor="ctr"/>
-          <a:lstStyle/>
-          <a:p>
-            <a:pPr algn="ctr"/>
-          </a:p>
-        </p:txBody>
-      </p:sp>
-      <p:sp>
-        <p:nvSpPr>
-          <p:cNvPr id="7" name="Rectangle 6"/>
-          <p:cNvSpPr/>
-          <p:nvPr/>
-        </p:nvSpPr>
-        <p:spPr>
-          <a:xfrm>
-            <a:off x="457200" y="2377440"/>
-            <a:ext cx="137160" cy="1463040"/>
-          </a:xfrm>
-          <a:prstGeom prst="rect">
-            <a:avLst/>
-          </a:prstGeom>
-          <a:solidFill>
-            <a:srgbClr val="F59E0B"/>
-          </a:solidFill>
-          <a:ln>
-            <a:noFill/>
-          </a:ln>
-        </p:spPr>
-        <p:style>
-          <a:lnRef idx="1">
-            <a:schemeClr val="accent1"/>
-          </a:lnRef>
-          <a:fillRef idx="3">
-            <a:schemeClr val="accent1"/>
-          </a:fillRef>
-          <a:effectRef idx="2">
-            <a:schemeClr val="accent1"/>
-          </a:effectRef>
-          <a:fontRef idx="minor">
-            <a:schemeClr val="lt1"/>
-          </a:fontRef>
-        </p:style>
-        <p:txBody>
-          <a:bodyPr rtlCol="0" anchor="ctr"/>
-          <a:lstStyle/>
-          <a:p>
-            <a:pPr algn="ctr"/>
-          </a:p>
-        </p:txBody>
-      </p:sp>
-      <p:sp>
-        <p:nvSpPr>
-          <p:cNvPr id="8" name="TextBox 7"/>
-          <p:cNvSpPr txBox="1"/>
-          <p:nvPr/>
-        </p:nvSpPr>
-        <p:spPr>
-          <a:xfrm>
-            <a:off x="731520" y="2606040"/>
-            <a:ext cx="5020056" cy="1005840"/>
-          </a:xfrm>
-          <a:prstGeom prst="rect">
-            <a:avLst/>
-          </a:prstGeom>
-          <a:noFill/>
-        </p:spPr>
-        <p:txBody>
-          <a:bodyPr wrap="square" lIns="73152" rIns="73152">
-            <a:spAutoFit/>
-          </a:bodyPr>
-          <a:lstStyle/>
-          <a:p>
-            <a:pPr algn="l">
-              <a:defRPr sz="1900" b="1">
-                <a:solidFill>
-                  <a:srgbClr val="78350F"/>
-                </a:solidFill>
-                <a:latin typeface="Arial"/>
-              </a:defRPr>
-            </a:pPr>
-            <a:r>
-              <a:t>A. .gov.vn</a:t>
-            </a:r>
-          </a:p>
-        </p:txBody>
-      </p:sp>
-      <p:sp>
-        <p:nvSpPr>
-          <p:cNvPr id="9" name="Rounded Rectangle 8"/>
-          <p:cNvSpPr/>
-          <p:nvPr/>
-        </p:nvSpPr>
-        <p:spPr>
-          <a:xfrm>
-            <a:off x="6254496" y="2377440"/>
-            <a:ext cx="5477256" cy="1463040"/>
-          </a:xfrm>
-          <a:prstGeom prst="roundRect">
-            <a:avLst/>
-          </a:prstGeom>
-          <a:solidFill>
-            <a:srgbClr val="FFFBEB"/>
-          </a:solidFill>
-          <a:ln w="19050">
-            <a:solidFill>
-              <a:srgbClr val="F59E0B"/>
-            </a:solidFill>
-          </a:ln>
-        </p:spPr>
-        <p:style>
-          <a:lnRef idx="1">
-            <a:schemeClr val="accent1"/>
-          </a:lnRef>
-          <a:fillRef idx="3">
-            <a:schemeClr val="accent1"/>
-          </a:fillRef>
-          <a:effectRef idx="2">
-            <a:schemeClr val="accent1"/>
-          </a:effectRef>
-          <a:fontRef idx="minor">
-            <a:schemeClr val="lt1"/>
-          </a:fontRef>
-        </p:style>
-        <p:txBody>
-          <a:bodyPr rtlCol="0" anchor="ctr"/>
-          <a:lstStyle/>
-          <a:p>
-            <a:pPr algn="ctr"/>
-          </a:p>
-        </p:txBody>
-      </p:sp>
-      <p:sp>
-        <p:nvSpPr>
-          <p:cNvPr id="10" name="Rectangle 9"/>
-          <p:cNvSpPr/>
-          <p:nvPr/>
-        </p:nvSpPr>
-        <p:spPr>
-          <a:xfrm>
-            <a:off x="6254496" y="2377440"/>
-            <a:ext cx="137160" cy="1463040"/>
-          </a:xfrm>
-          <a:prstGeom prst="rect">
-            <a:avLst/>
-          </a:prstGeom>
-          <a:solidFill>
-            <a:srgbClr val="F59E0B"/>
-          </a:solidFill>
-          <a:ln>
-            <a:noFill/>
-          </a:ln>
-        </p:spPr>
-        <p:style>
-          <a:lnRef idx="1">
-            <a:schemeClr val="accent1"/>
-          </a:lnRef>
-          <a:fillRef idx="3">
-            <a:schemeClr val="accent1"/>
-          </a:fillRef>
-          <a:effectRef idx="2">
-            <a:schemeClr val="accent1"/>
-          </a:effectRef>
-          <a:fontRef idx="minor">
-            <a:schemeClr val="lt1"/>
-          </a:fontRef>
-        </p:style>
-        <p:txBody>
-          <a:bodyPr rtlCol="0" anchor="ctr"/>
-          <a:lstStyle/>
-          <a:p>
-            <a:pPr algn="ctr"/>
-          </a:p>
-        </p:txBody>
-      </p:sp>
-      <p:sp>
-        <p:nvSpPr>
-          <p:cNvPr id="11" name="TextBox 10"/>
-          <p:cNvSpPr txBox="1"/>
-          <p:nvPr/>
-        </p:nvSpPr>
-        <p:spPr>
-          <a:xfrm>
-            <a:off x="6528816" y="2606040"/>
-            <a:ext cx="5020056" cy="1005840"/>
-          </a:xfrm>
-          <a:prstGeom prst="rect">
-            <a:avLst/>
-          </a:prstGeom>
-          <a:noFill/>
-        </p:spPr>
-        <p:txBody>
-          <a:bodyPr wrap="square" lIns="73152" rIns="73152">
-            <a:spAutoFit/>
-          </a:bodyPr>
-          <a:lstStyle/>
-          <a:p>
-            <a:pPr algn="l">
-              <a:defRPr sz="1900" b="1">
-                <a:solidFill>
-                  <a:srgbClr val="78350F"/>
-                </a:solidFill>
-                <a:latin typeface="Arial"/>
-              </a:defRPr>
-            </a:pPr>
-            <a:r>
-              <a:t>B. .edu.vn</a:t>
-            </a:r>
-          </a:p>
-        </p:txBody>
-      </p:sp>
-      <p:sp>
-        <p:nvSpPr>
-          <p:cNvPr id="12" name="Rounded Rectangle 11"/>
-          <p:cNvSpPr/>
-          <p:nvPr/>
-        </p:nvSpPr>
-        <p:spPr>
-          <a:xfrm>
-            <a:off x="457200" y="4069080"/>
-            <a:ext cx="5477256" cy="1463040"/>
-          </a:xfrm>
-          <a:prstGeom prst="roundRect">
-            <a:avLst/>
-          </a:prstGeom>
-          <a:solidFill>
-            <a:srgbClr val="FFFBEB"/>
-          </a:solidFill>
-          <a:ln w="19050">
-            <a:solidFill>
-              <a:srgbClr val="F59E0B"/>
-            </a:solidFill>
-          </a:ln>
-        </p:spPr>
-        <p:style>
-          <a:lnRef idx="1">
-            <a:schemeClr val="accent1"/>
-          </a:lnRef>
-          <a:fillRef idx="3">
-            <a:schemeClr val="accent1"/>
-          </a:fillRef>
-          <a:effectRef idx="2">
-            <a:schemeClr val="accent1"/>
-          </a:effectRef>
-          <a:fontRef idx="minor">
-            <a:schemeClr val="lt1"/>
-          </a:fontRef>
-        </p:style>
-        <p:txBody>
-          <a:bodyPr rtlCol="0" anchor="ctr"/>
-          <a:lstStyle/>
-          <a:p>
-            <a:pPr algn="ctr"/>
-          </a:p>
-        </p:txBody>
-      </p:sp>
-      <p:sp>
-        <p:nvSpPr>
-          <p:cNvPr id="13" name="Rectangle 12"/>
-          <p:cNvSpPr/>
-          <p:nvPr/>
-        </p:nvSpPr>
-        <p:spPr>
-          <a:xfrm>
-            <a:off x="457200" y="4069080"/>
-            <a:ext cx="137160" cy="1463040"/>
-          </a:xfrm>
-          <a:prstGeom prst="rect">
-            <a:avLst/>
-          </a:prstGeom>
-          <a:solidFill>
-            <a:srgbClr val="F59E0B"/>
-          </a:solidFill>
-          <a:ln>
-            <a:noFill/>
-          </a:ln>
-        </p:spPr>
-        <p:style>
-          <a:lnRef idx="1">
-            <a:schemeClr val="accent1"/>
-          </a:lnRef>
-          <a:fillRef idx="3">
-            <a:schemeClr val="accent1"/>
-          </a:fillRef>
-          <a:effectRef idx="2">
-            <a:schemeClr val="accent1"/>
-          </a:effectRef>
-          <a:fontRef idx="minor">
-            <a:schemeClr val="lt1"/>
-          </a:fontRef>
-        </p:style>
-        <p:txBody>
-          <a:bodyPr rtlCol="0" anchor="ctr"/>
-          <a:lstStyle/>
-          <a:p>
-            <a:pPr algn="ctr"/>
-          </a:p>
-        </p:txBody>
-      </p:sp>
-      <p:sp>
-        <p:nvSpPr>
-          <p:cNvPr id="14" name="TextBox 13"/>
-          <p:cNvSpPr txBox="1"/>
-          <p:nvPr/>
-        </p:nvSpPr>
-        <p:spPr>
-          <a:xfrm>
-            <a:off x="731520" y="4297680"/>
-            <a:ext cx="5020056" cy="1005840"/>
-          </a:xfrm>
-          <a:prstGeom prst="rect">
-            <a:avLst/>
-          </a:prstGeom>
-          <a:noFill/>
-        </p:spPr>
-        <p:txBody>
-          <a:bodyPr wrap="square" lIns="73152" rIns="73152">
-            <a:spAutoFit/>
-          </a:bodyPr>
-          <a:lstStyle/>
-          <a:p>
-            <a:pPr algn="l">
-              <a:defRPr sz="1900" b="1">
-                <a:solidFill>
-                  <a:srgbClr val="78350F"/>
-                </a:solidFill>
-                <a:latin typeface="Arial"/>
-              </a:defRPr>
-            </a:pPr>
-            <a:r>
-              <a:t>C. .com</a:t>
-            </a:r>
-          </a:p>
-        </p:txBody>
-      </p:sp>
-      <p:sp>
-        <p:nvSpPr>
-          <p:cNvPr id="15" name="Rounded Rectangle 14"/>
-          <p:cNvSpPr/>
-          <p:nvPr/>
-        </p:nvSpPr>
-        <p:spPr>
-          <a:xfrm>
-            <a:off x="6254496" y="4069080"/>
-            <a:ext cx="5477256" cy="1463040"/>
-          </a:xfrm>
-          <a:prstGeom prst="roundRect">
-            <a:avLst/>
-          </a:prstGeom>
-          <a:solidFill>
-            <a:srgbClr val="FFFBEB"/>
-          </a:solidFill>
-          <a:ln w="19050">
-            <a:solidFill>
-              <a:srgbClr val="F59E0B"/>
-            </a:solidFill>
-          </a:ln>
-        </p:spPr>
-        <p:style>
-          <a:lnRef idx="1">
-            <a:schemeClr val="accent1"/>
-          </a:lnRef>
-          <a:fillRef idx="3">
-            <a:schemeClr val="accent1"/>
-          </a:fillRef>
-          <a:effectRef idx="2">
-            <a:schemeClr val="accent1"/>
-          </a:effectRef>
-          <a:fontRef idx="minor">
-            <a:schemeClr val="lt1"/>
-          </a:fontRef>
-        </p:style>
-        <p:txBody>
-          <a:bodyPr rtlCol="0" anchor="ctr"/>
-          <a:lstStyle/>
-          <a:p>
-            <a:pPr algn="ctr"/>
-          </a:p>
-        </p:txBody>
-      </p:sp>
-      <p:sp>
-        <p:nvSpPr>
-          <p:cNvPr id="16" name="Rectangle 15"/>
-          <p:cNvSpPr/>
-          <p:nvPr/>
-        </p:nvSpPr>
-        <p:spPr>
-          <a:xfrm>
-            <a:off x="6254496" y="4069080"/>
-            <a:ext cx="137160" cy="1463040"/>
-          </a:xfrm>
-          <a:prstGeom prst="rect">
-            <a:avLst/>
-          </a:prstGeom>
-          <a:solidFill>
-            <a:srgbClr val="F59E0B"/>
-          </a:solidFill>
-          <a:ln>
-            <a:noFill/>
-          </a:ln>
-        </p:spPr>
-        <p:style>
-          <a:lnRef idx="1">
-            <a:schemeClr val="accent1"/>
-          </a:lnRef>
-          <a:fillRef idx="3">
-            <a:schemeClr val="accent1"/>
-          </a:fillRef>
-          <a:effectRef idx="2">
-            <a:schemeClr val="accent1"/>
-          </a:effectRef>
-          <a:fontRef idx="minor">
-            <a:schemeClr val="lt1"/>
-          </a:fontRef>
-        </p:style>
-        <p:txBody>
-          <a:bodyPr rtlCol="0" anchor="ctr"/>
-          <a:lstStyle/>
-          <a:p>
-            <a:pPr algn="ctr"/>
-          </a:p>
-        </p:txBody>
-      </p:sp>
-      <p:sp>
-        <p:nvSpPr>
-          <p:cNvPr id="17" name="TextBox 16"/>
-          <p:cNvSpPr txBox="1"/>
-          <p:nvPr/>
-        </p:nvSpPr>
-        <p:spPr>
-          <a:xfrm>
-            <a:off x="6528816" y="4297680"/>
-            <a:ext cx="5020056" cy="1005840"/>
-          </a:xfrm>
-          <a:prstGeom prst="rect">
-            <a:avLst/>
-          </a:prstGeom>
-          <a:noFill/>
-        </p:spPr>
-        <p:txBody>
-          <a:bodyPr wrap="square" lIns="73152" rIns="73152">
-            <a:spAutoFit/>
-          </a:bodyPr>
-          <a:lstStyle/>
-          <a:p>
-            <a:pPr algn="l">
-              <a:defRPr sz="1900" b="1">
-                <a:solidFill>
-                  <a:srgbClr val="78350F"/>
-                </a:solidFill>
-                <a:latin typeface="Arial"/>
-              </a:defRPr>
-            </a:pPr>
-            <a:r>
-              <a:t>D. .net</a:t>
-            </a:r>
-          </a:p>
-        </p:txBody>
-      </p:sp>
-    </p:spTree>
-  </p:cSld>
-  <p:clrMapOvr>
-    <a:masterClrMapping/>
-  </p:clrMapOvr>
-  <p:transition spd="med">
-    <p:push dir="l"/>
   </p:transition>
 </p:sld>
 </file>

--- a/KHBD_Tin_học/Lớp_5/Tuần_04/Slide_Tin_hoc_Lớp_5_Tiet03_Bai_3_Tim_kiem_thong_tin.pptx
+++ b/KHBD_Tin_học/Lớp_5/Tuần_04/Slide_Tin_hoc_Lớp_5_Tiet03_Bai_3_Tim_kiem_thong_tin.pptx
@@ -12,6 +12,7 @@
     <p:sldId id="260" r:id="rId10"/>
     <p:sldId id="261" r:id="rId11"/>
     <p:sldId id="262" r:id="rId12"/>
+    <p:sldId id="263" r:id="rId13"/>
   </p:sldIdLst>
   <p:sldSz cx="12192000" cy="6858000"/>
   <p:notesSz cx="6858000" cy="9144000"/>
@@ -3490,7 +3491,7 @@
         <p:spPr>
           <a:xfrm>
             <a:off x="1097280" y="1463040"/>
-            <a:ext cx="9994392" cy="182879"/>
+            <a:ext cx="9994392" cy="228600"/>
           </a:xfrm>
           <a:prstGeom prst="roundRect">
             <a:avLst/>
@@ -3846,7 +3847,7 @@
               </a:defRPr>
             </a:pPr>
             <a:r>
-              <a:t>Tình huống: Chuẩn bị hành lý cho kì nghỉ hè</a:t>
+              <a:t>Tình huống: Chuẩn bị hành lý đi nghỉ hè</a:t>
             </a:r>
           </a:p>
         </p:txBody>
@@ -3860,7 +3861,7 @@
         <p:spPr>
           <a:xfrm>
             <a:off x="365760" y="1645920"/>
-            <a:ext cx="3566160" cy="3977639"/>
+            <a:ext cx="11247120" cy="2971800"/>
           </a:xfrm>
           <a:prstGeom prst="roundRect">
             <a:avLst/>
@@ -3896,88 +3897,9 @@
           </a:p>
         </p:txBody>
       </p:sp>
-      <p:sp>
-        <p:nvSpPr>
-          <p:cNvPr id="7" name="Rounded Rectangle 6"/>
-          <p:cNvSpPr/>
-          <p:nvPr/>
-        </p:nvSpPr>
-        <p:spPr>
-          <a:xfrm>
-            <a:off x="365760" y="1645920"/>
-            <a:ext cx="3566160" cy="411479"/>
-          </a:xfrm>
-          <a:prstGeom prst="roundRect">
-            <a:avLst/>
-          </a:prstGeom>
-          <a:solidFill>
-            <a:srgbClr val="BE185D"/>
-          </a:solidFill>
-          <a:ln>
-            <a:noFill/>
-          </a:ln>
-        </p:spPr>
-        <p:style>
-          <a:lnRef idx="1">
-            <a:schemeClr val="accent1"/>
-          </a:lnRef>
-          <a:fillRef idx="3">
-            <a:schemeClr val="accent1"/>
-          </a:fillRef>
-          <a:effectRef idx="2">
-            <a:schemeClr val="accent1"/>
-          </a:effectRef>
-          <a:fontRef idx="minor">
-            <a:schemeClr val="lt1"/>
-          </a:fontRef>
-        </p:style>
-        <p:txBody>
-          <a:bodyPr rtlCol="0" anchor="ctr"/>
-          <a:lstStyle/>
-          <a:p>
-            <a:pPr algn="ctr"/>
-          </a:p>
-        </p:txBody>
-      </p:sp>
-      <p:sp>
-        <p:nvSpPr>
-          <p:cNvPr id="8" name="TextBox 7"/>
-          <p:cNvSpPr txBox="1"/>
-          <p:nvPr/>
-        </p:nvSpPr>
-        <p:spPr>
-          <a:xfrm>
-            <a:off x="365760" y="1691640"/>
-            <a:ext cx="3566160" cy="365759"/>
-          </a:xfrm>
-          <a:prstGeom prst="rect">
-            <a:avLst/>
-          </a:prstGeom>
-          <a:noFill/>
-        </p:spPr>
-        <p:txBody>
-          <a:bodyPr wrap="square" lIns="73152" rIns="73152" tIns="54864" bIns="54864">
-            <a:spAutoFit/>
-          </a:bodyPr>
-          <a:lstStyle/>
-          <a:p>
-            <a:pPr algn="ctr">
-              <a:defRPr sz="1400" b="1">
-                <a:solidFill>
-                  <a:srgbClr val="FFFFFF"/>
-                </a:solidFill>
-                <a:latin typeface="Arial"/>
-              </a:defRPr>
-            </a:pPr>
-            <a:r>
-              <a:t>1. An đi Nha Trang</a:t>
-            </a:r>
-          </a:p>
-        </p:txBody>
-      </p:sp>
       <p:pic>
         <p:nvPicPr>
-          <p:cNvPr id="9" name="Picture 8" descr="sgk_lop5_bai3_khoi_dong.png"/>
+          <p:cNvPr id="7" name="Picture 6" descr="ai_lop5_bai3_travel.jpg"/>
           <p:cNvPicPr>
             <a:picLocks noChangeAspect="1"/>
           </p:cNvPicPr>
@@ -3991,14 +3913,102 @@
         </p:blipFill>
         <p:spPr>
           <a:xfrm>
-            <a:off x="502920" y="2148840"/>
-            <a:ext cx="3291840" cy="2103120"/>
+            <a:off x="457200" y="1691640"/>
+            <a:ext cx="11064240" cy="2880360"/>
           </a:xfrm>
           <a:prstGeom prst="rect">
             <a:avLst/>
           </a:prstGeom>
         </p:spPr>
       </p:pic>
+      <p:sp>
+        <p:nvSpPr>
+          <p:cNvPr id="8" name="Rounded Rectangle 7"/>
+          <p:cNvSpPr/>
+          <p:nvPr/>
+        </p:nvSpPr>
+        <p:spPr>
+          <a:xfrm>
+            <a:off x="365760" y="4709160"/>
+            <a:ext cx="11247120" cy="960119"/>
+          </a:xfrm>
+          <a:prstGeom prst="roundRect">
+            <a:avLst/>
+          </a:prstGeom>
+          <a:solidFill>
+            <a:srgbClr val="FFFFFF"/>
+          </a:solidFill>
+          <a:ln w="19050">
+            <a:solidFill>
+              <a:srgbClr val="BE185D"/>
+            </a:solidFill>
+          </a:ln>
+        </p:spPr>
+        <p:style>
+          <a:lnRef idx="1">
+            <a:schemeClr val="accent1"/>
+          </a:lnRef>
+          <a:fillRef idx="3">
+            <a:schemeClr val="accent1"/>
+          </a:fillRef>
+          <a:effectRef idx="2">
+            <a:schemeClr val="accent1"/>
+          </a:effectRef>
+          <a:fontRef idx="minor">
+            <a:schemeClr val="lt1"/>
+          </a:fontRef>
+        </p:style>
+        <p:txBody>
+          <a:bodyPr rtlCol="0" anchor="ctr"/>
+          <a:lstStyle/>
+          <a:p>
+            <a:pPr algn="ctr"/>
+          </a:p>
+        </p:txBody>
+      </p:sp>
+      <p:sp>
+        <p:nvSpPr>
+          <p:cNvPr id="9" name="Rounded Rectangle 8"/>
+          <p:cNvSpPr/>
+          <p:nvPr/>
+        </p:nvSpPr>
+        <p:spPr>
+          <a:xfrm>
+            <a:off x="365760" y="4709160"/>
+            <a:ext cx="182880" cy="960119"/>
+          </a:xfrm>
+          <a:prstGeom prst="roundRect">
+            <a:avLst/>
+          </a:prstGeom>
+          <a:solidFill>
+            <a:srgbClr val="BE185D"/>
+          </a:solidFill>
+          <a:ln>
+            <a:noFill/>
+          </a:ln>
+        </p:spPr>
+        <p:style>
+          <a:lnRef idx="1">
+            <a:schemeClr val="accent1"/>
+          </a:lnRef>
+          <a:fillRef idx="3">
+            <a:schemeClr val="accent1"/>
+          </a:fillRef>
+          <a:effectRef idx="2">
+            <a:schemeClr val="accent1"/>
+          </a:effectRef>
+          <a:fontRef idx="minor">
+            <a:schemeClr val="lt1"/>
+          </a:fontRef>
+        </p:style>
+        <p:txBody>
+          <a:bodyPr rtlCol="0" anchor="ctr"/>
+          <a:lstStyle/>
+          <a:p>
+            <a:pPr algn="ctr"/>
+          </a:p>
+        </p:txBody>
+      </p:sp>
       <p:sp>
         <p:nvSpPr>
           <p:cNvPr id="10" name="TextBox 9"/>
@@ -4007,8 +4017,8 @@
         </p:nvSpPr>
         <p:spPr>
           <a:xfrm>
-            <a:off x="502920" y="4343400"/>
-            <a:ext cx="3291840" cy="1188719"/>
+            <a:off x="685800" y="4800600"/>
+            <a:ext cx="10607040" cy="777239"/>
           </a:xfrm>
           <a:prstGeom prst="rect">
             <a:avLst/>
@@ -4021,8 +4031,8 @@
           </a:bodyPr>
           <a:lstStyle/>
           <a:p>
-            <a:pPr algn="ctr">
-              <a:defRPr sz="1300" b="0">
+            <a:pPr algn="l">
+              <a:defRPr sz="1500" b="1">
                 <a:solidFill>
                   <a:srgbClr val="0F172A"/>
                 </a:solidFill>
@@ -4030,375 +4040,11 @@
               </a:defRPr>
             </a:pPr>
             <a:r>
-              <a:t>Nha Trang là thành phố biển, quanh năm nắng ấm. Cần đồ bơi, kem chống nắng...</a:t>
-            </a:r>
-          </a:p>
-        </p:txBody>
-      </p:sp>
-      <p:sp>
-        <p:nvSpPr>
-          <p:cNvPr id="11" name="Rounded Rectangle 10"/>
-          <p:cNvSpPr/>
-          <p:nvPr/>
-        </p:nvSpPr>
-        <p:spPr>
-          <a:xfrm>
-            <a:off x="4206240" y="1645920"/>
-            <a:ext cx="3566160" cy="3977639"/>
-          </a:xfrm>
-          <a:prstGeom prst="roundRect">
-            <a:avLst/>
-          </a:prstGeom>
-          <a:solidFill>
-            <a:srgbClr val="FFFFFF"/>
-          </a:solidFill>
-          <a:ln w="19050">
-            <a:solidFill>
-              <a:srgbClr val="EC4899"/>
-            </a:solidFill>
-          </a:ln>
-        </p:spPr>
-        <p:style>
-          <a:lnRef idx="1">
-            <a:schemeClr val="accent1"/>
-          </a:lnRef>
-          <a:fillRef idx="3">
-            <a:schemeClr val="accent1"/>
-          </a:fillRef>
-          <a:effectRef idx="2">
-            <a:schemeClr val="accent1"/>
-          </a:effectRef>
-          <a:fontRef idx="minor">
-            <a:schemeClr val="lt1"/>
-          </a:fontRef>
-        </p:style>
-        <p:txBody>
-          <a:bodyPr rtlCol="0" anchor="ctr"/>
-          <a:lstStyle/>
-          <a:p>
-            <a:pPr algn="ctr"/>
-          </a:p>
-        </p:txBody>
-      </p:sp>
-      <p:sp>
-        <p:nvSpPr>
-          <p:cNvPr id="12" name="Rounded Rectangle 11"/>
-          <p:cNvSpPr/>
-          <p:nvPr/>
-        </p:nvSpPr>
-        <p:spPr>
-          <a:xfrm>
-            <a:off x="4206240" y="1645920"/>
-            <a:ext cx="3566160" cy="411479"/>
-          </a:xfrm>
-          <a:prstGeom prst="roundRect">
-            <a:avLst/>
-          </a:prstGeom>
-          <a:solidFill>
-            <a:srgbClr val="BE185D"/>
-          </a:solidFill>
-          <a:ln>
-            <a:noFill/>
-          </a:ln>
-        </p:spPr>
-        <p:style>
-          <a:lnRef idx="1">
-            <a:schemeClr val="accent1"/>
-          </a:lnRef>
-          <a:fillRef idx="3">
-            <a:schemeClr val="accent1"/>
-          </a:fillRef>
-          <a:effectRef idx="2">
-            <a:schemeClr val="accent1"/>
-          </a:effectRef>
-          <a:fontRef idx="minor">
-            <a:schemeClr val="lt1"/>
-          </a:fontRef>
-        </p:style>
-        <p:txBody>
-          <a:bodyPr rtlCol="0" anchor="ctr"/>
-          <a:lstStyle/>
-          <a:p>
-            <a:pPr algn="ctr"/>
-          </a:p>
-        </p:txBody>
-      </p:sp>
-      <p:sp>
-        <p:nvSpPr>
-          <p:cNvPr id="13" name="TextBox 12"/>
-          <p:cNvSpPr txBox="1"/>
-          <p:nvPr/>
-        </p:nvSpPr>
-        <p:spPr>
-          <a:xfrm>
-            <a:off x="4206240" y="1691640"/>
-            <a:ext cx="3566160" cy="365759"/>
-          </a:xfrm>
-          <a:prstGeom prst="rect">
-            <a:avLst/>
-          </a:prstGeom>
-          <a:noFill/>
-        </p:spPr>
-        <p:txBody>
-          <a:bodyPr wrap="square" lIns="73152" rIns="73152" tIns="54864" bIns="54864">
-            <a:spAutoFit/>
-          </a:bodyPr>
-          <a:lstStyle/>
-          <a:p>
-            <a:pPr algn="ctr">
-              <a:defRPr sz="1400" b="1">
-                <a:solidFill>
-                  <a:srgbClr val="FFFFFF"/>
-                </a:solidFill>
-                <a:latin typeface="Arial"/>
-              </a:defRPr>
-            </a:pPr>
-            <a:r>
-              <a:t>2. Khoa đi Đà Lạt</a:t>
-            </a:r>
-          </a:p>
-        </p:txBody>
-      </p:sp>
-      <p:pic>
-        <p:nvPicPr>
-          <p:cNvPr id="14" name="Picture 13" descr="sgk_lop5_bai3_khoi_dong.png"/>
-          <p:cNvPicPr>
-            <a:picLocks noChangeAspect="1"/>
-          </p:cNvPicPr>
-          <p:nvPr/>
-        </p:nvPicPr>
-        <p:blipFill>
-          <a:blip r:embed="rId2"/>
-          <a:stretch>
-            <a:fillRect/>
-          </a:stretch>
-        </p:blipFill>
-        <p:spPr>
-          <a:xfrm>
-            <a:off x="4343400" y="2148840"/>
-            <a:ext cx="3291840" cy="2103120"/>
-          </a:xfrm>
-          <a:prstGeom prst="rect">
-            <a:avLst/>
-          </a:prstGeom>
-        </p:spPr>
-      </p:pic>
-      <p:sp>
-        <p:nvSpPr>
-          <p:cNvPr id="15" name="TextBox 14"/>
-          <p:cNvSpPr txBox="1"/>
-          <p:nvPr/>
-        </p:nvSpPr>
-        <p:spPr>
-          <a:xfrm>
-            <a:off x="4343400" y="4343400"/>
-            <a:ext cx="3291840" cy="1188719"/>
-          </a:xfrm>
-          <a:prstGeom prst="rect">
-            <a:avLst/>
-          </a:prstGeom>
-          <a:noFill/>
-        </p:spPr>
-        <p:txBody>
-          <a:bodyPr wrap="square" lIns="73152" rIns="73152" tIns="54864" bIns="54864">
-            <a:spAutoFit/>
-          </a:bodyPr>
-          <a:lstStyle/>
-          <a:p>
-            <a:pPr algn="ctr">
-              <a:defRPr sz="1300" b="0">
-                <a:solidFill>
-                  <a:srgbClr val="0F172A"/>
-                </a:solidFill>
-                <a:latin typeface="Arial"/>
-              </a:defRPr>
-            </a:pPr>
-            <a:r>
-              <a:t>Đà Lạt nằm ở vùng cao nguyên, đêm se lạnh. Cần áo ấm, áo khoác gió...</a:t>
-            </a:r>
-          </a:p>
-        </p:txBody>
-      </p:sp>
-      <p:sp>
-        <p:nvSpPr>
-          <p:cNvPr id="16" name="Rounded Rectangle 15"/>
-          <p:cNvSpPr/>
-          <p:nvPr/>
-        </p:nvSpPr>
-        <p:spPr>
-          <a:xfrm>
-            <a:off x="8046720" y="1645920"/>
-            <a:ext cx="3566160" cy="3977639"/>
-          </a:xfrm>
-          <a:prstGeom prst="roundRect">
-            <a:avLst/>
-          </a:prstGeom>
-          <a:solidFill>
-            <a:srgbClr val="FFFFFF"/>
-          </a:solidFill>
-          <a:ln w="19050">
-            <a:solidFill>
-              <a:srgbClr val="EC4899"/>
-            </a:solidFill>
-          </a:ln>
-        </p:spPr>
-        <p:style>
-          <a:lnRef idx="1">
-            <a:schemeClr val="accent1"/>
-          </a:lnRef>
-          <a:fillRef idx="3">
-            <a:schemeClr val="accent1"/>
-          </a:fillRef>
-          <a:effectRef idx="2">
-            <a:schemeClr val="accent1"/>
-          </a:effectRef>
-          <a:fontRef idx="minor">
-            <a:schemeClr val="lt1"/>
-          </a:fontRef>
-        </p:style>
-        <p:txBody>
-          <a:bodyPr rtlCol="0" anchor="ctr"/>
-          <a:lstStyle/>
-          <a:p>
-            <a:pPr algn="ctr"/>
-          </a:p>
-        </p:txBody>
-      </p:sp>
-      <p:sp>
-        <p:nvSpPr>
-          <p:cNvPr id="17" name="Rounded Rectangle 16"/>
-          <p:cNvSpPr/>
-          <p:nvPr/>
-        </p:nvSpPr>
-        <p:spPr>
-          <a:xfrm>
-            <a:off x="8046720" y="1645920"/>
-            <a:ext cx="3566160" cy="411479"/>
-          </a:xfrm>
-          <a:prstGeom prst="roundRect">
-            <a:avLst/>
-          </a:prstGeom>
-          <a:solidFill>
-            <a:srgbClr val="BE185D"/>
-          </a:solidFill>
-          <a:ln>
-            <a:noFill/>
-          </a:ln>
-        </p:spPr>
-        <p:style>
-          <a:lnRef idx="1">
-            <a:schemeClr val="accent1"/>
-          </a:lnRef>
-          <a:fillRef idx="3">
-            <a:schemeClr val="accent1"/>
-          </a:fillRef>
-          <a:effectRef idx="2">
-            <a:schemeClr val="accent1"/>
-          </a:effectRef>
-          <a:fontRef idx="minor">
-            <a:schemeClr val="lt1"/>
-          </a:fontRef>
-        </p:style>
-        <p:txBody>
-          <a:bodyPr rtlCol="0" anchor="ctr"/>
-          <a:lstStyle/>
-          <a:p>
-            <a:pPr algn="ctr"/>
-          </a:p>
-        </p:txBody>
-      </p:sp>
-      <p:sp>
-        <p:nvSpPr>
-          <p:cNvPr id="18" name="TextBox 17"/>
-          <p:cNvSpPr txBox="1"/>
-          <p:nvPr/>
-        </p:nvSpPr>
-        <p:spPr>
-          <a:xfrm>
-            <a:off x="8046720" y="1691640"/>
-            <a:ext cx="3566160" cy="365759"/>
-          </a:xfrm>
-          <a:prstGeom prst="rect">
-            <a:avLst/>
-          </a:prstGeom>
-          <a:noFill/>
-        </p:spPr>
-        <p:txBody>
-          <a:bodyPr wrap="square" lIns="73152" rIns="73152" tIns="54864" bIns="54864">
-            <a:spAutoFit/>
-          </a:bodyPr>
-          <a:lstStyle/>
-          <a:p>
-            <a:pPr algn="ctr">
-              <a:defRPr sz="1400" b="1">
-                <a:solidFill>
-                  <a:srgbClr val="FFFFFF"/>
-                </a:solidFill>
-                <a:latin typeface="Arial"/>
-              </a:defRPr>
-            </a:pPr>
-            <a:r>
-              <a:t>3. Minh đi Úc</a:t>
-            </a:r>
-          </a:p>
-        </p:txBody>
-      </p:sp>
-      <p:pic>
-        <p:nvPicPr>
-          <p:cNvPr id="19" name="Picture 18" descr="sgk_lop5_bai3_khoi_dong.png"/>
-          <p:cNvPicPr>
-            <a:picLocks noChangeAspect="1"/>
-          </p:cNvPicPr>
-          <p:nvPr/>
-        </p:nvPicPr>
-        <p:blipFill>
-          <a:blip r:embed="rId2"/>
-          <a:stretch>
-            <a:fillRect/>
-          </a:stretch>
-        </p:blipFill>
-        <p:spPr>
-          <a:xfrm>
-            <a:off x="8183880" y="2148840"/>
-            <a:ext cx="3291840" cy="2103120"/>
-          </a:xfrm>
-          <a:prstGeom prst="rect">
-            <a:avLst/>
-          </a:prstGeom>
-        </p:spPr>
-      </p:pic>
-      <p:sp>
-        <p:nvSpPr>
-          <p:cNvPr id="20" name="TextBox 19"/>
-          <p:cNvSpPr txBox="1"/>
-          <p:nvPr/>
-        </p:nvSpPr>
-        <p:spPr>
-          <a:xfrm>
-            <a:off x="8183880" y="4343400"/>
-            <a:ext cx="3291840" cy="1188719"/>
-          </a:xfrm>
-          <a:prstGeom prst="rect">
-            <a:avLst/>
-          </a:prstGeom>
-          <a:noFill/>
-        </p:spPr>
-        <p:txBody>
-          <a:bodyPr wrap="square" lIns="73152" rIns="73152" tIns="54864" bIns="54864">
-            <a:spAutoFit/>
-          </a:bodyPr>
-          <a:lstStyle/>
-          <a:p>
-            <a:pPr algn="ctr">
-              <a:defRPr sz="1300" b="0">
-                <a:solidFill>
-                  <a:srgbClr val="0F172A"/>
-                </a:solidFill>
-                <a:latin typeface="Arial"/>
-              </a:defRPr>
-            </a:pPr>
-            <a:r>
-              <a:t>Nước Úc ở Nam bán cầu. Mùa hè Việt Nam là mùa đông ở Úc! Cần áo phao dày.</a:t>
+              <a:t>👉 An đi biển Nha Trang (nắng nóng), Khoa đi Đà Lạt (se lạnh), Minh đi Úc (mùa đông tuyết).</a:t>
+            </a:r>
+            <a:br/>
+            <a:r>
+              <a:t>Vì sao mỗi bạn phải chuẩn bị hành lý hoàn toàn khác nhau?</a:t>
             </a:r>
           </a:p>
         </p:txBody>
@@ -4541,7 +4187,7 @@
               </a:defRPr>
             </a:pPr>
             <a:r>
-              <a:t>HOẠT ĐỘNG KHÁM PHÁ</a:t>
+              <a:t>KIẾN THỨC CỐT LÕI</a:t>
             </a:r>
           </a:p>
         </p:txBody>
@@ -4591,7 +4237,7 @@
         <p:spPr>
           <a:xfrm>
             <a:off x="365760" y="1645920"/>
-            <a:ext cx="3840480" cy="3977639"/>
+            <a:ext cx="3566160" cy="3977639"/>
           </a:xfrm>
           <a:prstGeom prst="roundRect">
             <a:avLst/>
@@ -4601,7 +4247,7 @@
           </a:solidFill>
           <a:ln w="19050">
             <a:solidFill>
-              <a:srgbClr val="EC4899"/>
+              <a:srgbClr val="BE185D"/>
             </a:solidFill>
           </a:ln>
         </p:spPr>
@@ -4636,13 +4282,13 @@
         <p:spPr>
           <a:xfrm>
             <a:off x="365760" y="1645920"/>
-            <a:ext cx="164592" cy="3977639"/>
+            <a:ext cx="3566160" cy="457199"/>
           </a:xfrm>
           <a:prstGeom prst="roundRect">
             <a:avLst/>
           </a:prstGeom>
           <a:solidFill>
-            <a:srgbClr val="EC4899"/>
+            <a:srgbClr val="BE185D"/>
           </a:solidFill>
           <a:ln>
             <a:noFill/>
@@ -4678,8 +4324,8 @@
         </p:nvSpPr>
         <p:spPr>
           <a:xfrm>
-            <a:off x="640080" y="1783080"/>
-            <a:ext cx="3429000" cy="640080"/>
+            <a:off x="365760" y="1691640"/>
+            <a:ext cx="3566160" cy="411480"/>
           </a:xfrm>
           <a:prstGeom prst="rect">
             <a:avLst/>
@@ -4692,8 +4338,44 @@
           </a:bodyPr>
           <a:lstStyle/>
           <a:p>
+            <a:pPr algn="ctr">
+              <a:defRPr sz="1500" b="1">
+                <a:solidFill>
+                  <a:srgbClr val="FFFFFF"/>
+                </a:solidFill>
+                <a:latin typeface="Arial"/>
+              </a:defRPr>
+            </a:pPr>
+            <a:r>
+              <a:t>1. Hiểu rõ hoàn cảnh</a:t>
+            </a:r>
+          </a:p>
+        </p:txBody>
+      </p:sp>
+      <p:sp>
+        <p:nvSpPr>
+          <p:cNvPr id="9" name="TextBox 8"/>
+          <p:cNvSpPr txBox="1"/>
+          <p:nvPr/>
+        </p:nvSpPr>
+        <p:spPr>
+          <a:xfrm>
+            <a:off x="502920" y="2240280"/>
+            <a:ext cx="3291840" cy="594359"/>
+          </a:xfrm>
+          <a:prstGeom prst="rect">
+            <a:avLst/>
+          </a:prstGeom>
+          <a:noFill/>
+        </p:spPr>
+        <p:txBody>
+          <a:bodyPr wrap="square" lIns="73152" rIns="73152" tIns="54864" bIns="54864">
+            <a:spAutoFit/>
+          </a:bodyPr>
+          <a:lstStyle/>
+          <a:p>
             <a:pPr algn="l">
-              <a:defRPr sz="1500" b="1">
+              <a:defRPr sz="1400" b="0">
                 <a:solidFill>
                   <a:srgbClr val="0F172A"/>
                 </a:solidFill>
@@ -4701,21 +4383,21 @@
               </a:defRPr>
             </a:pPr>
             <a:r>
-              <a:t>• Thông tin giúp em hiểu rõ hoàn cảnh thực tế</a:t>
-            </a:r>
-          </a:p>
-        </p:txBody>
-      </p:sp>
-      <p:sp>
-        <p:nvSpPr>
-          <p:cNvPr id="9" name="TextBox 8"/>
+              <a:t>• Nắm bắt thời tiết thực tế</a:t>
+            </a:r>
+          </a:p>
+        </p:txBody>
+      </p:sp>
+      <p:sp>
+        <p:nvSpPr>
+          <p:cNvPr id="10" name="TextBox 9"/>
           <p:cNvSpPr txBox="1"/>
           <p:nvPr/>
         </p:nvSpPr>
         <p:spPr>
           <a:xfrm>
-            <a:off x="640080" y="2468880"/>
-            <a:ext cx="3429000" cy="640080"/>
+            <a:off x="502920" y="2880360"/>
+            <a:ext cx="3291840" cy="594359"/>
           </a:xfrm>
           <a:prstGeom prst="rect">
             <a:avLst/>
@@ -4729,7 +4411,7 @@
           <a:lstStyle/>
           <a:p>
             <a:pPr algn="l">
-              <a:defRPr sz="1500" b="1">
+              <a:defRPr sz="1400" b="0">
                 <a:solidFill>
                   <a:srgbClr val="0F172A"/>
                 </a:solidFill>
@@ -4737,21 +4419,21 @@
               </a:defRPr>
             </a:pPr>
             <a:r>
-              <a:t>• Lựa chọn đồ dùng, trang phục phù hợp</a:t>
-            </a:r>
-          </a:p>
-        </p:txBody>
-      </p:sp>
-      <p:sp>
-        <p:nvSpPr>
-          <p:cNvPr id="10" name="TextBox 9"/>
+              <a:t>• Biết địa điểm tham quan</a:t>
+            </a:r>
+          </a:p>
+        </p:txBody>
+      </p:sp>
+      <p:sp>
+        <p:nvSpPr>
+          <p:cNvPr id="11" name="TextBox 10"/>
           <p:cNvSpPr txBox="1"/>
           <p:nvPr/>
         </p:nvSpPr>
         <p:spPr>
           <a:xfrm>
-            <a:off x="640080" y="3154680"/>
-            <a:ext cx="3429000" cy="640080"/>
+            <a:off x="502920" y="3520440"/>
+            <a:ext cx="3291840" cy="594360"/>
           </a:xfrm>
           <a:prstGeom prst="rect">
             <a:avLst/>
@@ -4765,7 +4447,7 @@
           <a:lstStyle/>
           <a:p>
             <a:pPr algn="l">
-              <a:defRPr sz="1500" b="1">
+              <a:defRPr sz="1400" b="0">
                 <a:solidFill>
                   <a:srgbClr val="0F172A"/>
                 </a:solidFill>
@@ -4773,21 +4455,109 @@
               </a:defRPr>
             </a:pPr>
             <a:r>
-              <a:t>• Tránh gặp rủi ro thời tiết bất ngờ</a:t>
-            </a:r>
-          </a:p>
-        </p:txBody>
-      </p:sp>
-      <p:sp>
-        <p:nvSpPr>
-          <p:cNvPr id="11" name="TextBox 10"/>
+              <a:t>• Chuẩn bị trang phục đúng</a:t>
+            </a:r>
+          </a:p>
+        </p:txBody>
+      </p:sp>
+      <p:sp>
+        <p:nvSpPr>
+          <p:cNvPr id="12" name="Rounded Rectangle 11"/>
+          <p:cNvSpPr/>
+          <p:nvPr/>
+        </p:nvSpPr>
+        <p:spPr>
+          <a:xfrm>
+            <a:off x="4206240" y="1645920"/>
+            <a:ext cx="3566160" cy="3977639"/>
+          </a:xfrm>
+          <a:prstGeom prst="roundRect">
+            <a:avLst/>
+          </a:prstGeom>
+          <a:solidFill>
+            <a:srgbClr val="FFFFFF"/>
+          </a:solidFill>
+          <a:ln w="19050">
+            <a:solidFill>
+              <a:srgbClr val="0D9488"/>
+            </a:solidFill>
+          </a:ln>
+        </p:spPr>
+        <p:style>
+          <a:lnRef idx="1">
+            <a:schemeClr val="accent1"/>
+          </a:lnRef>
+          <a:fillRef idx="3">
+            <a:schemeClr val="accent1"/>
+          </a:fillRef>
+          <a:effectRef idx="2">
+            <a:schemeClr val="accent1"/>
+          </a:effectRef>
+          <a:fontRef idx="minor">
+            <a:schemeClr val="lt1"/>
+          </a:fontRef>
+        </p:style>
+        <p:txBody>
+          <a:bodyPr rtlCol="0" anchor="ctr"/>
+          <a:lstStyle/>
+          <a:p>
+            <a:pPr algn="ctr"/>
+          </a:p>
+        </p:txBody>
+      </p:sp>
+      <p:sp>
+        <p:nvSpPr>
+          <p:cNvPr id="13" name="Rounded Rectangle 12"/>
+          <p:cNvSpPr/>
+          <p:nvPr/>
+        </p:nvSpPr>
+        <p:spPr>
+          <a:xfrm>
+            <a:off x="4206240" y="1645920"/>
+            <a:ext cx="3566160" cy="457199"/>
+          </a:xfrm>
+          <a:prstGeom prst="roundRect">
+            <a:avLst/>
+          </a:prstGeom>
+          <a:solidFill>
+            <a:srgbClr val="0D9488"/>
+          </a:solidFill>
+          <a:ln>
+            <a:noFill/>
+          </a:ln>
+        </p:spPr>
+        <p:style>
+          <a:lnRef idx="1">
+            <a:schemeClr val="accent1"/>
+          </a:lnRef>
+          <a:fillRef idx="3">
+            <a:schemeClr val="accent1"/>
+          </a:fillRef>
+          <a:effectRef idx="2">
+            <a:schemeClr val="accent1"/>
+          </a:effectRef>
+          <a:fontRef idx="minor">
+            <a:schemeClr val="lt1"/>
+          </a:fontRef>
+        </p:style>
+        <p:txBody>
+          <a:bodyPr rtlCol="0" anchor="ctr"/>
+          <a:lstStyle/>
+          <a:p>
+            <a:pPr algn="ctr"/>
+          </a:p>
+        </p:txBody>
+      </p:sp>
+      <p:sp>
+        <p:nvSpPr>
+          <p:cNvPr id="14" name="TextBox 13"/>
           <p:cNvSpPr txBox="1"/>
           <p:nvPr/>
         </p:nvSpPr>
         <p:spPr>
           <a:xfrm>
-            <a:off x="640080" y="3840480"/>
-            <a:ext cx="3429000" cy="640080"/>
+            <a:off x="4206240" y="1691640"/>
+            <a:ext cx="3566160" cy="411480"/>
           </a:xfrm>
           <a:prstGeom prst="rect">
             <a:avLst/>
@@ -4800,8 +4570,44 @@
           </a:bodyPr>
           <a:lstStyle/>
           <a:p>
+            <a:pPr algn="ctr">
+              <a:defRPr sz="1500" b="1">
+                <a:solidFill>
+                  <a:srgbClr val="FFFFFF"/>
+                </a:solidFill>
+                <a:latin typeface="Arial"/>
+              </a:defRPr>
+            </a:pPr>
+            <a:r>
+              <a:t>2. Tránh rủi ro</a:t>
+            </a:r>
+          </a:p>
+        </p:txBody>
+      </p:sp>
+      <p:sp>
+        <p:nvSpPr>
+          <p:cNvPr id="15" name="TextBox 14"/>
+          <p:cNvSpPr txBox="1"/>
+          <p:nvPr/>
+        </p:nvSpPr>
+        <p:spPr>
+          <a:xfrm>
+            <a:off x="4343400" y="2240280"/>
+            <a:ext cx="3291840" cy="594359"/>
+          </a:xfrm>
+          <a:prstGeom prst="rect">
+            <a:avLst/>
+          </a:prstGeom>
+          <a:noFill/>
+        </p:spPr>
+        <p:txBody>
+          <a:bodyPr wrap="square" lIns="73152" rIns="73152" tIns="54864" bIns="54864">
+            <a:spAutoFit/>
+          </a:bodyPr>
+          <a:lstStyle/>
+          <a:p>
             <a:pPr algn="l">
-              <a:defRPr sz="1500" b="1">
+              <a:defRPr sz="1400" b="0">
                 <a:solidFill>
                   <a:srgbClr val="0F172A"/>
                 </a:solidFill>
@@ -4809,21 +4615,93 @@
               </a:defRPr>
             </a:pPr>
             <a:r>
-              <a:t>• Giúp giải quyết vấn đề thành công và hiệu quả</a:t>
-            </a:r>
-          </a:p>
-        </p:txBody>
-      </p:sp>
-      <p:sp>
-        <p:nvSpPr>
-          <p:cNvPr id="12" name="Rounded Rectangle 11"/>
+              <a:t>• Không bị cảm lạnh bất ngờ</a:t>
+            </a:r>
+          </a:p>
+        </p:txBody>
+      </p:sp>
+      <p:sp>
+        <p:nvSpPr>
+          <p:cNvPr id="16" name="TextBox 15"/>
+          <p:cNvSpPr txBox="1"/>
+          <p:nvPr/>
+        </p:nvSpPr>
+        <p:spPr>
+          <a:xfrm>
+            <a:off x="4343400" y="2880360"/>
+            <a:ext cx="3291840" cy="594359"/>
+          </a:xfrm>
+          <a:prstGeom prst="rect">
+            <a:avLst/>
+          </a:prstGeom>
+          <a:noFill/>
+        </p:spPr>
+        <p:txBody>
+          <a:bodyPr wrap="square" lIns="73152" rIns="73152" tIns="54864" bIns="54864">
+            <a:spAutoFit/>
+          </a:bodyPr>
+          <a:lstStyle/>
+          <a:p>
+            <a:pPr algn="l">
+              <a:defRPr sz="1400" b="0">
+                <a:solidFill>
+                  <a:srgbClr val="0F172A"/>
+                </a:solidFill>
+                <a:latin typeface="Arial"/>
+              </a:defRPr>
+            </a:pPr>
+            <a:r>
+              <a:t>• Tránh lãng phí hành lý</a:t>
+            </a:r>
+          </a:p>
+        </p:txBody>
+      </p:sp>
+      <p:sp>
+        <p:nvSpPr>
+          <p:cNvPr id="17" name="TextBox 16"/>
+          <p:cNvSpPr txBox="1"/>
+          <p:nvPr/>
+        </p:nvSpPr>
+        <p:spPr>
+          <a:xfrm>
+            <a:off x="4343400" y="3520440"/>
+            <a:ext cx="3291840" cy="594360"/>
+          </a:xfrm>
+          <a:prstGeom prst="rect">
+            <a:avLst/>
+          </a:prstGeom>
+          <a:noFill/>
+        </p:spPr>
+        <p:txBody>
+          <a:bodyPr wrap="square" lIns="73152" rIns="73152" tIns="54864" bIns="54864">
+            <a:spAutoFit/>
+          </a:bodyPr>
+          <a:lstStyle/>
+          <a:p>
+            <a:pPr algn="l">
+              <a:defRPr sz="1400" b="0">
+                <a:solidFill>
+                  <a:srgbClr val="0F172A"/>
+                </a:solidFill>
+                <a:latin typeface="Arial"/>
+              </a:defRPr>
+            </a:pPr>
+            <a:r>
+              <a:t>• Luôn chủ động mọi tình huống</a:t>
+            </a:r>
+          </a:p>
+        </p:txBody>
+      </p:sp>
+      <p:sp>
+        <p:nvSpPr>
+          <p:cNvPr id="18" name="Rounded Rectangle 17"/>
           <p:cNvSpPr/>
           <p:nvPr/>
         </p:nvSpPr>
         <p:spPr>
           <a:xfrm>
-            <a:off x="4480560" y="1645920"/>
-            <a:ext cx="7223760" cy="3977639"/>
+            <a:off x="8046720" y="1645920"/>
+            <a:ext cx="3566160" cy="3977639"/>
           </a:xfrm>
           <a:prstGeom prst="roundRect">
             <a:avLst/>
@@ -4833,7 +4711,7 @@
           </a:solidFill>
           <a:ln w="19050">
             <a:solidFill>
-              <a:srgbClr val="CBD5E1"/>
+              <a:srgbClr val="D97706"/>
             </a:solidFill>
           </a:ln>
         </p:spPr>
@@ -4859,30 +4737,193 @@
           </a:p>
         </p:txBody>
       </p:sp>
-      <p:pic>
-        <p:nvPicPr>
-          <p:cNvPr id="13" name="Picture 12" descr="sgk_lop5_bai3_cac_buoc_tim_kiem.png"/>
-          <p:cNvPicPr>
-            <a:picLocks noChangeAspect="1"/>
-          </p:cNvPicPr>
-          <p:nvPr/>
-        </p:nvPicPr>
-        <p:blipFill>
-          <a:blip r:embed="rId2"/>
-          <a:stretch>
-            <a:fillRect/>
-          </a:stretch>
-        </p:blipFill>
-        <p:spPr>
-          <a:xfrm>
-            <a:off x="4572000" y="1737360"/>
-            <a:ext cx="7040880" cy="3794760"/>
+      <p:sp>
+        <p:nvSpPr>
+          <p:cNvPr id="19" name="Rounded Rectangle 18"/>
+          <p:cNvSpPr/>
+          <p:nvPr/>
+        </p:nvSpPr>
+        <p:spPr>
+          <a:xfrm>
+            <a:off x="8046720" y="1645920"/>
+            <a:ext cx="3566160" cy="457199"/>
+          </a:xfrm>
+          <a:prstGeom prst="roundRect">
+            <a:avLst/>
+          </a:prstGeom>
+          <a:solidFill>
+            <a:srgbClr val="D97706"/>
+          </a:solidFill>
+          <a:ln>
+            <a:noFill/>
+          </a:ln>
+        </p:spPr>
+        <p:style>
+          <a:lnRef idx="1">
+            <a:schemeClr val="accent1"/>
+          </a:lnRef>
+          <a:fillRef idx="3">
+            <a:schemeClr val="accent1"/>
+          </a:fillRef>
+          <a:effectRef idx="2">
+            <a:schemeClr val="accent1"/>
+          </a:effectRef>
+          <a:fontRef idx="minor">
+            <a:schemeClr val="lt1"/>
+          </a:fontRef>
+        </p:style>
+        <p:txBody>
+          <a:bodyPr rtlCol="0" anchor="ctr"/>
+          <a:lstStyle/>
+          <a:p>
+            <a:pPr algn="ctr"/>
+          </a:p>
+        </p:txBody>
+      </p:sp>
+      <p:sp>
+        <p:nvSpPr>
+          <p:cNvPr id="20" name="TextBox 19"/>
+          <p:cNvSpPr txBox="1"/>
+          <p:nvPr/>
+        </p:nvSpPr>
+        <p:spPr>
+          <a:xfrm>
+            <a:off x="8046720" y="1691640"/>
+            <a:ext cx="3566160" cy="411480"/>
           </a:xfrm>
           <a:prstGeom prst="rect">
             <a:avLst/>
           </a:prstGeom>
-        </p:spPr>
-      </p:pic>
+          <a:noFill/>
+        </p:spPr>
+        <p:txBody>
+          <a:bodyPr wrap="square" lIns="73152" rIns="73152" tIns="54864" bIns="54864">
+            <a:spAutoFit/>
+          </a:bodyPr>
+          <a:lstStyle/>
+          <a:p>
+            <a:pPr algn="ctr">
+              <a:defRPr sz="1500" b="1">
+                <a:solidFill>
+                  <a:srgbClr val="FFFFFF"/>
+                </a:solidFill>
+                <a:latin typeface="Arial"/>
+              </a:defRPr>
+            </a:pPr>
+            <a:r>
+              <a:t>3. Giải quyết hiệu quả</a:t>
+            </a:r>
+          </a:p>
+        </p:txBody>
+      </p:sp>
+      <p:sp>
+        <p:nvSpPr>
+          <p:cNvPr id="21" name="TextBox 20"/>
+          <p:cNvSpPr txBox="1"/>
+          <p:nvPr/>
+        </p:nvSpPr>
+        <p:spPr>
+          <a:xfrm>
+            <a:off x="8183880" y="2240280"/>
+            <a:ext cx="3291840" cy="594359"/>
+          </a:xfrm>
+          <a:prstGeom prst="rect">
+            <a:avLst/>
+          </a:prstGeom>
+          <a:noFill/>
+        </p:spPr>
+        <p:txBody>
+          <a:bodyPr wrap="square" lIns="73152" rIns="73152" tIns="54864" bIns="54864">
+            <a:spAutoFit/>
+          </a:bodyPr>
+          <a:lstStyle/>
+          <a:p>
+            <a:pPr algn="l">
+              <a:defRPr sz="1400" b="0">
+                <a:solidFill>
+                  <a:srgbClr val="0F172A"/>
+                </a:solidFill>
+                <a:latin typeface="Arial"/>
+              </a:defRPr>
+            </a:pPr>
+            <a:r>
+              <a:t>• Đưa ra quyết định sáng suốt</a:t>
+            </a:r>
+          </a:p>
+        </p:txBody>
+      </p:sp>
+      <p:sp>
+        <p:nvSpPr>
+          <p:cNvPr id="22" name="TextBox 21"/>
+          <p:cNvSpPr txBox="1"/>
+          <p:nvPr/>
+        </p:nvSpPr>
+        <p:spPr>
+          <a:xfrm>
+            <a:off x="8183880" y="2880360"/>
+            <a:ext cx="3291840" cy="594359"/>
+          </a:xfrm>
+          <a:prstGeom prst="rect">
+            <a:avLst/>
+          </a:prstGeom>
+          <a:noFill/>
+        </p:spPr>
+        <p:txBody>
+          <a:bodyPr wrap="square" lIns="73152" rIns="73152" tIns="54864" bIns="54864">
+            <a:spAutoFit/>
+          </a:bodyPr>
+          <a:lstStyle/>
+          <a:p>
+            <a:pPr algn="l">
+              <a:defRPr sz="1400" b="0">
+                <a:solidFill>
+                  <a:srgbClr val="0F172A"/>
+                </a:solidFill>
+                <a:latin typeface="Arial"/>
+              </a:defRPr>
+            </a:pPr>
+            <a:r>
+              <a:t>• Chuyến đi an toàn, vui vẻ</a:t>
+            </a:r>
+          </a:p>
+        </p:txBody>
+      </p:sp>
+      <p:sp>
+        <p:nvSpPr>
+          <p:cNvPr id="23" name="TextBox 22"/>
+          <p:cNvSpPr txBox="1"/>
+          <p:nvPr/>
+        </p:nvSpPr>
+        <p:spPr>
+          <a:xfrm>
+            <a:off x="8183880" y="3520440"/>
+            <a:ext cx="3291840" cy="594360"/>
+          </a:xfrm>
+          <a:prstGeom prst="rect">
+            <a:avLst/>
+          </a:prstGeom>
+          <a:noFill/>
+        </p:spPr>
+        <p:txBody>
+          <a:bodyPr wrap="square" lIns="73152" rIns="73152" tIns="54864" bIns="54864">
+            <a:spAutoFit/>
+          </a:bodyPr>
+          <a:lstStyle/>
+          <a:p>
+            <a:pPr algn="l">
+              <a:defRPr sz="1400" b="0">
+                <a:solidFill>
+                  <a:srgbClr val="0F172A"/>
+                </a:solidFill>
+                <a:latin typeface="Arial"/>
+              </a:defRPr>
+            </a:pPr>
+            <a:r>
+              <a:t>• Tiết kiệm thời gian &amp; công sức</a:t>
+            </a:r>
+          </a:p>
+        </p:txBody>
+      </p:sp>
     </p:spTree>
   </p:cSld>
   <p:clrMapOvr>
@@ -5021,7 +5062,7 @@
               </a:defRPr>
             </a:pPr>
             <a:r>
-              <a:t>QUY TRÌNH &amp; THAO TÁC</a:t>
+              <a:t>HOẠT ĐỘNG KHÁM PHÁ</a:t>
             </a:r>
           </a:p>
         </p:txBody>
@@ -5057,30 +5098,32 @@
               </a:defRPr>
             </a:pPr>
             <a:r>
-              <a:t>Kỹ thuật sử dụng từ khóa tìm kiếm trên Internet</a:t>
-            </a:r>
-          </a:p>
-        </p:txBody>
-      </p:sp>
-      <p:sp>
-        <p:nvSpPr>
-          <p:cNvPr id="6" name="Chevron 5"/>
+              <a:t>Kỹ thuật sử dụng Từ khóa tìm kiếm thần kỳ</a:t>
+            </a:r>
+          </a:p>
+        </p:txBody>
+      </p:sp>
+      <p:sp>
+        <p:nvSpPr>
+          <p:cNvPr id="6" name="Rounded Rectangle 5"/>
           <p:cNvSpPr/>
           <p:nvPr/>
         </p:nvSpPr>
         <p:spPr>
           <a:xfrm>
             <a:off x="365760" y="1645920"/>
-            <a:ext cx="4754880" cy="868680"/>
-          </a:xfrm>
-          <a:prstGeom prst="chevron">
+            <a:ext cx="4023360" cy="3977639"/>
+          </a:xfrm>
+          <a:prstGeom prst="roundRect">
             <a:avLst/>
           </a:prstGeom>
           <a:solidFill>
-            <a:srgbClr val="BE185D"/>
+            <a:srgbClr val="FFFFFF"/>
           </a:solidFill>
-          <a:ln>
-            <a:noFill/>
+          <a:ln w="19050">
+            <a:solidFill>
+              <a:srgbClr val="EC4899"/>
+            </a:solidFill>
           </a:ln>
         </p:spPr>
         <p:style>
@@ -5107,52 +5150,16 @@
       </p:sp>
       <p:sp>
         <p:nvSpPr>
-          <p:cNvPr id="7" name="TextBox 6"/>
-          <p:cNvSpPr txBox="1"/>
-          <p:nvPr/>
-        </p:nvSpPr>
-        <p:spPr>
-          <a:xfrm>
-            <a:off x="640080" y="1719072"/>
-            <a:ext cx="4206240" cy="731520"/>
-          </a:xfrm>
-          <a:prstGeom prst="rect">
-            <a:avLst/>
-          </a:prstGeom>
-          <a:noFill/>
-        </p:spPr>
-        <p:txBody>
-          <a:bodyPr wrap="square" lIns="73152" rIns="73152" tIns="54864" bIns="54864">
-            <a:spAutoFit/>
-          </a:bodyPr>
-          <a:lstStyle/>
-          <a:p>
-            <a:pPr algn="l">
-              <a:defRPr sz="1400" b="1">
-                <a:solidFill>
-                  <a:srgbClr val="FFFFFF"/>
-                </a:solidFill>
-                <a:latin typeface="Arial"/>
-              </a:defRPr>
-            </a:pPr>
-            <a:r>
-              <a:t>1. Chọn từ khóa ngắn gọn, chính xác (Keyword)</a:t>
-            </a:r>
-          </a:p>
-        </p:txBody>
-      </p:sp>
-      <p:sp>
-        <p:nvSpPr>
-          <p:cNvPr id="8" name="Chevron 7"/>
+          <p:cNvPr id="7" name="Rounded Rectangle 6"/>
           <p:cNvSpPr/>
           <p:nvPr/>
         </p:nvSpPr>
         <p:spPr>
           <a:xfrm>
-            <a:off x="365760" y="2624328"/>
-            <a:ext cx="4754880" cy="868680"/>
-          </a:xfrm>
-          <a:prstGeom prst="chevron">
+            <a:off x="365760" y="1645920"/>
+            <a:ext cx="164592" cy="3977639"/>
+          </a:xfrm>
+          <a:prstGeom prst="roundRect">
             <a:avLst/>
           </a:prstGeom>
           <a:solidFill>
@@ -5186,14 +5193,14 @@
       </p:sp>
       <p:sp>
         <p:nvSpPr>
-          <p:cNvPr id="9" name="TextBox 8"/>
+          <p:cNvPr id="8" name="TextBox 7"/>
           <p:cNvSpPr txBox="1"/>
           <p:nvPr/>
         </p:nvSpPr>
         <p:spPr>
           <a:xfrm>
-            <a:off x="640080" y="2697480"/>
-            <a:ext cx="4206240" cy="731519"/>
+            <a:off x="640080" y="1783080"/>
+            <a:ext cx="3611880" cy="640080"/>
           </a:xfrm>
           <a:prstGeom prst="rect">
             <a:avLst/>
@@ -5207,72 +5214,29 @@
           <a:lstStyle/>
           <a:p>
             <a:pPr algn="l">
-              <a:defRPr sz="1400" b="1">
+              <a:defRPr sz="1500" b="1">
                 <a:solidFill>
-                  <a:srgbClr val="FFFFFF"/>
+                  <a:srgbClr val="0F172A"/>
                 </a:solidFill>
                 <a:latin typeface="Arial"/>
               </a:defRPr>
             </a:pPr>
             <a:r>
-              <a:t>2. Đặt từ khóa trong dấu ngoặc kép " " để tìm chuẩn xác</a:t>
-            </a:r>
-          </a:p>
-        </p:txBody>
-      </p:sp>
-      <p:sp>
-        <p:nvSpPr>
-          <p:cNvPr id="10" name="Chevron 9"/>
-          <p:cNvSpPr/>
-          <p:nvPr/>
-        </p:nvSpPr>
-        <p:spPr>
-          <a:xfrm>
-            <a:off x="365760" y="3602736"/>
-            <a:ext cx="4754880" cy="868679"/>
-          </a:xfrm>
-          <a:prstGeom prst="chevron">
-            <a:avLst/>
-          </a:prstGeom>
-          <a:solidFill>
-            <a:srgbClr val="0D9488"/>
-          </a:solidFill>
-          <a:ln>
-            <a:noFill/>
-          </a:ln>
-        </p:spPr>
-        <p:style>
-          <a:lnRef idx="1">
-            <a:schemeClr val="accent1"/>
-          </a:lnRef>
-          <a:fillRef idx="3">
-            <a:schemeClr val="accent1"/>
-          </a:fillRef>
-          <a:effectRef idx="2">
-            <a:schemeClr val="accent1"/>
-          </a:effectRef>
-          <a:fontRef idx="minor">
-            <a:schemeClr val="lt1"/>
-          </a:fontRef>
-        </p:style>
-        <p:txBody>
-          <a:bodyPr rtlCol="0" anchor="ctr"/>
-          <a:lstStyle/>
-          <a:p>
-            <a:pPr algn="ctr"/>
-          </a:p>
-        </p:txBody>
-      </p:sp>
-      <p:sp>
-        <p:nvSpPr>
-          <p:cNvPr id="11" name="TextBox 10"/>
+              <a:t>• Chọn từ khóa ngắn gọn, chính xác (Keyword)</a:t>
+            </a:r>
+          </a:p>
+        </p:txBody>
+      </p:sp>
+      <p:sp>
+        <p:nvSpPr>
+          <p:cNvPr id="9" name="TextBox 8"/>
           <p:cNvSpPr txBox="1"/>
           <p:nvPr/>
         </p:nvSpPr>
         <p:spPr>
           <a:xfrm>
-            <a:off x="640080" y="3675887"/>
-            <a:ext cx="4206240" cy="731519"/>
+            <a:off x="640080" y="2468880"/>
+            <a:ext cx="3611880" cy="640080"/>
           </a:xfrm>
           <a:prstGeom prst="rect">
             <a:avLst/>
@@ -5286,72 +5250,29 @@
           <a:lstStyle/>
           <a:p>
             <a:pPr algn="l">
-              <a:defRPr sz="1400" b="1">
+              <a:defRPr sz="1500" b="1">
                 <a:solidFill>
-                  <a:srgbClr val="FFFFFF"/>
+                  <a:srgbClr val="0F172A"/>
                 </a:solidFill>
                 <a:latin typeface="Arial"/>
               </a:defRPr>
             </a:pPr>
             <a:r>
-              <a:t>3. Chọn lọc từ website tin cậy (.gov.vn, .edu.vn)</a:t>
-            </a:r>
-          </a:p>
-        </p:txBody>
-      </p:sp>
-      <p:sp>
-        <p:nvSpPr>
-          <p:cNvPr id="12" name="Chevron 11"/>
-          <p:cNvSpPr/>
-          <p:nvPr/>
-        </p:nvSpPr>
-        <p:spPr>
-          <a:xfrm>
-            <a:off x="365760" y="4581144"/>
-            <a:ext cx="4754880" cy="868680"/>
-          </a:xfrm>
-          <a:prstGeom prst="chevron">
-            <a:avLst/>
-          </a:prstGeom>
-          <a:solidFill>
-            <a:srgbClr val="D97706"/>
-          </a:solidFill>
-          <a:ln>
-            <a:noFill/>
-          </a:ln>
-        </p:spPr>
-        <p:style>
-          <a:lnRef idx="1">
-            <a:schemeClr val="accent1"/>
-          </a:lnRef>
-          <a:fillRef idx="3">
-            <a:schemeClr val="accent1"/>
-          </a:fillRef>
-          <a:effectRef idx="2">
-            <a:schemeClr val="accent1"/>
-          </a:effectRef>
-          <a:fontRef idx="minor">
-            <a:schemeClr val="lt1"/>
-          </a:fontRef>
-        </p:style>
-        <p:txBody>
-          <a:bodyPr rtlCol="0" anchor="ctr"/>
-          <a:lstStyle/>
-          <a:p>
-            <a:pPr algn="ctr"/>
-          </a:p>
-        </p:txBody>
-      </p:sp>
-      <p:sp>
-        <p:nvSpPr>
-          <p:cNvPr id="13" name="TextBox 12"/>
+              <a:t>• Đặt từ khóa trong dấu ngoặc kép " "</a:t>
+            </a:r>
+          </a:p>
+        </p:txBody>
+      </p:sp>
+      <p:sp>
+        <p:nvSpPr>
+          <p:cNvPr id="10" name="TextBox 9"/>
           <p:cNvSpPr txBox="1"/>
           <p:nvPr/>
         </p:nvSpPr>
         <p:spPr>
           <a:xfrm>
-            <a:off x="640080" y="4654296"/>
-            <a:ext cx="4206240" cy="731519"/>
+            <a:off x="640080" y="3154680"/>
+            <a:ext cx="3611880" cy="640080"/>
           </a:xfrm>
           <a:prstGeom prst="rect">
             <a:avLst/>
@@ -5365,29 +5286,65 @@
           <a:lstStyle/>
           <a:p>
             <a:pPr algn="l">
-              <a:defRPr sz="1400" b="1">
+              <a:defRPr sz="1500" b="1">
                 <a:solidFill>
-                  <a:srgbClr val="FFFFFF"/>
+                  <a:srgbClr val="0F172A"/>
                 </a:solidFill>
                 <a:latin typeface="Arial"/>
               </a:defRPr>
             </a:pPr>
             <a:r>
-              <a:t>4. Đánh giá và tổng hợp thông tin trước khi áp dụng</a:t>
-            </a:r>
-          </a:p>
-        </p:txBody>
-      </p:sp>
-      <p:sp>
-        <p:nvSpPr>
-          <p:cNvPr id="14" name="Rounded Rectangle 13"/>
+              <a:t>• Ví dụ: "dự báo thời tiết Đà Lạt"</a:t>
+            </a:r>
+          </a:p>
+        </p:txBody>
+      </p:sp>
+      <p:sp>
+        <p:nvSpPr>
+          <p:cNvPr id="11" name="TextBox 10"/>
+          <p:cNvSpPr txBox="1"/>
+          <p:nvPr/>
+        </p:nvSpPr>
+        <p:spPr>
+          <a:xfrm>
+            <a:off x="640080" y="3840480"/>
+            <a:ext cx="3611880" cy="640080"/>
+          </a:xfrm>
+          <a:prstGeom prst="rect">
+            <a:avLst/>
+          </a:prstGeom>
+          <a:noFill/>
+        </p:spPr>
+        <p:txBody>
+          <a:bodyPr wrap="square" lIns="73152" rIns="73152" tIns="54864" bIns="54864">
+            <a:spAutoFit/>
+          </a:bodyPr>
+          <a:lstStyle/>
+          <a:p>
+            <a:pPr algn="l">
+              <a:defRPr sz="1500" b="1">
+                <a:solidFill>
+                  <a:srgbClr val="0F172A"/>
+                </a:solidFill>
+                <a:latin typeface="Arial"/>
+              </a:defRPr>
+            </a:pPr>
+            <a:r>
+              <a:t>• Máy tìm kiếm sẽ lọc chính xác cụm từ em cần!</a:t>
+            </a:r>
+          </a:p>
+        </p:txBody>
+      </p:sp>
+      <p:sp>
+        <p:nvSpPr>
+          <p:cNvPr id="12" name="Rounded Rectangle 11"/>
           <p:cNvSpPr/>
           <p:nvPr/>
         </p:nvSpPr>
         <p:spPr>
           <a:xfrm>
-            <a:off x="5394960" y="1645920"/>
-            <a:ext cx="6309360" cy="3977639"/>
+            <a:off x="4663440" y="1645920"/>
+            <a:ext cx="7040880" cy="3977639"/>
           </a:xfrm>
           <a:prstGeom prst="roundRect">
             <a:avLst/>
@@ -5425,7 +5382,7 @@
       </p:sp>
       <p:pic>
         <p:nvPicPr>
-          <p:cNvPr id="15" name="Picture 14" descr="sgk_lop5_bai3_thuc_hanh_search.png"/>
+          <p:cNvPr id="13" name="Picture 12" descr="ai_lop5_bai3_search.jpg"/>
           <p:cNvPicPr>
             <a:picLocks noChangeAspect="1"/>
           </p:cNvPicPr>
@@ -5439,8 +5396,8 @@
         </p:blipFill>
         <p:spPr>
           <a:xfrm>
-            <a:off x="5486400" y="1737360"/>
-            <a:ext cx="6126480" cy="3794760"/>
+            <a:off x="4754880" y="1737360"/>
+            <a:ext cx="6858000" cy="3794760"/>
           </a:xfrm>
           <a:prstGeom prst="rect">
             <a:avLst/>
@@ -5519,8 +5476,8 @@
         </p:nvSpPr>
         <p:spPr>
           <a:xfrm>
-            <a:off x="365760" y="1188720"/>
-            <a:ext cx="11247120" cy="822960"/>
+            <a:off x="365760" y="1143000"/>
+            <a:ext cx="2926080" cy="347471"/>
           </a:xfrm>
           <a:prstGeom prst="roundRect">
             <a:avLst/>
@@ -5562,8 +5519,8 @@
         </p:nvSpPr>
         <p:spPr>
           <a:xfrm>
-            <a:off x="640080" y="1234440"/>
-            <a:ext cx="10698480" cy="731520"/>
+            <a:off x="365760" y="1143000"/>
+            <a:ext cx="2926080" cy="347471"/>
           </a:xfrm>
           <a:prstGeom prst="rect">
             <a:avLst/>
@@ -5576,8 +5533,8 @@
           </a:bodyPr>
           <a:lstStyle/>
           <a:p>
-            <a:pPr algn="l">
-              <a:defRPr sz="1800" b="1">
+            <a:pPr algn="ctr">
+              <a:defRPr sz="1300" b="1">
                 <a:solidFill>
                   <a:srgbClr val="FFFFFF"/>
                 </a:solidFill>
@@ -5585,32 +5542,66 @@
               </a:defRPr>
             </a:pPr>
             <a:r>
-              <a:t>❓ Vì sao phải tìm kiếm thông tin trước khi giải quyết một vấn đề?</a:t>
-            </a:r>
-          </a:p>
-        </p:txBody>
-      </p:sp>
-      <p:sp>
-        <p:nvSpPr>
-          <p:cNvPr id="5" name="Rounded Rectangle 4"/>
+              <a:t>QUY TRÌNH &amp; THAO TÁC</a:t>
+            </a:r>
+          </a:p>
+        </p:txBody>
+      </p:sp>
+      <p:sp>
+        <p:nvSpPr>
+          <p:cNvPr id="5" name="TextBox 4"/>
+          <p:cNvSpPr txBox="1"/>
+          <p:nvPr/>
+        </p:nvSpPr>
+        <p:spPr>
+          <a:xfrm>
+            <a:off x="3474720" y="1115568"/>
+            <a:ext cx="8046720" cy="411479"/>
+          </a:xfrm>
+          <a:prstGeom prst="rect">
+            <a:avLst/>
+          </a:prstGeom>
+          <a:noFill/>
+        </p:spPr>
+        <p:txBody>
+          <a:bodyPr wrap="square" lIns="73152" rIns="73152" tIns="54864" bIns="54864">
+            <a:spAutoFit/>
+          </a:bodyPr>
+          <a:lstStyle/>
+          <a:p>
+            <a:pPr algn="l">
+              <a:defRPr sz="2100" b="1">
+                <a:solidFill>
+                  <a:srgbClr val="831843"/>
+                </a:solidFill>
+                <a:latin typeface="Arial"/>
+              </a:defRPr>
+            </a:pPr>
+            <a:r>
+              <a:t>Quy trình tìm kiếm và kiểm chứng thông tin</a:t>
+            </a:r>
+          </a:p>
+        </p:txBody>
+      </p:sp>
+      <p:sp>
+        <p:nvSpPr>
+          <p:cNvPr id="6" name="Chevron 5"/>
           <p:cNvSpPr/>
           <p:nvPr/>
         </p:nvSpPr>
         <p:spPr>
           <a:xfrm>
-            <a:off x="365760" y="2103120"/>
-            <a:ext cx="6400800" cy="2194559"/>
-          </a:xfrm>
-          <a:prstGeom prst="roundRect">
+            <a:off x="365760" y="1645920"/>
+            <a:ext cx="4754880" cy="868680"/>
+          </a:xfrm>
+          <a:prstGeom prst="chevron">
             <a:avLst/>
           </a:prstGeom>
           <a:solidFill>
-            <a:srgbClr val="FFFFFF"/>
+            <a:srgbClr val="BE185D"/>
           </a:solidFill>
-          <a:ln w="19050">
-            <a:solidFill>
-              <a:srgbClr val="EC4899"/>
-            </a:solidFill>
+          <a:ln>
+            <a:noFill/>
           </a:ln>
         </p:spPr>
         <p:style>
@@ -5637,16 +5628,52 @@
       </p:sp>
       <p:sp>
         <p:nvSpPr>
-          <p:cNvPr id="6" name="Rounded Rectangle 5"/>
+          <p:cNvPr id="7" name="TextBox 6"/>
+          <p:cNvSpPr txBox="1"/>
+          <p:nvPr/>
+        </p:nvSpPr>
+        <p:spPr>
+          <a:xfrm>
+            <a:off x="640080" y="1719072"/>
+            <a:ext cx="4206240" cy="731520"/>
+          </a:xfrm>
+          <a:prstGeom prst="rect">
+            <a:avLst/>
+          </a:prstGeom>
+          <a:noFill/>
+        </p:spPr>
+        <p:txBody>
+          <a:bodyPr wrap="square" lIns="73152" rIns="73152" tIns="54864" bIns="54864">
+            <a:spAutoFit/>
+          </a:bodyPr>
+          <a:lstStyle/>
+          <a:p>
+            <a:pPr algn="l">
+              <a:defRPr sz="1400" b="1">
+                <a:solidFill>
+                  <a:srgbClr val="FFFFFF"/>
+                </a:solidFill>
+                <a:latin typeface="Arial"/>
+              </a:defRPr>
+            </a:pPr>
+            <a:r>
+              <a:t>Bước 1: Xác định rõ thông tin cần tìm</a:t>
+            </a:r>
+          </a:p>
+        </p:txBody>
+      </p:sp>
+      <p:sp>
+        <p:nvSpPr>
+          <p:cNvPr id="8" name="Chevron 7"/>
           <p:cNvSpPr/>
           <p:nvPr/>
         </p:nvSpPr>
         <p:spPr>
           <a:xfrm>
-            <a:off x="365760" y="2103120"/>
-            <a:ext cx="164592" cy="2194559"/>
-          </a:xfrm>
-          <a:prstGeom prst="roundRect">
+            <a:off x="365760" y="2624328"/>
+            <a:ext cx="4754880" cy="868680"/>
+          </a:xfrm>
+          <a:prstGeom prst="chevron">
             <a:avLst/>
           </a:prstGeom>
           <a:solidFill>
@@ -5680,14 +5707,14 @@
       </p:sp>
       <p:sp>
         <p:nvSpPr>
-          <p:cNvPr id="7" name="TextBox 6"/>
+          <p:cNvPr id="9" name="TextBox 8"/>
           <p:cNvSpPr txBox="1"/>
           <p:nvPr/>
         </p:nvSpPr>
         <p:spPr>
           <a:xfrm>
-            <a:off x="640080" y="2240280"/>
-            <a:ext cx="5943600" cy="822959"/>
+            <a:off x="640080" y="2697480"/>
+            <a:ext cx="4206240" cy="731519"/>
           </a:xfrm>
           <a:prstGeom prst="rect">
             <a:avLst/>
@@ -5701,29 +5728,72 @@
           <a:lstStyle/>
           <a:p>
             <a:pPr algn="l">
-              <a:defRPr sz="1500" b="0">
+              <a:defRPr sz="1400" b="1">
                 <a:solidFill>
-                  <a:srgbClr val="0F172A"/>
+                  <a:srgbClr val="FFFFFF"/>
                 </a:solidFill>
                 <a:latin typeface="Arial"/>
               </a:defRPr>
             </a:pPr>
             <a:r>
-              <a:t>👉 Giúp nắm bắt đầy đủ dữ liệu thực tế và điều kiện liên quan.</a:t>
-            </a:r>
-          </a:p>
-        </p:txBody>
-      </p:sp>
-      <p:sp>
-        <p:nvSpPr>
-          <p:cNvPr id="8" name="TextBox 7"/>
+              <a:t>Bước 2: Chọn từ khóa phù hợp đặt trong " "</a:t>
+            </a:r>
+          </a:p>
+        </p:txBody>
+      </p:sp>
+      <p:sp>
+        <p:nvSpPr>
+          <p:cNvPr id="10" name="Chevron 9"/>
+          <p:cNvSpPr/>
+          <p:nvPr/>
+        </p:nvSpPr>
+        <p:spPr>
+          <a:xfrm>
+            <a:off x="365760" y="3602736"/>
+            <a:ext cx="4754880" cy="868679"/>
+          </a:xfrm>
+          <a:prstGeom prst="chevron">
+            <a:avLst/>
+          </a:prstGeom>
+          <a:solidFill>
+            <a:srgbClr val="0D9488"/>
+          </a:solidFill>
+          <a:ln>
+            <a:noFill/>
+          </a:ln>
+        </p:spPr>
+        <p:style>
+          <a:lnRef idx="1">
+            <a:schemeClr val="accent1"/>
+          </a:lnRef>
+          <a:fillRef idx="3">
+            <a:schemeClr val="accent1"/>
+          </a:fillRef>
+          <a:effectRef idx="2">
+            <a:schemeClr val="accent1"/>
+          </a:effectRef>
+          <a:fontRef idx="minor">
+            <a:schemeClr val="lt1"/>
+          </a:fontRef>
+        </p:style>
+        <p:txBody>
+          <a:bodyPr rtlCol="0" anchor="ctr"/>
+          <a:lstStyle/>
+          <a:p>
+            <a:pPr algn="ctr"/>
+          </a:p>
+        </p:txBody>
+      </p:sp>
+      <p:sp>
+        <p:nvSpPr>
+          <p:cNvPr id="11" name="TextBox 10"/>
           <p:cNvSpPr txBox="1"/>
           <p:nvPr/>
         </p:nvSpPr>
         <p:spPr>
           <a:xfrm>
-            <a:off x="640080" y="3200400"/>
-            <a:ext cx="5943600" cy="822960"/>
+            <a:off x="640080" y="3675887"/>
+            <a:ext cx="4206240" cy="731519"/>
           </a:xfrm>
           <a:prstGeom prst="rect">
             <a:avLst/>
@@ -5737,29 +5807,108 @@
           <a:lstStyle/>
           <a:p>
             <a:pPr algn="l">
-              <a:defRPr sz="1500" b="0">
+              <a:defRPr sz="1400" b="1">
                 <a:solidFill>
-                  <a:srgbClr val="0F172A"/>
+                  <a:srgbClr val="FFFFFF"/>
                 </a:solidFill>
                 <a:latin typeface="Arial"/>
               </a:defRPr>
             </a:pPr>
             <a:r>
-              <a:t>👉 Đưa ra quyết định chính xác, tiết kiệm thời gian và công sức.</a:t>
-            </a:r>
-          </a:p>
-        </p:txBody>
-      </p:sp>
-      <p:sp>
-        <p:nvSpPr>
-          <p:cNvPr id="9" name="Rounded Rectangle 8"/>
+              <a:t>Bước 3: Ưu tiên website uy tín (.gov.vn, .edu.vn)</a:t>
+            </a:r>
+          </a:p>
+        </p:txBody>
+      </p:sp>
+      <p:sp>
+        <p:nvSpPr>
+          <p:cNvPr id="12" name="Chevron 11"/>
           <p:cNvSpPr/>
           <p:nvPr/>
         </p:nvSpPr>
         <p:spPr>
           <a:xfrm>
-            <a:off x="6949440" y="2103120"/>
-            <a:ext cx="4663440" cy="2194559"/>
+            <a:off x="365760" y="4581144"/>
+            <a:ext cx="4754880" cy="868680"/>
+          </a:xfrm>
+          <a:prstGeom prst="chevron">
+            <a:avLst/>
+          </a:prstGeom>
+          <a:solidFill>
+            <a:srgbClr val="D97706"/>
+          </a:solidFill>
+          <a:ln>
+            <a:noFill/>
+          </a:ln>
+        </p:spPr>
+        <p:style>
+          <a:lnRef idx="1">
+            <a:schemeClr val="accent1"/>
+          </a:lnRef>
+          <a:fillRef idx="3">
+            <a:schemeClr val="accent1"/>
+          </a:fillRef>
+          <a:effectRef idx="2">
+            <a:schemeClr val="accent1"/>
+          </a:effectRef>
+          <a:fontRef idx="minor">
+            <a:schemeClr val="lt1"/>
+          </a:fontRef>
+        </p:style>
+        <p:txBody>
+          <a:bodyPr rtlCol="0" anchor="ctr"/>
+          <a:lstStyle/>
+          <a:p>
+            <a:pPr algn="ctr"/>
+          </a:p>
+        </p:txBody>
+      </p:sp>
+      <p:sp>
+        <p:nvSpPr>
+          <p:cNvPr id="13" name="TextBox 12"/>
+          <p:cNvSpPr txBox="1"/>
+          <p:nvPr/>
+        </p:nvSpPr>
+        <p:spPr>
+          <a:xfrm>
+            <a:off x="640080" y="4654296"/>
+            <a:ext cx="4206240" cy="731519"/>
+          </a:xfrm>
+          <a:prstGeom prst="rect">
+            <a:avLst/>
+          </a:prstGeom>
+          <a:noFill/>
+        </p:spPr>
+        <p:txBody>
+          <a:bodyPr wrap="square" lIns="73152" rIns="73152" tIns="54864" bIns="54864">
+            <a:spAutoFit/>
+          </a:bodyPr>
+          <a:lstStyle/>
+          <a:p>
+            <a:pPr algn="l">
+              <a:defRPr sz="1400" b="1">
+                <a:solidFill>
+                  <a:srgbClr val="FFFFFF"/>
+                </a:solidFill>
+                <a:latin typeface="Arial"/>
+              </a:defRPr>
+            </a:pPr>
+            <a:r>
+              <a:t>Bước 4: Tổng hợp &amp; áp dụng giải quyết vấn đề</a:t>
+            </a:r>
+          </a:p>
+        </p:txBody>
+      </p:sp>
+      <p:sp>
+        <p:nvSpPr>
+          <p:cNvPr id="14" name="Rounded Rectangle 13"/>
+          <p:cNvSpPr/>
+          <p:nvPr/>
+        </p:nvSpPr>
+        <p:spPr>
+          <a:xfrm>
+            <a:off x="5394960" y="1645920"/>
+            <a:ext cx="6309360" cy="3977639"/>
           </a:xfrm>
           <a:prstGeom prst="roundRect">
             <a:avLst/>
@@ -5797,7 +5946,7 @@
       </p:sp>
       <p:pic>
         <p:nvPicPr>
-          <p:cNvPr id="10" name="Picture 9" descr="sgk_lop5_bai3_cac_buoc_tim_kiem.png"/>
+          <p:cNvPr id="15" name="Picture 14" descr="ai_lop5_bai3_search.jpg"/>
           <p:cNvPicPr>
             <a:picLocks noChangeAspect="1"/>
           </p:cNvPicPr>
@@ -5811,129 +5960,14 @@
         </p:blipFill>
         <p:spPr>
           <a:xfrm>
-            <a:off x="7040880" y="2148840"/>
-            <a:ext cx="4480560" cy="2103120"/>
+            <a:off x="5486400" y="1737360"/>
+            <a:ext cx="6126480" cy="3794760"/>
           </a:xfrm>
           <a:prstGeom prst="rect">
             <a:avLst/>
           </a:prstGeom>
         </p:spPr>
       </p:pic>
-      <p:sp>
-        <p:nvSpPr>
-          <p:cNvPr id="11" name="Rounded Rectangle 10"/>
-          <p:cNvSpPr/>
-          <p:nvPr/>
-        </p:nvSpPr>
-        <p:spPr>
-          <a:xfrm>
-            <a:off x="365760" y="4434840"/>
-            <a:ext cx="11247120" cy="1188719"/>
-          </a:xfrm>
-          <a:prstGeom prst="roundRect">
-            <a:avLst/>
-          </a:prstGeom>
-          <a:solidFill>
-            <a:srgbClr val="EA580C"/>
-          </a:solidFill>
-          <a:ln>
-            <a:noFill/>
-          </a:ln>
-        </p:spPr>
-        <p:style>
-          <a:lnRef idx="1">
-            <a:schemeClr val="accent1"/>
-          </a:lnRef>
-          <a:fillRef idx="3">
-            <a:schemeClr val="accent1"/>
-          </a:fillRef>
-          <a:effectRef idx="2">
-            <a:schemeClr val="accent1"/>
-          </a:effectRef>
-          <a:fontRef idx="minor">
-            <a:schemeClr val="lt1"/>
-          </a:fontRef>
-        </p:style>
-        <p:txBody>
-          <a:bodyPr rtlCol="0" anchor="ctr"/>
-          <a:lstStyle/>
-          <a:p>
-            <a:pPr algn="ctr"/>
-          </a:p>
-        </p:txBody>
-      </p:sp>
-      <p:sp>
-        <p:nvSpPr>
-          <p:cNvPr id="12" name="TextBox 11"/>
-          <p:cNvSpPr txBox="1"/>
-          <p:nvPr/>
-        </p:nvSpPr>
-        <p:spPr>
-          <a:xfrm>
-            <a:off x="640080" y="4480560"/>
-            <a:ext cx="10698480" cy="320039"/>
-          </a:xfrm>
-          <a:prstGeom prst="rect">
-            <a:avLst/>
-          </a:prstGeom>
-          <a:noFill/>
-        </p:spPr>
-        <p:txBody>
-          <a:bodyPr wrap="square" lIns="73152" rIns="73152" tIns="54864" bIns="54864">
-            <a:spAutoFit/>
-          </a:bodyPr>
-          <a:lstStyle/>
-          <a:p>
-            <a:pPr algn="l">
-              <a:defRPr sz="1400" b="1">
-                <a:solidFill>
-                  <a:srgbClr val="FEF08A"/>
-                </a:solidFill>
-                <a:latin typeface="Arial"/>
-              </a:defRPr>
-            </a:pPr>
-            <a:r>
-              <a:t>📌 GHI NHỚ TRỌNG TÂM (SGK)</a:t>
-            </a:r>
-          </a:p>
-        </p:txBody>
-      </p:sp>
-      <p:sp>
-        <p:nvSpPr>
-          <p:cNvPr id="13" name="TextBox 12"/>
-          <p:cNvSpPr txBox="1"/>
-          <p:nvPr/>
-        </p:nvSpPr>
-        <p:spPr>
-          <a:xfrm>
-            <a:off x="640080" y="4800600"/>
-            <a:ext cx="10698480" cy="777239"/>
-          </a:xfrm>
-          <a:prstGeom prst="rect">
-            <a:avLst/>
-          </a:prstGeom>
-          <a:noFill/>
-        </p:spPr>
-        <p:txBody>
-          <a:bodyPr wrap="square" lIns="73152" rIns="73152" tIns="54864" bIns="54864">
-            <a:spAutoFit/>
-          </a:bodyPr>
-          <a:lstStyle/>
-          <a:p>
-            <a:pPr algn="l">
-              <a:defRPr sz="1600" b="1">
-                <a:solidFill>
-                  <a:srgbClr val="FFFFFF"/>
-                </a:solidFill>
-                <a:latin typeface="Arial"/>
-              </a:defRPr>
-            </a:pPr>
-            <a:r>
-              <a:t>Thu thập và tìm kiếm thông tin là bước đầu tiên cực kỳ quan trọng giúp em giải quyết mọi vấn đề một cách khoa học!</a:t>
-            </a:r>
-          </a:p>
-        </p:txBody>
-      </p:sp>
     </p:spTree>
   </p:cSld>
   <p:clrMapOvr>
@@ -6006,14 +6040,14 @@
         </p:nvSpPr>
         <p:spPr>
           <a:xfrm>
-            <a:off x="365760" y="1143000"/>
-            <a:ext cx="2926080" cy="347471"/>
+            <a:off x="365760" y="1188720"/>
+            <a:ext cx="11247120" cy="822960"/>
           </a:xfrm>
           <a:prstGeom prst="roundRect">
             <a:avLst/>
           </a:prstGeom>
           <a:solidFill>
-            <a:srgbClr val="EA580C"/>
+            <a:srgbClr val="BE185D"/>
           </a:solidFill>
           <a:ln>
             <a:noFill/>
@@ -6049,8 +6083,8 @@
         </p:nvSpPr>
         <p:spPr>
           <a:xfrm>
-            <a:off x="365760" y="1143000"/>
-            <a:ext cx="2926080" cy="347471"/>
+            <a:off x="640080" y="1234440"/>
+            <a:ext cx="10698480" cy="731520"/>
           </a:xfrm>
           <a:prstGeom prst="rect">
             <a:avLst/>
@@ -6063,8 +6097,8 @@
           </a:bodyPr>
           <a:lstStyle/>
           <a:p>
-            <a:pPr algn="ctr">
-              <a:defRPr sz="1300" b="1">
+            <a:pPr algn="l">
+              <a:defRPr sz="1800" b="1">
                 <a:solidFill>
                   <a:srgbClr val="FFFFFF"/>
                 </a:solidFill>
@@ -6072,7 +6106,7 @@
               </a:defRPr>
             </a:pPr>
             <a:r>
-              <a:t>LUYỆN TẬP NHANH</a:t>
+              <a:t>❓ Thu thập và tìm kiếm thông tin giúp ích gì cho em?</a:t>
             </a:r>
           </a:p>
         </p:txBody>
@@ -6085,8 +6119,8 @@
         </p:nvSpPr>
         <p:spPr>
           <a:xfrm>
-            <a:off x="365760" y="1600200"/>
-            <a:ext cx="11247120" cy="914400"/>
+            <a:off x="365760" y="2103120"/>
+            <a:ext cx="6400800" cy="2194559"/>
           </a:xfrm>
           <a:prstGeom prst="roundRect">
             <a:avLst/>
@@ -6096,7 +6130,7 @@
           </a:solidFill>
           <a:ln w="19050">
             <a:solidFill>
-              <a:srgbClr val="BE185D"/>
+              <a:srgbClr val="EC4899"/>
             </a:solidFill>
           </a:ln>
         </p:spPr>
@@ -6130,14 +6164,14 @@
         </p:nvSpPr>
         <p:spPr>
           <a:xfrm>
-            <a:off x="365760" y="1600200"/>
-            <a:ext cx="182880" cy="914400"/>
+            <a:off x="365760" y="2103120"/>
+            <a:ext cx="164592" cy="2194559"/>
           </a:xfrm>
           <a:prstGeom prst="roundRect">
             <a:avLst/>
           </a:prstGeom>
           <a:solidFill>
-            <a:srgbClr val="BE185D"/>
+            <a:srgbClr val="EC4899"/>
           </a:solidFill>
           <a:ln>
             <a:noFill/>
@@ -6173,8 +6207,8 @@
         </p:nvSpPr>
         <p:spPr>
           <a:xfrm>
-            <a:off x="640080" y="1691640"/>
-            <a:ext cx="10698480" cy="731520"/>
+            <a:off x="640080" y="2240280"/>
+            <a:ext cx="5943600" cy="822959"/>
           </a:xfrm>
           <a:prstGeom prst="rect">
             <a:avLst/>
@@ -6188,7 +6222,7 @@
           <a:lstStyle/>
           <a:p>
             <a:pPr algn="l">
-              <a:defRPr sz="1700" b="1">
+              <a:defRPr sz="1500" b="0">
                 <a:solidFill>
                   <a:srgbClr val="0F172A"/>
                 </a:solidFill>
@@ -6196,21 +6230,57 @@
               </a:defRPr>
             </a:pPr>
             <a:r>
-              <a:t>❓ Để tìm chính xác cụm từ 'dự báo thời tiết Đà Lạt', em nên gõ như thế nào?</a:t>
-            </a:r>
-          </a:p>
-        </p:txBody>
-      </p:sp>
-      <p:sp>
-        <p:nvSpPr>
-          <p:cNvPr id="8" name="Rounded Rectangle 7"/>
+              <a:t>👉 Giúp nắm bắt đầy đủ thông tin thực tế trước khi hành động.</a:t>
+            </a:r>
+          </a:p>
+        </p:txBody>
+      </p:sp>
+      <p:sp>
+        <p:nvSpPr>
+          <p:cNvPr id="8" name="TextBox 7"/>
+          <p:cNvSpPr txBox="1"/>
+          <p:nvPr/>
+        </p:nvSpPr>
+        <p:spPr>
+          <a:xfrm>
+            <a:off x="640080" y="3200400"/>
+            <a:ext cx="5943600" cy="822960"/>
+          </a:xfrm>
+          <a:prstGeom prst="rect">
+            <a:avLst/>
+          </a:prstGeom>
+          <a:noFill/>
+        </p:spPr>
+        <p:txBody>
+          <a:bodyPr wrap="square" lIns="73152" rIns="73152" tIns="54864" bIns="54864">
+            <a:spAutoFit/>
+          </a:bodyPr>
+          <a:lstStyle/>
+          <a:p>
+            <a:pPr algn="l">
+              <a:defRPr sz="1500" b="0">
+                <a:solidFill>
+                  <a:srgbClr val="0F172A"/>
+                </a:solidFill>
+                <a:latin typeface="Arial"/>
+              </a:defRPr>
+            </a:pPr>
+            <a:r>
+              <a:t>👉 Đưa ra quyết định thông minh, giải quyết vấn đề khoa học.</a:t>
+            </a:r>
+          </a:p>
+        </p:txBody>
+      </p:sp>
+      <p:sp>
+        <p:nvSpPr>
+          <p:cNvPr id="9" name="Rounded Rectangle 8"/>
           <p:cNvSpPr/>
           <p:nvPr/>
         </p:nvSpPr>
         <p:spPr>
           <a:xfrm>
-            <a:off x="365760" y="2651760"/>
-            <a:ext cx="5440680" cy="1325879"/>
+            <a:off x="6949440" y="2103120"/>
+            <a:ext cx="4663440" cy="2194559"/>
           </a:xfrm>
           <a:prstGeom prst="roundRect">
             <a:avLst/>
@@ -6246,22 +6316,46 @@
           </a:p>
         </p:txBody>
       </p:sp>
-      <p:sp>
-        <p:nvSpPr>
-          <p:cNvPr id="9" name="Oval 8"/>
+      <p:pic>
+        <p:nvPicPr>
+          <p:cNvPr id="10" name="Picture 9" descr="ai_lop5_bai3_travel.jpg"/>
+          <p:cNvPicPr>
+            <a:picLocks noChangeAspect="1"/>
+          </p:cNvPicPr>
+          <p:nvPr/>
+        </p:nvPicPr>
+        <p:blipFill>
+          <a:blip r:embed="rId2"/>
+          <a:stretch>
+            <a:fillRect/>
+          </a:stretch>
+        </p:blipFill>
+        <p:spPr>
+          <a:xfrm>
+            <a:off x="7040880" y="2148840"/>
+            <a:ext cx="4480560" cy="2103120"/>
+          </a:xfrm>
+          <a:prstGeom prst="rect">
+            <a:avLst/>
+          </a:prstGeom>
+        </p:spPr>
+      </p:pic>
+      <p:sp>
+        <p:nvSpPr>
+          <p:cNvPr id="11" name="Rounded Rectangle 10"/>
           <p:cNvSpPr/>
           <p:nvPr/>
         </p:nvSpPr>
         <p:spPr>
           <a:xfrm>
-            <a:off x="548640" y="2880360"/>
-            <a:ext cx="822960" cy="822959"/>
-          </a:xfrm>
-          <a:prstGeom prst="ellipse">
+            <a:off x="365760" y="4434840"/>
+            <a:ext cx="11247120" cy="1188719"/>
+          </a:xfrm>
+          <a:prstGeom prst="roundRect">
             <a:avLst/>
           </a:prstGeom>
           <a:solidFill>
-            <a:srgbClr val="BE185D"/>
+            <a:srgbClr val="EA580C"/>
           </a:solidFill>
           <a:ln>
             <a:noFill/>
@@ -6291,14 +6385,14 @@
       </p:sp>
       <p:sp>
         <p:nvSpPr>
-          <p:cNvPr id="10" name="TextBox 9"/>
+          <p:cNvPr id="12" name="TextBox 11"/>
           <p:cNvSpPr txBox="1"/>
           <p:nvPr/>
         </p:nvSpPr>
         <p:spPr>
           <a:xfrm>
-            <a:off x="548640" y="3063240"/>
-            <a:ext cx="822960" cy="457200"/>
+            <a:off x="640080" y="4480560"/>
+            <a:ext cx="10698480" cy="320039"/>
           </a:xfrm>
           <a:prstGeom prst="rect">
             <a:avLst/>
@@ -6311,8 +6405,44 @@
           </a:bodyPr>
           <a:lstStyle/>
           <a:p>
-            <a:pPr algn="ctr">
-              <a:defRPr sz="1800" b="1">
+            <a:pPr algn="l">
+              <a:defRPr sz="1400" b="1">
+                <a:solidFill>
+                  <a:srgbClr val="FEF08A"/>
+                </a:solidFill>
+                <a:latin typeface="Arial"/>
+              </a:defRPr>
+            </a:pPr>
+            <a:r>
+              <a:t>📌 GHI NHỚ TRỌNG TÂM (SGK)</a:t>
+            </a:r>
+          </a:p>
+        </p:txBody>
+      </p:sp>
+      <p:sp>
+        <p:nvSpPr>
+          <p:cNvPr id="13" name="TextBox 12"/>
+          <p:cNvSpPr txBox="1"/>
+          <p:nvPr/>
+        </p:nvSpPr>
+        <p:spPr>
+          <a:xfrm>
+            <a:off x="640080" y="4800600"/>
+            <a:ext cx="10698480" cy="777239"/>
+          </a:xfrm>
+          <a:prstGeom prst="rect">
+            <a:avLst/>
+          </a:prstGeom>
+          <a:noFill/>
+        </p:spPr>
+        <p:txBody>
+          <a:bodyPr wrap="square" lIns="73152" rIns="73152" tIns="54864" bIns="54864">
+            <a:spAutoFit/>
+          </a:bodyPr>
+          <a:lstStyle/>
+          <a:p>
+            <a:pPr algn="l">
+              <a:defRPr sz="1600" b="1">
                 <a:solidFill>
                   <a:srgbClr val="FFFFFF"/>
                 </a:solidFill>
@@ -6320,523 +6450,7 @@
               </a:defRPr>
             </a:pPr>
             <a:r>
-              <a:t>A.</a:t>
-            </a:r>
-          </a:p>
-        </p:txBody>
-      </p:sp>
-      <p:sp>
-        <p:nvSpPr>
-          <p:cNvPr id="11" name="TextBox 10"/>
-          <p:cNvSpPr txBox="1"/>
-          <p:nvPr/>
-        </p:nvSpPr>
-        <p:spPr>
-          <a:xfrm>
-            <a:off x="1508760" y="2880360"/>
-            <a:ext cx="4160520" cy="960119"/>
-          </a:xfrm>
-          <a:prstGeom prst="rect">
-            <a:avLst/>
-          </a:prstGeom>
-          <a:noFill/>
-        </p:spPr>
-        <p:txBody>
-          <a:bodyPr wrap="square" lIns="73152" rIns="73152" tIns="54864" bIns="54864">
-            <a:spAutoFit/>
-          </a:bodyPr>
-          <a:lstStyle/>
-          <a:p>
-            <a:pPr algn="l">
-              <a:defRPr sz="1500" b="0">
-                <a:solidFill>
-                  <a:srgbClr val="0F172A"/>
-                </a:solidFill>
-                <a:latin typeface="Arial"/>
-              </a:defRPr>
-            </a:pPr>
-            <a:r>
-              <a:t>"dự báo thời tiết Đà Lạt"</a:t>
-            </a:r>
-          </a:p>
-        </p:txBody>
-      </p:sp>
-      <p:sp>
-        <p:nvSpPr>
-          <p:cNvPr id="12" name="Rounded Rectangle 11"/>
-          <p:cNvSpPr/>
-          <p:nvPr/>
-        </p:nvSpPr>
-        <p:spPr>
-          <a:xfrm>
-            <a:off x="6172200" y="2651760"/>
-            <a:ext cx="5440680" cy="1325879"/>
-          </a:xfrm>
-          <a:prstGeom prst="roundRect">
-            <a:avLst/>
-          </a:prstGeom>
-          <a:solidFill>
-            <a:srgbClr val="FFFFFF"/>
-          </a:solidFill>
-          <a:ln w="19050">
-            <a:solidFill>
-              <a:srgbClr val="CBD5E1"/>
-            </a:solidFill>
-          </a:ln>
-        </p:spPr>
-        <p:style>
-          <a:lnRef idx="1">
-            <a:schemeClr val="accent1"/>
-          </a:lnRef>
-          <a:fillRef idx="3">
-            <a:schemeClr val="accent1"/>
-          </a:fillRef>
-          <a:effectRef idx="2">
-            <a:schemeClr val="accent1"/>
-          </a:effectRef>
-          <a:fontRef idx="minor">
-            <a:schemeClr val="lt1"/>
-          </a:fontRef>
-        </p:style>
-        <p:txBody>
-          <a:bodyPr rtlCol="0" anchor="ctr"/>
-          <a:lstStyle/>
-          <a:p>
-            <a:pPr algn="ctr"/>
-          </a:p>
-        </p:txBody>
-      </p:sp>
-      <p:sp>
-        <p:nvSpPr>
-          <p:cNvPr id="13" name="Oval 12"/>
-          <p:cNvSpPr/>
-          <p:nvPr/>
-        </p:nvSpPr>
-        <p:spPr>
-          <a:xfrm>
-            <a:off x="6355080" y="2880360"/>
-            <a:ext cx="822960" cy="822959"/>
-          </a:xfrm>
-          <a:prstGeom prst="ellipse">
-            <a:avLst/>
-          </a:prstGeom>
-          <a:solidFill>
-            <a:srgbClr val="0D9488"/>
-          </a:solidFill>
-          <a:ln>
-            <a:noFill/>
-          </a:ln>
-        </p:spPr>
-        <p:style>
-          <a:lnRef idx="1">
-            <a:schemeClr val="accent1"/>
-          </a:lnRef>
-          <a:fillRef idx="3">
-            <a:schemeClr val="accent1"/>
-          </a:fillRef>
-          <a:effectRef idx="2">
-            <a:schemeClr val="accent1"/>
-          </a:effectRef>
-          <a:fontRef idx="minor">
-            <a:schemeClr val="lt1"/>
-          </a:fontRef>
-        </p:style>
-        <p:txBody>
-          <a:bodyPr rtlCol="0" anchor="ctr"/>
-          <a:lstStyle/>
-          <a:p>
-            <a:pPr algn="ctr"/>
-          </a:p>
-        </p:txBody>
-      </p:sp>
-      <p:sp>
-        <p:nvSpPr>
-          <p:cNvPr id="14" name="TextBox 13"/>
-          <p:cNvSpPr txBox="1"/>
-          <p:nvPr/>
-        </p:nvSpPr>
-        <p:spPr>
-          <a:xfrm>
-            <a:off x="6355080" y="3063240"/>
-            <a:ext cx="822960" cy="457200"/>
-          </a:xfrm>
-          <a:prstGeom prst="rect">
-            <a:avLst/>
-          </a:prstGeom>
-          <a:noFill/>
-        </p:spPr>
-        <p:txBody>
-          <a:bodyPr wrap="square" lIns="73152" rIns="73152" tIns="54864" bIns="54864">
-            <a:spAutoFit/>
-          </a:bodyPr>
-          <a:lstStyle/>
-          <a:p>
-            <a:pPr algn="ctr">
-              <a:defRPr sz="1800" b="1">
-                <a:solidFill>
-                  <a:srgbClr val="FFFFFF"/>
-                </a:solidFill>
-                <a:latin typeface="Arial"/>
-              </a:defRPr>
-            </a:pPr>
-            <a:r>
-              <a:t>B.</a:t>
-            </a:r>
-          </a:p>
-        </p:txBody>
-      </p:sp>
-      <p:sp>
-        <p:nvSpPr>
-          <p:cNvPr id="15" name="TextBox 14"/>
-          <p:cNvSpPr txBox="1"/>
-          <p:nvPr/>
-        </p:nvSpPr>
-        <p:spPr>
-          <a:xfrm>
-            <a:off x="7315200" y="2880360"/>
-            <a:ext cx="4160520" cy="960119"/>
-          </a:xfrm>
-          <a:prstGeom prst="rect">
-            <a:avLst/>
-          </a:prstGeom>
-          <a:noFill/>
-        </p:spPr>
-        <p:txBody>
-          <a:bodyPr wrap="square" lIns="73152" rIns="73152" tIns="54864" bIns="54864">
-            <a:spAutoFit/>
-          </a:bodyPr>
-          <a:lstStyle/>
-          <a:p>
-            <a:pPr algn="l">
-              <a:defRPr sz="1500" b="0">
-                <a:solidFill>
-                  <a:srgbClr val="0F172A"/>
-                </a:solidFill>
-                <a:latin typeface="Arial"/>
-              </a:defRPr>
-            </a:pPr>
-            <a:r>
-              <a:t>thời tiết và mọi thứ ở Đà Lạt</a:t>
-            </a:r>
-          </a:p>
-        </p:txBody>
-      </p:sp>
-      <p:sp>
-        <p:nvSpPr>
-          <p:cNvPr id="16" name="Rounded Rectangle 15"/>
-          <p:cNvSpPr/>
-          <p:nvPr/>
-        </p:nvSpPr>
-        <p:spPr>
-          <a:xfrm>
-            <a:off x="365760" y="4114800"/>
-            <a:ext cx="5440680" cy="1325880"/>
-          </a:xfrm>
-          <a:prstGeom prst="roundRect">
-            <a:avLst/>
-          </a:prstGeom>
-          <a:solidFill>
-            <a:srgbClr val="FFFFFF"/>
-          </a:solidFill>
-          <a:ln w="19050">
-            <a:solidFill>
-              <a:srgbClr val="CBD5E1"/>
-            </a:solidFill>
-          </a:ln>
-        </p:spPr>
-        <p:style>
-          <a:lnRef idx="1">
-            <a:schemeClr val="accent1"/>
-          </a:lnRef>
-          <a:fillRef idx="3">
-            <a:schemeClr val="accent1"/>
-          </a:fillRef>
-          <a:effectRef idx="2">
-            <a:schemeClr val="accent1"/>
-          </a:effectRef>
-          <a:fontRef idx="minor">
-            <a:schemeClr val="lt1"/>
-          </a:fontRef>
-        </p:style>
-        <p:txBody>
-          <a:bodyPr rtlCol="0" anchor="ctr"/>
-          <a:lstStyle/>
-          <a:p>
-            <a:pPr algn="ctr"/>
-          </a:p>
-        </p:txBody>
-      </p:sp>
-      <p:sp>
-        <p:nvSpPr>
-          <p:cNvPr id="17" name="Oval 16"/>
-          <p:cNvSpPr/>
-          <p:nvPr/>
-        </p:nvSpPr>
-        <p:spPr>
-          <a:xfrm>
-            <a:off x="548640" y="4343400"/>
-            <a:ext cx="822960" cy="822960"/>
-          </a:xfrm>
-          <a:prstGeom prst="ellipse">
-            <a:avLst/>
-          </a:prstGeom>
-          <a:solidFill>
-            <a:srgbClr val="D97706"/>
-          </a:solidFill>
-          <a:ln>
-            <a:noFill/>
-          </a:ln>
-        </p:spPr>
-        <p:style>
-          <a:lnRef idx="1">
-            <a:schemeClr val="accent1"/>
-          </a:lnRef>
-          <a:fillRef idx="3">
-            <a:schemeClr val="accent1"/>
-          </a:fillRef>
-          <a:effectRef idx="2">
-            <a:schemeClr val="accent1"/>
-          </a:effectRef>
-          <a:fontRef idx="minor">
-            <a:schemeClr val="lt1"/>
-          </a:fontRef>
-        </p:style>
-        <p:txBody>
-          <a:bodyPr rtlCol="0" anchor="ctr"/>
-          <a:lstStyle/>
-          <a:p>
-            <a:pPr algn="ctr"/>
-          </a:p>
-        </p:txBody>
-      </p:sp>
-      <p:sp>
-        <p:nvSpPr>
-          <p:cNvPr id="18" name="TextBox 17"/>
-          <p:cNvSpPr txBox="1"/>
-          <p:nvPr/>
-        </p:nvSpPr>
-        <p:spPr>
-          <a:xfrm>
-            <a:off x="548640" y="4526280"/>
-            <a:ext cx="822960" cy="457200"/>
-          </a:xfrm>
-          <a:prstGeom prst="rect">
-            <a:avLst/>
-          </a:prstGeom>
-          <a:noFill/>
-        </p:spPr>
-        <p:txBody>
-          <a:bodyPr wrap="square" lIns="73152" rIns="73152" tIns="54864" bIns="54864">
-            <a:spAutoFit/>
-          </a:bodyPr>
-          <a:lstStyle/>
-          <a:p>
-            <a:pPr algn="ctr">
-              <a:defRPr sz="1800" b="1">
-                <a:solidFill>
-                  <a:srgbClr val="FFFFFF"/>
-                </a:solidFill>
-                <a:latin typeface="Arial"/>
-              </a:defRPr>
-            </a:pPr>
-            <a:r>
-              <a:t>C.</a:t>
-            </a:r>
-          </a:p>
-        </p:txBody>
-      </p:sp>
-      <p:sp>
-        <p:nvSpPr>
-          <p:cNvPr id="19" name="TextBox 18"/>
-          <p:cNvSpPr txBox="1"/>
-          <p:nvPr/>
-        </p:nvSpPr>
-        <p:spPr>
-          <a:xfrm>
-            <a:off x="1508760" y="4343400"/>
-            <a:ext cx="4160520" cy="960119"/>
-          </a:xfrm>
-          <a:prstGeom prst="rect">
-            <a:avLst/>
-          </a:prstGeom>
-          <a:noFill/>
-        </p:spPr>
-        <p:txBody>
-          <a:bodyPr wrap="square" lIns="73152" rIns="73152" tIns="54864" bIns="54864">
-            <a:spAutoFit/>
-          </a:bodyPr>
-          <a:lstStyle/>
-          <a:p>
-            <a:pPr algn="l">
-              <a:defRPr sz="1500" b="0">
-                <a:solidFill>
-                  <a:srgbClr val="0F172A"/>
-                </a:solidFill>
-                <a:latin typeface="Arial"/>
-              </a:defRPr>
-            </a:pPr>
-            <a:r>
-              <a:t>tìm cho tôi thời tiết</a:t>
-            </a:r>
-          </a:p>
-        </p:txBody>
-      </p:sp>
-      <p:sp>
-        <p:nvSpPr>
-          <p:cNvPr id="20" name="Rounded Rectangle 19"/>
-          <p:cNvSpPr/>
-          <p:nvPr/>
-        </p:nvSpPr>
-        <p:spPr>
-          <a:xfrm>
-            <a:off x="6172200" y="4114800"/>
-            <a:ext cx="5440680" cy="1325880"/>
-          </a:xfrm>
-          <a:prstGeom prst="roundRect">
-            <a:avLst/>
-          </a:prstGeom>
-          <a:solidFill>
-            <a:srgbClr val="FFFFFF"/>
-          </a:solidFill>
-          <a:ln w="19050">
-            <a:solidFill>
-              <a:srgbClr val="CBD5E1"/>
-            </a:solidFill>
-          </a:ln>
-        </p:spPr>
-        <p:style>
-          <a:lnRef idx="1">
-            <a:schemeClr val="accent1"/>
-          </a:lnRef>
-          <a:fillRef idx="3">
-            <a:schemeClr val="accent1"/>
-          </a:fillRef>
-          <a:effectRef idx="2">
-            <a:schemeClr val="accent1"/>
-          </a:effectRef>
-          <a:fontRef idx="minor">
-            <a:schemeClr val="lt1"/>
-          </a:fontRef>
-        </p:style>
-        <p:txBody>
-          <a:bodyPr rtlCol="0" anchor="ctr"/>
-          <a:lstStyle/>
-          <a:p>
-            <a:pPr algn="ctr"/>
-          </a:p>
-        </p:txBody>
-      </p:sp>
-      <p:sp>
-        <p:nvSpPr>
-          <p:cNvPr id="21" name="Oval 20"/>
-          <p:cNvSpPr/>
-          <p:nvPr/>
-        </p:nvSpPr>
-        <p:spPr>
-          <a:xfrm>
-            <a:off x="6355080" y="4343400"/>
-            <a:ext cx="822960" cy="822960"/>
-          </a:xfrm>
-          <a:prstGeom prst="ellipse">
-            <a:avLst/>
-          </a:prstGeom>
-          <a:solidFill>
-            <a:srgbClr val="7C3AED"/>
-          </a:solidFill>
-          <a:ln>
-            <a:noFill/>
-          </a:ln>
-        </p:spPr>
-        <p:style>
-          <a:lnRef idx="1">
-            <a:schemeClr val="accent1"/>
-          </a:lnRef>
-          <a:fillRef idx="3">
-            <a:schemeClr val="accent1"/>
-          </a:fillRef>
-          <a:effectRef idx="2">
-            <a:schemeClr val="accent1"/>
-          </a:effectRef>
-          <a:fontRef idx="minor">
-            <a:schemeClr val="lt1"/>
-          </a:fontRef>
-        </p:style>
-        <p:txBody>
-          <a:bodyPr rtlCol="0" anchor="ctr"/>
-          <a:lstStyle/>
-          <a:p>
-            <a:pPr algn="ctr"/>
-          </a:p>
-        </p:txBody>
-      </p:sp>
-      <p:sp>
-        <p:nvSpPr>
-          <p:cNvPr id="22" name="TextBox 21"/>
-          <p:cNvSpPr txBox="1"/>
-          <p:nvPr/>
-        </p:nvSpPr>
-        <p:spPr>
-          <a:xfrm>
-            <a:off x="6355080" y="4526280"/>
-            <a:ext cx="822960" cy="457200"/>
-          </a:xfrm>
-          <a:prstGeom prst="rect">
-            <a:avLst/>
-          </a:prstGeom>
-          <a:noFill/>
-        </p:spPr>
-        <p:txBody>
-          <a:bodyPr wrap="square" lIns="73152" rIns="73152" tIns="54864" bIns="54864">
-            <a:spAutoFit/>
-          </a:bodyPr>
-          <a:lstStyle/>
-          <a:p>
-            <a:pPr algn="ctr">
-              <a:defRPr sz="1800" b="1">
-                <a:solidFill>
-                  <a:srgbClr val="FFFFFF"/>
-                </a:solidFill>
-                <a:latin typeface="Arial"/>
-              </a:defRPr>
-            </a:pPr>
-            <a:r>
-              <a:t>D.</a:t>
-            </a:r>
-          </a:p>
-        </p:txBody>
-      </p:sp>
-      <p:sp>
-        <p:nvSpPr>
-          <p:cNvPr id="23" name="TextBox 22"/>
-          <p:cNvSpPr txBox="1"/>
-          <p:nvPr/>
-        </p:nvSpPr>
-        <p:spPr>
-          <a:xfrm>
-            <a:off x="7315200" y="4343400"/>
-            <a:ext cx="4160520" cy="960119"/>
-          </a:xfrm>
-          <a:prstGeom prst="rect">
-            <a:avLst/>
-          </a:prstGeom>
-          <a:noFill/>
-        </p:spPr>
-        <p:txBody>
-          <a:bodyPr wrap="square" lIns="73152" rIns="73152" tIns="54864" bIns="54864">
-            <a:spAutoFit/>
-          </a:bodyPr>
-          <a:lstStyle/>
-          <a:p>
-            <a:pPr algn="l">
-              <a:defRPr sz="1500" b="0">
-                <a:solidFill>
-                  <a:srgbClr val="0F172A"/>
-                </a:solidFill>
-                <a:latin typeface="Arial"/>
-              </a:defRPr>
-            </a:pPr>
-            <a:r>
-              <a:t>da lat hom nay the nao</a:t>
+              <a:t>Thu thập và tìm kiếm thông tin là bước đầu tiên cực kỳ quan trọng giúp em giải quyết mọi vấn đề một cách tự tin và hiệu quả!</a:t>
             </a:r>
           </a:p>
         </p:txBody>
@@ -6853,6 +6467,913 @@
 </file>
 
 <file path=ppt/slides/slide7.xml><?xml version="1.0" encoding="utf-8"?>
+<p:sld xmlns:a="http://schemas.openxmlformats.org/drawingml/2006/main" xmlns:p="http://schemas.openxmlformats.org/presentationml/2006/main" xmlns:r="http://schemas.openxmlformats.org/officeDocument/2006/relationships">
+  <p:cSld>
+    <p:spTree>
+      <p:nvGrpSpPr>
+        <p:cNvPr id="1" name=""/>
+        <p:cNvGrpSpPr/>
+        <p:nvPr/>
+      </p:nvGrpSpPr>
+      <p:grpSpPr/>
+      <p:sp>
+        <p:nvSpPr>
+          <p:cNvPr id="2" name="Rectangle 1"/>
+          <p:cNvSpPr/>
+          <p:nvPr/>
+        </p:nvSpPr>
+        <p:spPr>
+          <a:xfrm>
+            <a:off x="0" y="1051560"/>
+            <a:ext cx="12188952" cy="4754879"/>
+          </a:xfrm>
+          <a:prstGeom prst="rect">
+            <a:avLst/>
+          </a:prstGeom>
+          <a:solidFill>
+            <a:srgbClr val="FDF2F8"/>
+          </a:solidFill>
+          <a:ln>
+            <a:noFill/>
+          </a:ln>
+        </p:spPr>
+        <p:style>
+          <a:lnRef idx="1">
+            <a:schemeClr val="accent1"/>
+          </a:lnRef>
+          <a:fillRef idx="3">
+            <a:schemeClr val="accent1"/>
+          </a:fillRef>
+          <a:effectRef idx="2">
+            <a:schemeClr val="accent1"/>
+          </a:effectRef>
+          <a:fontRef idx="minor">
+            <a:schemeClr val="lt1"/>
+          </a:fontRef>
+        </p:style>
+        <p:txBody>
+          <a:bodyPr rtlCol="0" anchor="ctr"/>
+          <a:lstStyle/>
+          <a:p>
+            <a:pPr algn="ctr"/>
+          </a:p>
+        </p:txBody>
+      </p:sp>
+      <p:sp>
+        <p:nvSpPr>
+          <p:cNvPr id="3" name="Rounded Rectangle 2"/>
+          <p:cNvSpPr/>
+          <p:nvPr/>
+        </p:nvSpPr>
+        <p:spPr>
+          <a:xfrm>
+            <a:off x="365760" y="1143000"/>
+            <a:ext cx="2926080" cy="347471"/>
+          </a:xfrm>
+          <a:prstGeom prst="roundRect">
+            <a:avLst/>
+          </a:prstGeom>
+          <a:solidFill>
+            <a:srgbClr val="EA580C"/>
+          </a:solidFill>
+          <a:ln>
+            <a:noFill/>
+          </a:ln>
+        </p:spPr>
+        <p:style>
+          <a:lnRef idx="1">
+            <a:schemeClr val="accent1"/>
+          </a:lnRef>
+          <a:fillRef idx="3">
+            <a:schemeClr val="accent1"/>
+          </a:fillRef>
+          <a:effectRef idx="2">
+            <a:schemeClr val="accent1"/>
+          </a:effectRef>
+          <a:fontRef idx="minor">
+            <a:schemeClr val="lt1"/>
+          </a:fontRef>
+        </p:style>
+        <p:txBody>
+          <a:bodyPr rtlCol="0" anchor="ctr"/>
+          <a:lstStyle/>
+          <a:p>
+            <a:pPr algn="ctr"/>
+          </a:p>
+        </p:txBody>
+      </p:sp>
+      <p:sp>
+        <p:nvSpPr>
+          <p:cNvPr id="4" name="TextBox 3"/>
+          <p:cNvSpPr txBox="1"/>
+          <p:nvPr/>
+        </p:nvSpPr>
+        <p:spPr>
+          <a:xfrm>
+            <a:off x="365760" y="1143000"/>
+            <a:ext cx="2926080" cy="347471"/>
+          </a:xfrm>
+          <a:prstGeom prst="rect">
+            <a:avLst/>
+          </a:prstGeom>
+          <a:noFill/>
+        </p:spPr>
+        <p:txBody>
+          <a:bodyPr wrap="square" lIns="73152" rIns="73152" tIns="54864" bIns="54864">
+            <a:spAutoFit/>
+          </a:bodyPr>
+          <a:lstStyle/>
+          <a:p>
+            <a:pPr algn="ctr">
+              <a:defRPr sz="1300" b="1">
+                <a:solidFill>
+                  <a:srgbClr val="FFFFFF"/>
+                </a:solidFill>
+                <a:latin typeface="Arial"/>
+              </a:defRPr>
+            </a:pPr>
+            <a:r>
+              <a:t>LUYỆN TẬP NHANH</a:t>
+            </a:r>
+          </a:p>
+        </p:txBody>
+      </p:sp>
+      <p:sp>
+        <p:nvSpPr>
+          <p:cNvPr id="5" name="Rounded Rectangle 4"/>
+          <p:cNvSpPr/>
+          <p:nvPr/>
+        </p:nvSpPr>
+        <p:spPr>
+          <a:xfrm>
+            <a:off x="365760" y="1600200"/>
+            <a:ext cx="11247120" cy="914400"/>
+          </a:xfrm>
+          <a:prstGeom prst="roundRect">
+            <a:avLst/>
+          </a:prstGeom>
+          <a:solidFill>
+            <a:srgbClr val="FFFFFF"/>
+          </a:solidFill>
+          <a:ln w="19050">
+            <a:solidFill>
+              <a:srgbClr val="BE185D"/>
+            </a:solidFill>
+          </a:ln>
+        </p:spPr>
+        <p:style>
+          <a:lnRef idx="1">
+            <a:schemeClr val="accent1"/>
+          </a:lnRef>
+          <a:fillRef idx="3">
+            <a:schemeClr val="accent1"/>
+          </a:fillRef>
+          <a:effectRef idx="2">
+            <a:schemeClr val="accent1"/>
+          </a:effectRef>
+          <a:fontRef idx="minor">
+            <a:schemeClr val="lt1"/>
+          </a:fontRef>
+        </p:style>
+        <p:txBody>
+          <a:bodyPr rtlCol="0" anchor="ctr"/>
+          <a:lstStyle/>
+          <a:p>
+            <a:pPr algn="ctr"/>
+          </a:p>
+        </p:txBody>
+      </p:sp>
+      <p:sp>
+        <p:nvSpPr>
+          <p:cNvPr id="6" name="Rounded Rectangle 5"/>
+          <p:cNvSpPr/>
+          <p:nvPr/>
+        </p:nvSpPr>
+        <p:spPr>
+          <a:xfrm>
+            <a:off x="365760" y="1600200"/>
+            <a:ext cx="182880" cy="914400"/>
+          </a:xfrm>
+          <a:prstGeom prst="roundRect">
+            <a:avLst/>
+          </a:prstGeom>
+          <a:solidFill>
+            <a:srgbClr val="BE185D"/>
+          </a:solidFill>
+          <a:ln>
+            <a:noFill/>
+          </a:ln>
+        </p:spPr>
+        <p:style>
+          <a:lnRef idx="1">
+            <a:schemeClr val="accent1"/>
+          </a:lnRef>
+          <a:fillRef idx="3">
+            <a:schemeClr val="accent1"/>
+          </a:fillRef>
+          <a:effectRef idx="2">
+            <a:schemeClr val="accent1"/>
+          </a:effectRef>
+          <a:fontRef idx="minor">
+            <a:schemeClr val="lt1"/>
+          </a:fontRef>
+        </p:style>
+        <p:txBody>
+          <a:bodyPr rtlCol="0" anchor="ctr"/>
+          <a:lstStyle/>
+          <a:p>
+            <a:pPr algn="ctr"/>
+          </a:p>
+        </p:txBody>
+      </p:sp>
+      <p:sp>
+        <p:nvSpPr>
+          <p:cNvPr id="7" name="TextBox 6"/>
+          <p:cNvSpPr txBox="1"/>
+          <p:nvPr/>
+        </p:nvSpPr>
+        <p:spPr>
+          <a:xfrm>
+            <a:off x="640080" y="1691640"/>
+            <a:ext cx="10698480" cy="731520"/>
+          </a:xfrm>
+          <a:prstGeom prst="rect">
+            <a:avLst/>
+          </a:prstGeom>
+          <a:noFill/>
+        </p:spPr>
+        <p:txBody>
+          <a:bodyPr wrap="square" lIns="73152" rIns="73152" tIns="54864" bIns="54864">
+            <a:spAutoFit/>
+          </a:bodyPr>
+          <a:lstStyle/>
+          <a:p>
+            <a:pPr algn="l">
+              <a:defRPr sz="1700" b="1">
+                <a:solidFill>
+                  <a:srgbClr val="0F172A"/>
+                </a:solidFill>
+                <a:latin typeface="Arial"/>
+              </a:defRPr>
+            </a:pPr>
+            <a:r>
+              <a:t>❓ Để tìm chính xác cụm từ 'dự báo thời tiết Đà Lạt', em nên gõ như thế nào vào Google?</a:t>
+            </a:r>
+          </a:p>
+        </p:txBody>
+      </p:sp>
+      <p:sp>
+        <p:nvSpPr>
+          <p:cNvPr id="8" name="Rounded Rectangle 7"/>
+          <p:cNvSpPr/>
+          <p:nvPr/>
+        </p:nvSpPr>
+        <p:spPr>
+          <a:xfrm>
+            <a:off x="365760" y="2651760"/>
+            <a:ext cx="5440680" cy="1325879"/>
+          </a:xfrm>
+          <a:prstGeom prst="roundRect">
+            <a:avLst/>
+          </a:prstGeom>
+          <a:solidFill>
+            <a:srgbClr val="FFFFFF"/>
+          </a:solidFill>
+          <a:ln w="19050">
+            <a:solidFill>
+              <a:srgbClr val="CBD5E1"/>
+            </a:solidFill>
+          </a:ln>
+        </p:spPr>
+        <p:style>
+          <a:lnRef idx="1">
+            <a:schemeClr val="accent1"/>
+          </a:lnRef>
+          <a:fillRef idx="3">
+            <a:schemeClr val="accent1"/>
+          </a:fillRef>
+          <a:effectRef idx="2">
+            <a:schemeClr val="accent1"/>
+          </a:effectRef>
+          <a:fontRef idx="minor">
+            <a:schemeClr val="lt1"/>
+          </a:fontRef>
+        </p:style>
+        <p:txBody>
+          <a:bodyPr rtlCol="0" anchor="ctr"/>
+          <a:lstStyle/>
+          <a:p>
+            <a:pPr algn="ctr"/>
+          </a:p>
+        </p:txBody>
+      </p:sp>
+      <p:sp>
+        <p:nvSpPr>
+          <p:cNvPr id="9" name="Oval 8"/>
+          <p:cNvSpPr/>
+          <p:nvPr/>
+        </p:nvSpPr>
+        <p:spPr>
+          <a:xfrm>
+            <a:off x="548640" y="2880360"/>
+            <a:ext cx="822960" cy="822959"/>
+          </a:xfrm>
+          <a:prstGeom prst="ellipse">
+            <a:avLst/>
+          </a:prstGeom>
+          <a:solidFill>
+            <a:srgbClr val="BE185D"/>
+          </a:solidFill>
+          <a:ln>
+            <a:noFill/>
+          </a:ln>
+        </p:spPr>
+        <p:style>
+          <a:lnRef idx="1">
+            <a:schemeClr val="accent1"/>
+          </a:lnRef>
+          <a:fillRef idx="3">
+            <a:schemeClr val="accent1"/>
+          </a:fillRef>
+          <a:effectRef idx="2">
+            <a:schemeClr val="accent1"/>
+          </a:effectRef>
+          <a:fontRef idx="minor">
+            <a:schemeClr val="lt1"/>
+          </a:fontRef>
+        </p:style>
+        <p:txBody>
+          <a:bodyPr rtlCol="0" anchor="ctr"/>
+          <a:lstStyle/>
+          <a:p>
+            <a:pPr algn="ctr"/>
+          </a:p>
+        </p:txBody>
+      </p:sp>
+      <p:sp>
+        <p:nvSpPr>
+          <p:cNvPr id="10" name="TextBox 9"/>
+          <p:cNvSpPr txBox="1"/>
+          <p:nvPr/>
+        </p:nvSpPr>
+        <p:spPr>
+          <a:xfrm>
+            <a:off x="548640" y="3063240"/>
+            <a:ext cx="822960" cy="457200"/>
+          </a:xfrm>
+          <a:prstGeom prst="rect">
+            <a:avLst/>
+          </a:prstGeom>
+          <a:noFill/>
+        </p:spPr>
+        <p:txBody>
+          <a:bodyPr wrap="square" lIns="73152" rIns="73152" tIns="54864" bIns="54864">
+            <a:spAutoFit/>
+          </a:bodyPr>
+          <a:lstStyle/>
+          <a:p>
+            <a:pPr algn="ctr">
+              <a:defRPr sz="1800" b="1">
+                <a:solidFill>
+                  <a:srgbClr val="FFFFFF"/>
+                </a:solidFill>
+                <a:latin typeface="Arial"/>
+              </a:defRPr>
+            </a:pPr>
+            <a:r>
+              <a:t>A.</a:t>
+            </a:r>
+          </a:p>
+        </p:txBody>
+      </p:sp>
+      <p:sp>
+        <p:nvSpPr>
+          <p:cNvPr id="11" name="TextBox 10"/>
+          <p:cNvSpPr txBox="1"/>
+          <p:nvPr/>
+        </p:nvSpPr>
+        <p:spPr>
+          <a:xfrm>
+            <a:off x="1508760" y="2880360"/>
+            <a:ext cx="4160520" cy="960119"/>
+          </a:xfrm>
+          <a:prstGeom prst="rect">
+            <a:avLst/>
+          </a:prstGeom>
+          <a:noFill/>
+        </p:spPr>
+        <p:txBody>
+          <a:bodyPr wrap="square" lIns="73152" rIns="73152" tIns="54864" bIns="54864">
+            <a:spAutoFit/>
+          </a:bodyPr>
+          <a:lstStyle/>
+          <a:p>
+            <a:pPr algn="l">
+              <a:defRPr sz="1500" b="0">
+                <a:solidFill>
+                  <a:srgbClr val="0F172A"/>
+                </a:solidFill>
+                <a:latin typeface="Arial"/>
+              </a:defRPr>
+            </a:pPr>
+            <a:r>
+              <a:t>"dự báo thời tiết Đà Lạt"</a:t>
+            </a:r>
+          </a:p>
+        </p:txBody>
+      </p:sp>
+      <p:sp>
+        <p:nvSpPr>
+          <p:cNvPr id="12" name="Rounded Rectangle 11"/>
+          <p:cNvSpPr/>
+          <p:nvPr/>
+        </p:nvSpPr>
+        <p:spPr>
+          <a:xfrm>
+            <a:off x="6172200" y="2651760"/>
+            <a:ext cx="5440680" cy="1325879"/>
+          </a:xfrm>
+          <a:prstGeom prst="roundRect">
+            <a:avLst/>
+          </a:prstGeom>
+          <a:solidFill>
+            <a:srgbClr val="FFFFFF"/>
+          </a:solidFill>
+          <a:ln w="19050">
+            <a:solidFill>
+              <a:srgbClr val="CBD5E1"/>
+            </a:solidFill>
+          </a:ln>
+        </p:spPr>
+        <p:style>
+          <a:lnRef idx="1">
+            <a:schemeClr val="accent1"/>
+          </a:lnRef>
+          <a:fillRef idx="3">
+            <a:schemeClr val="accent1"/>
+          </a:fillRef>
+          <a:effectRef idx="2">
+            <a:schemeClr val="accent1"/>
+          </a:effectRef>
+          <a:fontRef idx="minor">
+            <a:schemeClr val="lt1"/>
+          </a:fontRef>
+        </p:style>
+        <p:txBody>
+          <a:bodyPr rtlCol="0" anchor="ctr"/>
+          <a:lstStyle/>
+          <a:p>
+            <a:pPr algn="ctr"/>
+          </a:p>
+        </p:txBody>
+      </p:sp>
+      <p:sp>
+        <p:nvSpPr>
+          <p:cNvPr id="13" name="Oval 12"/>
+          <p:cNvSpPr/>
+          <p:nvPr/>
+        </p:nvSpPr>
+        <p:spPr>
+          <a:xfrm>
+            <a:off x="6355080" y="2880360"/>
+            <a:ext cx="822960" cy="822959"/>
+          </a:xfrm>
+          <a:prstGeom prst="ellipse">
+            <a:avLst/>
+          </a:prstGeom>
+          <a:solidFill>
+            <a:srgbClr val="0D9488"/>
+          </a:solidFill>
+          <a:ln>
+            <a:noFill/>
+          </a:ln>
+        </p:spPr>
+        <p:style>
+          <a:lnRef idx="1">
+            <a:schemeClr val="accent1"/>
+          </a:lnRef>
+          <a:fillRef idx="3">
+            <a:schemeClr val="accent1"/>
+          </a:fillRef>
+          <a:effectRef idx="2">
+            <a:schemeClr val="accent1"/>
+          </a:effectRef>
+          <a:fontRef idx="minor">
+            <a:schemeClr val="lt1"/>
+          </a:fontRef>
+        </p:style>
+        <p:txBody>
+          <a:bodyPr rtlCol="0" anchor="ctr"/>
+          <a:lstStyle/>
+          <a:p>
+            <a:pPr algn="ctr"/>
+          </a:p>
+        </p:txBody>
+      </p:sp>
+      <p:sp>
+        <p:nvSpPr>
+          <p:cNvPr id="14" name="TextBox 13"/>
+          <p:cNvSpPr txBox="1"/>
+          <p:nvPr/>
+        </p:nvSpPr>
+        <p:spPr>
+          <a:xfrm>
+            <a:off x="6355080" y="3063240"/>
+            <a:ext cx="822960" cy="457200"/>
+          </a:xfrm>
+          <a:prstGeom prst="rect">
+            <a:avLst/>
+          </a:prstGeom>
+          <a:noFill/>
+        </p:spPr>
+        <p:txBody>
+          <a:bodyPr wrap="square" lIns="73152" rIns="73152" tIns="54864" bIns="54864">
+            <a:spAutoFit/>
+          </a:bodyPr>
+          <a:lstStyle/>
+          <a:p>
+            <a:pPr algn="ctr">
+              <a:defRPr sz="1800" b="1">
+                <a:solidFill>
+                  <a:srgbClr val="FFFFFF"/>
+                </a:solidFill>
+                <a:latin typeface="Arial"/>
+              </a:defRPr>
+            </a:pPr>
+            <a:r>
+              <a:t>B.</a:t>
+            </a:r>
+          </a:p>
+        </p:txBody>
+      </p:sp>
+      <p:sp>
+        <p:nvSpPr>
+          <p:cNvPr id="15" name="TextBox 14"/>
+          <p:cNvSpPr txBox="1"/>
+          <p:nvPr/>
+        </p:nvSpPr>
+        <p:spPr>
+          <a:xfrm>
+            <a:off x="7315200" y="2880360"/>
+            <a:ext cx="4160520" cy="960119"/>
+          </a:xfrm>
+          <a:prstGeom prst="rect">
+            <a:avLst/>
+          </a:prstGeom>
+          <a:noFill/>
+        </p:spPr>
+        <p:txBody>
+          <a:bodyPr wrap="square" lIns="73152" rIns="73152" tIns="54864" bIns="54864">
+            <a:spAutoFit/>
+          </a:bodyPr>
+          <a:lstStyle/>
+          <a:p>
+            <a:pPr algn="l">
+              <a:defRPr sz="1500" b="0">
+                <a:solidFill>
+                  <a:srgbClr val="0F172A"/>
+                </a:solidFill>
+                <a:latin typeface="Arial"/>
+              </a:defRPr>
+            </a:pPr>
+            <a:r>
+              <a:t>thời tiết và mọi thứ ở Đà Lạt</a:t>
+            </a:r>
+          </a:p>
+        </p:txBody>
+      </p:sp>
+      <p:sp>
+        <p:nvSpPr>
+          <p:cNvPr id="16" name="Rounded Rectangle 15"/>
+          <p:cNvSpPr/>
+          <p:nvPr/>
+        </p:nvSpPr>
+        <p:spPr>
+          <a:xfrm>
+            <a:off x="365760" y="4114800"/>
+            <a:ext cx="5440680" cy="1325880"/>
+          </a:xfrm>
+          <a:prstGeom prst="roundRect">
+            <a:avLst/>
+          </a:prstGeom>
+          <a:solidFill>
+            <a:srgbClr val="FFFFFF"/>
+          </a:solidFill>
+          <a:ln w="19050">
+            <a:solidFill>
+              <a:srgbClr val="CBD5E1"/>
+            </a:solidFill>
+          </a:ln>
+        </p:spPr>
+        <p:style>
+          <a:lnRef idx="1">
+            <a:schemeClr val="accent1"/>
+          </a:lnRef>
+          <a:fillRef idx="3">
+            <a:schemeClr val="accent1"/>
+          </a:fillRef>
+          <a:effectRef idx="2">
+            <a:schemeClr val="accent1"/>
+          </a:effectRef>
+          <a:fontRef idx="minor">
+            <a:schemeClr val="lt1"/>
+          </a:fontRef>
+        </p:style>
+        <p:txBody>
+          <a:bodyPr rtlCol="0" anchor="ctr"/>
+          <a:lstStyle/>
+          <a:p>
+            <a:pPr algn="ctr"/>
+          </a:p>
+        </p:txBody>
+      </p:sp>
+      <p:sp>
+        <p:nvSpPr>
+          <p:cNvPr id="17" name="Oval 16"/>
+          <p:cNvSpPr/>
+          <p:nvPr/>
+        </p:nvSpPr>
+        <p:spPr>
+          <a:xfrm>
+            <a:off x="548640" y="4343400"/>
+            <a:ext cx="822960" cy="822960"/>
+          </a:xfrm>
+          <a:prstGeom prst="ellipse">
+            <a:avLst/>
+          </a:prstGeom>
+          <a:solidFill>
+            <a:srgbClr val="D97706"/>
+          </a:solidFill>
+          <a:ln>
+            <a:noFill/>
+          </a:ln>
+        </p:spPr>
+        <p:style>
+          <a:lnRef idx="1">
+            <a:schemeClr val="accent1"/>
+          </a:lnRef>
+          <a:fillRef idx="3">
+            <a:schemeClr val="accent1"/>
+          </a:fillRef>
+          <a:effectRef idx="2">
+            <a:schemeClr val="accent1"/>
+          </a:effectRef>
+          <a:fontRef idx="minor">
+            <a:schemeClr val="lt1"/>
+          </a:fontRef>
+        </p:style>
+        <p:txBody>
+          <a:bodyPr rtlCol="0" anchor="ctr"/>
+          <a:lstStyle/>
+          <a:p>
+            <a:pPr algn="ctr"/>
+          </a:p>
+        </p:txBody>
+      </p:sp>
+      <p:sp>
+        <p:nvSpPr>
+          <p:cNvPr id="18" name="TextBox 17"/>
+          <p:cNvSpPr txBox="1"/>
+          <p:nvPr/>
+        </p:nvSpPr>
+        <p:spPr>
+          <a:xfrm>
+            <a:off x="548640" y="4526280"/>
+            <a:ext cx="822960" cy="457200"/>
+          </a:xfrm>
+          <a:prstGeom prst="rect">
+            <a:avLst/>
+          </a:prstGeom>
+          <a:noFill/>
+        </p:spPr>
+        <p:txBody>
+          <a:bodyPr wrap="square" lIns="73152" rIns="73152" tIns="54864" bIns="54864">
+            <a:spAutoFit/>
+          </a:bodyPr>
+          <a:lstStyle/>
+          <a:p>
+            <a:pPr algn="ctr">
+              <a:defRPr sz="1800" b="1">
+                <a:solidFill>
+                  <a:srgbClr val="FFFFFF"/>
+                </a:solidFill>
+                <a:latin typeface="Arial"/>
+              </a:defRPr>
+            </a:pPr>
+            <a:r>
+              <a:t>C.</a:t>
+            </a:r>
+          </a:p>
+        </p:txBody>
+      </p:sp>
+      <p:sp>
+        <p:nvSpPr>
+          <p:cNvPr id="19" name="TextBox 18"/>
+          <p:cNvSpPr txBox="1"/>
+          <p:nvPr/>
+        </p:nvSpPr>
+        <p:spPr>
+          <a:xfrm>
+            <a:off x="1508760" y="4343400"/>
+            <a:ext cx="4160520" cy="960119"/>
+          </a:xfrm>
+          <a:prstGeom prst="rect">
+            <a:avLst/>
+          </a:prstGeom>
+          <a:noFill/>
+        </p:spPr>
+        <p:txBody>
+          <a:bodyPr wrap="square" lIns="73152" rIns="73152" tIns="54864" bIns="54864">
+            <a:spAutoFit/>
+          </a:bodyPr>
+          <a:lstStyle/>
+          <a:p>
+            <a:pPr algn="l">
+              <a:defRPr sz="1500" b="0">
+                <a:solidFill>
+                  <a:srgbClr val="0F172A"/>
+                </a:solidFill>
+                <a:latin typeface="Arial"/>
+              </a:defRPr>
+            </a:pPr>
+            <a:r>
+              <a:t>tìm cho tôi thời tiết</a:t>
+            </a:r>
+          </a:p>
+        </p:txBody>
+      </p:sp>
+      <p:sp>
+        <p:nvSpPr>
+          <p:cNvPr id="20" name="Rounded Rectangle 19"/>
+          <p:cNvSpPr/>
+          <p:nvPr/>
+        </p:nvSpPr>
+        <p:spPr>
+          <a:xfrm>
+            <a:off x="6172200" y="4114800"/>
+            <a:ext cx="5440680" cy="1325880"/>
+          </a:xfrm>
+          <a:prstGeom prst="roundRect">
+            <a:avLst/>
+          </a:prstGeom>
+          <a:solidFill>
+            <a:srgbClr val="FFFFFF"/>
+          </a:solidFill>
+          <a:ln w="19050">
+            <a:solidFill>
+              <a:srgbClr val="CBD5E1"/>
+            </a:solidFill>
+          </a:ln>
+        </p:spPr>
+        <p:style>
+          <a:lnRef idx="1">
+            <a:schemeClr val="accent1"/>
+          </a:lnRef>
+          <a:fillRef idx="3">
+            <a:schemeClr val="accent1"/>
+          </a:fillRef>
+          <a:effectRef idx="2">
+            <a:schemeClr val="accent1"/>
+          </a:effectRef>
+          <a:fontRef idx="minor">
+            <a:schemeClr val="lt1"/>
+          </a:fontRef>
+        </p:style>
+        <p:txBody>
+          <a:bodyPr rtlCol="0" anchor="ctr"/>
+          <a:lstStyle/>
+          <a:p>
+            <a:pPr algn="ctr"/>
+          </a:p>
+        </p:txBody>
+      </p:sp>
+      <p:sp>
+        <p:nvSpPr>
+          <p:cNvPr id="21" name="Oval 20"/>
+          <p:cNvSpPr/>
+          <p:nvPr/>
+        </p:nvSpPr>
+        <p:spPr>
+          <a:xfrm>
+            <a:off x="6355080" y="4343400"/>
+            <a:ext cx="822960" cy="822960"/>
+          </a:xfrm>
+          <a:prstGeom prst="ellipse">
+            <a:avLst/>
+          </a:prstGeom>
+          <a:solidFill>
+            <a:srgbClr val="7C3AED"/>
+          </a:solidFill>
+          <a:ln>
+            <a:noFill/>
+          </a:ln>
+        </p:spPr>
+        <p:style>
+          <a:lnRef idx="1">
+            <a:schemeClr val="accent1"/>
+          </a:lnRef>
+          <a:fillRef idx="3">
+            <a:schemeClr val="accent1"/>
+          </a:fillRef>
+          <a:effectRef idx="2">
+            <a:schemeClr val="accent1"/>
+          </a:effectRef>
+          <a:fontRef idx="minor">
+            <a:schemeClr val="lt1"/>
+          </a:fontRef>
+        </p:style>
+        <p:txBody>
+          <a:bodyPr rtlCol="0" anchor="ctr"/>
+          <a:lstStyle/>
+          <a:p>
+            <a:pPr algn="ctr"/>
+          </a:p>
+        </p:txBody>
+      </p:sp>
+      <p:sp>
+        <p:nvSpPr>
+          <p:cNvPr id="22" name="TextBox 21"/>
+          <p:cNvSpPr txBox="1"/>
+          <p:nvPr/>
+        </p:nvSpPr>
+        <p:spPr>
+          <a:xfrm>
+            <a:off x="6355080" y="4526280"/>
+            <a:ext cx="822960" cy="457200"/>
+          </a:xfrm>
+          <a:prstGeom prst="rect">
+            <a:avLst/>
+          </a:prstGeom>
+          <a:noFill/>
+        </p:spPr>
+        <p:txBody>
+          <a:bodyPr wrap="square" lIns="73152" rIns="73152" tIns="54864" bIns="54864">
+            <a:spAutoFit/>
+          </a:bodyPr>
+          <a:lstStyle/>
+          <a:p>
+            <a:pPr algn="ctr">
+              <a:defRPr sz="1800" b="1">
+                <a:solidFill>
+                  <a:srgbClr val="FFFFFF"/>
+                </a:solidFill>
+                <a:latin typeface="Arial"/>
+              </a:defRPr>
+            </a:pPr>
+            <a:r>
+              <a:t>D.</a:t>
+            </a:r>
+          </a:p>
+        </p:txBody>
+      </p:sp>
+      <p:sp>
+        <p:nvSpPr>
+          <p:cNvPr id="23" name="TextBox 22"/>
+          <p:cNvSpPr txBox="1"/>
+          <p:nvPr/>
+        </p:nvSpPr>
+        <p:spPr>
+          <a:xfrm>
+            <a:off x="7315200" y="4343400"/>
+            <a:ext cx="4160520" cy="960119"/>
+          </a:xfrm>
+          <a:prstGeom prst="rect">
+            <a:avLst/>
+          </a:prstGeom>
+          <a:noFill/>
+        </p:spPr>
+        <p:txBody>
+          <a:bodyPr wrap="square" lIns="73152" rIns="73152" tIns="54864" bIns="54864">
+            <a:spAutoFit/>
+          </a:bodyPr>
+          <a:lstStyle/>
+          <a:p>
+            <a:pPr algn="l">
+              <a:defRPr sz="1500" b="0">
+                <a:solidFill>
+                  <a:srgbClr val="0F172A"/>
+                </a:solidFill>
+                <a:latin typeface="Arial"/>
+              </a:defRPr>
+            </a:pPr>
+            <a:r>
+              <a:t>da lat hom nay the nao</a:t>
+            </a:r>
+          </a:p>
+        </p:txBody>
+      </p:sp>
+    </p:spTree>
+  </p:cSld>
+  <p:clrMapOvr>
+    <a:masterClrMapping/>
+  </p:clrMapOvr>
+  <p:transition spd="med">
+    <p:fade/>
+  </p:transition>
+</p:sld>
+</file>
+
+<file path=ppt/slides/slide8.xml><?xml version="1.0" encoding="utf-8"?>
 <p:sld xmlns:a="http://schemas.openxmlformats.org/drawingml/2006/main" xmlns:p="http://schemas.openxmlformats.org/presentationml/2006/main" xmlns:r="http://schemas.openxmlformats.org/officeDocument/2006/relationships">
   <p:cSld>
     <p:spTree>

--- a/KHBD_Tin_học/Lớp_5/Tuần_04/Slide_Tin_hoc_Lớp_5_Tiet03_Bai_3_Tim_kiem_thong_tin.pptx
+++ b/KHBD_Tin_học/Lớp_5/Tuần_04/Slide_Tin_hoc_Lớp_5_Tiet03_Bai_3_Tim_kiem_thong_tin.pptx
@@ -5578,7 +5578,7 @@
               </a:defRPr>
             </a:pPr>
             <a:r>
-              <a:t>Quy trình tìm kiếm và kiểm chứng thông tin</a:t>
+              <a:t>Sơ đồ 4 bước tìm kiếm thông tin chính xác</a:t>
             </a:r>
           </a:p>
         </p:txBody>
@@ -5592,7 +5592,7 @@
         <p:spPr>
           <a:xfrm>
             <a:off x="365760" y="1645920"/>
-            <a:ext cx="4754880" cy="868680"/>
+            <a:ext cx="4389120" cy="868680"/>
           </a:xfrm>
           <a:prstGeom prst="chevron">
             <a:avLst/>
@@ -5634,8 +5634,8 @@
         </p:nvSpPr>
         <p:spPr>
           <a:xfrm>
-            <a:off x="640080" y="1719072"/>
-            <a:ext cx="4206240" cy="731520"/>
+            <a:off x="594360" y="1719072"/>
+            <a:ext cx="3840480" cy="731520"/>
           </a:xfrm>
           <a:prstGeom prst="rect">
             <a:avLst/>
@@ -5657,7 +5657,7 @@
               </a:defRPr>
             </a:pPr>
             <a:r>
-              <a:t>Bước 1: Xác định rõ thông tin cần tìm</a:t>
+              <a:t>Bước 1: Xác định thông tin</a:t>
             </a:r>
           </a:p>
         </p:txBody>
@@ -5671,7 +5671,7 @@
         <p:spPr>
           <a:xfrm>
             <a:off x="365760" y="2624328"/>
-            <a:ext cx="4754880" cy="868680"/>
+            <a:ext cx="4389120" cy="868680"/>
           </a:xfrm>
           <a:prstGeom prst="chevron">
             <a:avLst/>
@@ -5713,8 +5713,8 @@
         </p:nvSpPr>
         <p:spPr>
           <a:xfrm>
-            <a:off x="640080" y="2697480"/>
-            <a:ext cx="4206240" cy="731519"/>
+            <a:off x="594360" y="2697480"/>
+            <a:ext cx="3840480" cy="731519"/>
           </a:xfrm>
           <a:prstGeom prst="rect">
             <a:avLst/>
@@ -5736,7 +5736,7 @@
               </a:defRPr>
             </a:pPr>
             <a:r>
-              <a:t>Bước 2: Chọn từ khóa phù hợp đặt trong " "</a:t>
+              <a:t>Bước 2: Chọn từ khóa " "</a:t>
             </a:r>
           </a:p>
         </p:txBody>
@@ -5750,7 +5750,7 @@
         <p:spPr>
           <a:xfrm>
             <a:off x="365760" y="3602736"/>
-            <a:ext cx="4754880" cy="868679"/>
+            <a:ext cx="4389120" cy="868679"/>
           </a:xfrm>
           <a:prstGeom prst="chevron">
             <a:avLst/>
@@ -5792,8 +5792,8 @@
         </p:nvSpPr>
         <p:spPr>
           <a:xfrm>
-            <a:off x="640080" y="3675887"/>
-            <a:ext cx="4206240" cy="731519"/>
+            <a:off x="594360" y="3675887"/>
+            <a:ext cx="3840480" cy="731519"/>
           </a:xfrm>
           <a:prstGeom prst="rect">
             <a:avLst/>
@@ -5815,7 +5815,7 @@
               </a:defRPr>
             </a:pPr>
             <a:r>
-              <a:t>Bước 3: Ưu tiên website uy tín (.gov.vn, .edu.vn)</a:t>
+              <a:t>Bước 3: Chọn nguồn uy tín</a:t>
             </a:r>
           </a:p>
         </p:txBody>
@@ -5829,7 +5829,7 @@
         <p:spPr>
           <a:xfrm>
             <a:off x="365760" y="4581144"/>
-            <a:ext cx="4754880" cy="868680"/>
+            <a:ext cx="4389120" cy="868680"/>
           </a:xfrm>
           <a:prstGeom prst="chevron">
             <a:avLst/>
@@ -5871,8 +5871,8 @@
         </p:nvSpPr>
         <p:spPr>
           <a:xfrm>
-            <a:off x="640080" y="4654296"/>
-            <a:ext cx="4206240" cy="731519"/>
+            <a:off x="594360" y="4654296"/>
+            <a:ext cx="3840480" cy="731519"/>
           </a:xfrm>
           <a:prstGeom prst="rect">
             <a:avLst/>
@@ -5894,7 +5894,7 @@
               </a:defRPr>
             </a:pPr>
             <a:r>
-              <a:t>Bước 4: Tổng hợp &amp; áp dụng giải quyết vấn đề</a:t>
+              <a:t>Bước 4: Tổng hợp &amp; áp dụng</a:t>
             </a:r>
           </a:p>
         </p:txBody>
@@ -5907,8 +5907,8 @@
         </p:nvSpPr>
         <p:spPr>
           <a:xfrm>
-            <a:off x="5394960" y="1645920"/>
-            <a:ext cx="6309360" cy="3977639"/>
+            <a:off x="5029200" y="1645920"/>
+            <a:ext cx="6675120" cy="3977639"/>
           </a:xfrm>
           <a:prstGeom prst="roundRect">
             <a:avLst/>
@@ -5946,7 +5946,7 @@
       </p:sp>
       <p:pic>
         <p:nvPicPr>
-          <p:cNvPr id="15" name="Picture 14" descr="ai_lop5_bai3_search.jpg"/>
+          <p:cNvPr id="15" name="Picture 14" descr="lop5_bai3_quy_trinh_tim_kiem_4buoc.png"/>
           <p:cNvPicPr>
             <a:picLocks noChangeAspect="1"/>
           </p:cNvPicPr>
@@ -5960,8 +5960,8 @@
         </p:blipFill>
         <p:spPr>
           <a:xfrm>
-            <a:off x="5486400" y="1737360"/>
-            <a:ext cx="6126480" cy="3794760"/>
+            <a:off x="5120640" y="1737360"/>
+            <a:ext cx="6492240" cy="3794760"/>
           </a:xfrm>
           <a:prstGeom prst="rect">
             <a:avLst/>

--- a/KHBD_Tin_học/Lớp_5/Tuần_04/Slide_Tin_hoc_Lớp_5_Tiet03_Bai_3_Tim_kiem_thong_tin.pptx
+++ b/KHBD_Tin_học/Lớp_5/Tuần_04/Slide_Tin_hoc_Lớp_5_Tiet03_Bai_3_Tim_kiem_thong_tin.pptx
@@ -5578,7 +5578,7 @@
               </a:defRPr>
             </a:pPr>
             <a:r>
-              <a:t>Sơ đồ 4 bước tìm kiếm thông tin chính xác</a:t>
+              <a:t>Quy trình 4 bước tìm kiếm thông tin chính xác</a:t>
             </a:r>
           </a:p>
         </p:txBody>
@@ -5946,7 +5946,7 @@
       </p:sp>
       <p:pic>
         <p:nvPicPr>
-          <p:cNvPr id="15" name="Picture 14" descr="lop5_bai3_quy_trinh_tim_kiem_4buoc.png"/>
+          <p:cNvPr id="15" name="Picture 14" descr="ai_lop5_bai3_search_flow.jpg"/>
           <p:cNvPicPr>
             <a:picLocks noChangeAspect="1"/>
           </p:cNvPicPr>
